--- a/examples/consulting-ai-transformation/run/slides/s02-opportunities/deliverables/slide.pptx
+++ b/examples/consulting-ai-transformation/run/slides/s02-opportunities/deliverables/slide.pptx
@@ -114,19 +114,9 @@
   <c:chart>
     <c:autoTitleDeleted val="1"/>
     <c:plotArea>
-      <c:layout>
-        <c:manualLayout>
-          <c:layoutTarget val="inner"/>
-          <c:xMode val="edge"/>
-          <c:yMode val="edge"/>
-          <c:x val="0.20967741935483872"/>
-          <c:y val="0"/>
-          <c:w val="0.5693548387096774"/>
-          <c:h val="1"/>
-        </c:manualLayout>
-      </c:layout>
+      <c:layout/>
       <c:barChart>
-        <c:barDir val="bar"/>
+        <c:barDir val="col"/>
         <c:grouping val="clustered"/>
         <c:varyColors val="0"/>
         <c:ser>
@@ -151,15 +141,15 @@
           </c:spPr>
           <c:invertIfNegative val="0"/>
           <c:dLbls>
-            <c:numFmt formatCode="#,##0&quot; h&quot;" sourceLinked="0"/>
+            <c:numFmt formatCode="#,##0" sourceLinked="0"/>
             <c:txPr>
               <a:bodyPr wrap="none"/>
               <a:lstStyle/>
               <a:p>
                 <a:pPr>
-                  <a:defRPr b="0" i="0" strike="noStrike" sz="1800" u="none">
+                  <a:defRPr b="0" i="0" strike="noStrike" sz="1200" u="none">
                     <a:solidFill>
-                      <a:srgbClr val="FD5108"/>
+                      <a:srgbClr val="000000"/>
                     </a:solidFill>
                     <a:latin typeface="Arial"/>
                   </a:defRPr>
@@ -192,7 +182,7 @@
             <c:bubble3D val="0"/>
             <c:spPr>
               <a:solidFill>
-                <a:srgbClr val="A1A8B3"/>
+                <a:srgbClr val="FF955F"/>
               </a:solidFill>
               <a:effectLst/>
             </c:spPr>
@@ -203,7 +193,7 @@
             <c:bubble3D val="0"/>
             <c:spPr>
               <a:solidFill>
-                <a:srgbClr val="CBD1D6"/>
+                <a:srgbClr val="FFC099"/>
               </a:solidFill>
               <a:effectLst/>
             </c:spPr>
@@ -250,15 +240,15 @@
           </c:val>
         </c:ser>
         <c:dLbls>
-          <c:numFmt formatCode="#,##0&quot; h&quot;" sourceLinked="0"/>
+          <c:numFmt formatCode="#,##0" sourceLinked="0"/>
           <c:txPr>
             <a:bodyPr wrap="none"/>
             <a:lstStyle/>
             <a:p>
               <a:pPr>
-                <a:defRPr b="0" i="0" strike="noStrike" sz="1800" u="none">
+                <a:defRPr b="0" i="0" strike="noStrike" sz="1200" u="none">
                   <a:solidFill>
-                    <a:srgbClr val="FD5108"/>
+                    <a:srgbClr val="000000"/>
                   </a:solidFill>
                   <a:latin typeface="Arial"/>
                 </a:defRPr>
@@ -274,7 +264,7 @@
           <c:showBubbleSize val="0"/>
           <c:showLeaderLines val="0"/>
         </c:dLbls>
-        <c:gapWidth val="50"/>
+        <c:gapWidth val="55"/>
         <c:overlap val="0"/>
         <c:axId val="2094734554"/>
         <c:axId val="2094734552"/>
@@ -283,14 +273,14 @@
       <c:catAx>
         <c:axId val="2094734554"/>
         <c:scaling>
-          <c:orientation val="maxMin"/>
+          <c:orientation val="minMax"/>
         </c:scaling>
         <c:delete val="0"/>
-        <c:axPos val="l"/>
+        <c:axPos val="b"/>
         <c:numFmt formatCode="General" sourceLinked="1"/>
         <c:majorTickMark val="out"/>
         <c:minorTickMark val="none"/>
-        <c:tickLblPos val="nextTo"/>
+        <c:tickLblPos val="low"/>
         <c:spPr>
           <a:ln w="12700" cap="flat">
             <a:solidFill>
@@ -325,16 +315,16 @@
         <c:axId val="2094734552"/>
         <c:scaling>
           <c:orientation val="minMax"/>
-          <c:max val="1944"/>
+          <c:max val="2500"/>
           <c:min val="0"/>
         </c:scaling>
-        <c:delete val="1"/>
-        <c:axPos val="b"/>
+        <c:delete val="0"/>
+        <c:axPos val="l"/>
         <c:majorGridlines>
           <c:spPr>
             <a:ln w="12700" cap="flat">
               <a:solidFill>
-                <a:srgbClr val="FFFFFF"/>
+                <a:srgbClr val="DFE3E6"/>
               </a:solidFill>
               <a:prstDash val="solid"/>
               <a:round/>
@@ -344,7 +334,7 @@
         <c:numFmt formatCode="General" sourceLinked="0"/>
         <c:majorTickMark val="out"/>
         <c:minorTickMark val="none"/>
-        <c:tickLblPos val="low"/>
+        <c:tickLblPos val="nextTo"/>
         <c:spPr>
           <a:ln w="12700" cap="flat">
             <a:solidFill>
@@ -797,7 +787,10 @@
               <a:t>This is an illustrative planning model for fictional Northstar Advisory. Annual capacity assumes 900 engagements. Research uses 900 x 12 baseline hours x 60% adoption x 30% time saved = 1,944 hours. The same formula produces 1,440 proposal hours and 1,080 retrieval hours from the displayed assumptions.
 The three workflow estimates may overlap and cannot be added without checking task boundaries. Capacity released is not a cash saving. Control readiness determines the proposed sequence, and expert review remains required before any client release.
 [SlidePoise sources]
-Generated target visual: /Users/henry/Codes/AI_slide_drafting/output/showcase-revisions/consulting-v3-authoring/slides/s02-opportunities/work/accepted-slide.png</a:t>
+Generated target visual: /private/tmp/.slidepoise-rebuild-h51errnw/slides/s02-opportunities/work/accepted-slide.png
+Canonical asset remix-file-search-line: /Users/henry/Codes/AI_slide_drafting/examples/consulting-ai-transformation/run/work/icon-cache/file-search/remix-file-search-line.svg
+Canonical asset remix-database-2-line: /Users/henry/Codes/AI_slide_drafting/examples/consulting-ai-transformation/run/work/icon-cache/database-2/remix-database-2-line.svg
+Canonical asset remix-user-star-line: /Users/henry/Codes/AI_slide_drafting/examples/consulting-ai-transformation/run/work/icon-cache/user-star/remix-user-star-line.svg</a:t>
             </a:r>
             <a:endParaRPr lang="en-US" dirty="0"/>
           </a:p>
@@ -1511,95 +1504,14 @@
       </p:grpSpPr>
       <p:sp>
         <p:nvSpPr>
-          <p:cNvPr id="2" name="introduction-rule"/>
+          <p:cNvPr id="2" name="formula-strip"/>
           <p:cNvSpPr/>
           <p:nvPr/>
         </p:nvSpPr>
         <p:spPr>
           <a:xfrm>
-            <a:off x="304800" y="1454150"/>
-            <a:ext cx="11582400" cy="12700"/>
-          </a:xfrm>
-          <a:prstGeom prst="rect">
-            <a:avLst/>
-          </a:prstGeom>
-          <a:solidFill>
-            <a:srgbClr val="999DA4"/>
-          </a:solidFill>
-          <a:ln w="12700">
-            <a:solidFill>
-              <a:srgbClr val="FFFFFF">
-                <a:alpha val="0"/>
-              </a:srgbClr>
-            </a:solidFill>
-            <a:prstDash val="solid"/>
-          </a:ln>
-        </p:spPr>
-      </p:sp>
-      <p:sp>
-        <p:nvSpPr>
-          <p:cNvPr id="3" name="reason-divider-1"/>
-          <p:cNvSpPr/>
-          <p:nvPr/>
-        </p:nvSpPr>
-        <p:spPr>
-          <a:xfrm>
-            <a:off x="8775700" y="2800350"/>
-            <a:ext cx="3175000" cy="6350"/>
-          </a:xfrm>
-          <a:prstGeom prst="rect">
-            <a:avLst/>
-          </a:prstGeom>
-          <a:solidFill>
-            <a:srgbClr val="B5B7BA"/>
-          </a:solidFill>
-          <a:ln w="12700">
-            <a:solidFill>
-              <a:srgbClr val="FFFFFF">
-                <a:alpha val="0"/>
-              </a:srgbClr>
-            </a:solidFill>
-            <a:prstDash val="solid"/>
-          </a:ln>
-        </p:spPr>
-      </p:sp>
-      <p:sp>
-        <p:nvSpPr>
-          <p:cNvPr id="4" name="reason-divider-2"/>
-          <p:cNvSpPr/>
-          <p:nvPr/>
-        </p:nvSpPr>
-        <p:spPr>
-          <a:xfrm>
-            <a:off x="8775700" y="3759200"/>
-            <a:ext cx="3175000" cy="6350"/>
-          </a:xfrm>
-          <a:prstGeom prst="rect">
-            <a:avLst/>
-          </a:prstGeom>
-          <a:solidFill>
-            <a:srgbClr val="B5B7BA"/>
-          </a:solidFill>
-          <a:ln w="12700">
-            <a:solidFill>
-              <a:srgbClr val="FFFFFF">
-                <a:alpha val="0"/>
-              </a:srgbClr>
-            </a:solidFill>
-            <a:prstDash val="solid"/>
-          </a:ln>
-        </p:spPr>
-      </p:sp>
-      <p:sp>
-        <p:nvSpPr>
-          <p:cNvPr id="5" name="overlap-note-panel"/>
-          <p:cNvSpPr/>
-          <p:nvPr/>
-        </p:nvSpPr>
-        <p:spPr>
-          <a:xfrm>
-            <a:off x="8775700" y="4737100"/>
-            <a:ext cx="3175000" cy="584200"/>
+            <a:off x="4826000" y="3149600"/>
+            <a:ext cx="7048500" cy="381000"/>
           </a:xfrm>
           <a:prstGeom prst="rect">
             <a:avLst/>
@@ -1619,14 +1531,14 @@
       </p:sp>
       <p:sp>
         <p:nvSpPr>
-          <p:cNvPr id="6" name="decision-band"/>
+          <p:cNvPr id="3" name="decision-band"/>
           <p:cNvSpPr/>
           <p:nvPr/>
         </p:nvSpPr>
         <p:spPr>
           <a:xfrm>
-            <a:off x="304800" y="5441950"/>
-            <a:ext cx="11582400" cy="850900"/>
+            <a:off x="292100" y="5708650"/>
+            <a:ext cx="11607800" cy="590550"/>
           </a:xfrm>
           <a:prstGeom prst="rect">
             <a:avLst/>
@@ -1646,14 +1558,14 @@
       </p:sp>
       <p:sp>
         <p:nvSpPr>
-          <p:cNvPr id="7" name="decision-accent"/>
+          <p:cNvPr id="4" name="decision-accent"/>
           <p:cNvSpPr/>
           <p:nvPr/>
         </p:nvSpPr>
         <p:spPr>
           <a:xfrm>
-            <a:off x="304800" y="5441950"/>
-            <a:ext cx="50800" cy="850900"/>
+            <a:off x="292100" y="5708650"/>
+            <a:ext cx="50800" cy="590550"/>
           </a:xfrm>
           <a:prstGeom prst="rect">
             <a:avLst/>
@@ -1673,13 +1585,13 @@
       </p:sp>
       <p:graphicFrame>
         <p:nvGraphicFramePr>
-          <p:cNvPr id="8" name="annual-capacity-chart" descr=""/>
+          <p:cNvPr id="5" name="annual-capacity-chart" descr=""/>
           <p:cNvGraphicFramePr/>
           <p:nvPr/>
         </p:nvGraphicFramePr>
         <p:xfrm>
-          <a:off x="196850" y="2063750"/>
-          <a:ext cx="3937000" cy="1485900"/>
+          <a:off x="254000" y="1835150"/>
+          <a:ext cx="4191000" cy="1841500"/>
         </p:xfrm>
         <a:graphic xmlns:a="http://schemas.openxmlformats.org/drawingml/2006/main">
           <a:graphicData uri="http://schemas.openxmlformats.org/drawingml/2006/chart">
@@ -1689,7 +1601,7 @@
       </p:graphicFrame>
       <p:graphicFrame>
         <p:nvGraphicFramePr>
-          <p:cNvPr id="9" name="workflow-assumptions"/>
+          <p:cNvPr id="6" name="value-model"/>
           <p:cNvGraphicFramePr>
             <a:graphicFrameLocks noGrp="1"/>
           </p:cNvGraphicFramePr>
@@ -1702,20 +1614,20 @@
           </p:nvPr>
         </p:nvGraphicFramePr>
         <p:xfrm>
-          <a:off x="209550" y="3594100"/>
-          <a:ext cx="3695700" cy="1257300"/>
+          <a:off x="4826000" y="1689100"/>
+          <a:ext cx="7048500" cy="1460500"/>
         </p:xfrm>
         <a:graphic>
           <a:graphicData uri="http://schemas.openxmlformats.org/drawingml/2006/table">
             <a:tbl>
               <a:tblPr/>
               <a:tblGrid>
-                <a:gridCol w="996950"/>
-                <a:gridCol w="920750"/>
-                <a:gridCol w="914400"/>
-                <a:gridCol w="863600"/>
+                <a:gridCol w="1809750"/>
+                <a:gridCol w="1714500"/>
+                <a:gridCol w="1714500"/>
+                <a:gridCol w="1809750"/>
               </a:tblGrid>
-              <a:tr h="317500">
+              <a:tr h="330200">
                 <a:tc>
                   <a:txBody>
                     <a:bodyPr>
@@ -1727,7 +1639,7 @@
                         <a:buNone/>
                       </a:pPr>
                       <a:r>
-                        <a:rPr lang="en-US" sz="1200" b="1" dirty="0">
+                        <a:rPr lang="en-US" sz="1100" b="1" dirty="0">
                           <a:solidFill>
                             <a:srgbClr val="FFFFFF"/>
                           </a:solidFill>
@@ -1737,17 +1649,17 @@
                         </a:rPr>
                         <a:t>Workflow</a:t>
                       </a:r>
-                      <a:endParaRPr lang="en-US" sz="1200" dirty="0">
+                      <a:endParaRPr lang="en-US" sz="1100" dirty="0">
                         <a:latin typeface="Arial" charset="0"/>
                         <a:ea typeface="Arial" charset="0"/>
                         <a:cs typeface="Arial" charset="0"/>
                       </a:endParaRPr>
                     </a:p>
                   </a:txBody>
-                  <a:tcPr marL="63500" marR="63500" marT="63500" marB="63500" anchor="ctr">
+                  <a:tcPr marL="101600" marR="101600" marT="38100" marB="38100" anchor="ctr">
                     <a:lnL w="6350" cap="flat" cmpd="sng" algn="ctr">
                       <a:solidFill>
-                        <a:srgbClr val="AEB2B8"/>
+                        <a:srgbClr val="C6C9CD"/>
                       </a:solidFill>
                       <a:prstDash val="solid"/>
                       <a:round/>
@@ -1756,7 +1668,7 @@
                     </a:lnL>
                     <a:lnR w="6350" cap="flat" cmpd="sng" algn="ctr">
                       <a:solidFill>
-                        <a:srgbClr val="AEB2B8"/>
+                        <a:srgbClr val="C6C9CD"/>
                       </a:solidFill>
                       <a:prstDash val="solid"/>
                       <a:round/>
@@ -1765,7 +1677,7 @@
                     </a:lnR>
                     <a:lnT w="6350" cap="flat" cmpd="sng" algn="ctr">
                       <a:solidFill>
-                        <a:srgbClr val="AEB2B8"/>
+                        <a:srgbClr val="C6C9CD"/>
                       </a:solidFill>
                       <a:prstDash val="solid"/>
                       <a:round/>
@@ -1774,7 +1686,7 @@
                     </a:lnT>
                     <a:lnB w="6350" cap="flat" cmpd="sng" algn="ctr">
                       <a:solidFill>
-                        <a:srgbClr val="AEB2B8"/>
+                        <a:srgbClr val="C6C9CD"/>
                       </a:solidFill>
                       <a:prstDash val="solid"/>
                       <a:round/>
@@ -1797,7 +1709,7 @@
                         <a:buNone/>
                       </a:pPr>
                       <a:r>
-                        <a:rPr lang="en-US" sz="1200" b="1" dirty="0">
+                        <a:rPr lang="en-US" sz="1100" b="1" dirty="0">
                           <a:solidFill>
                             <a:srgbClr val="FFFFFF"/>
                           </a:solidFill>
@@ -1807,17 +1719,17 @@
                         </a:rPr>
                         <a:t>Baseline h</a:t>
                       </a:r>
-                      <a:endParaRPr lang="en-US" sz="1200" dirty="0">
+                      <a:endParaRPr lang="en-US" sz="1100" dirty="0">
                         <a:latin typeface="Arial" charset="0"/>
                         <a:ea typeface="Arial" charset="0"/>
                         <a:cs typeface="Arial" charset="0"/>
                       </a:endParaRPr>
                     </a:p>
                   </a:txBody>
-                  <a:tcPr marL="0" marR="0" marT="0" marB="0" anchor="ctr">
+                  <a:tcPr marL="101600" marR="101600" marT="38100" marB="38100" anchor="ctr">
                     <a:lnL w="6350" cap="flat" cmpd="sng" algn="ctr">
                       <a:solidFill>
-                        <a:srgbClr val="AEB2B8"/>
+                        <a:srgbClr val="C6C9CD"/>
                       </a:solidFill>
                       <a:prstDash val="solid"/>
                       <a:round/>
@@ -1826,7 +1738,7 @@
                     </a:lnL>
                     <a:lnR w="6350" cap="flat" cmpd="sng" algn="ctr">
                       <a:solidFill>
-                        <a:srgbClr val="AEB2B8"/>
+                        <a:srgbClr val="C6C9CD"/>
                       </a:solidFill>
                       <a:prstDash val="solid"/>
                       <a:round/>
@@ -1835,7 +1747,7 @@
                     </a:lnR>
                     <a:lnT w="6350" cap="flat" cmpd="sng" algn="ctr">
                       <a:solidFill>
-                        <a:srgbClr val="AEB2B8"/>
+                        <a:srgbClr val="C6C9CD"/>
                       </a:solidFill>
                       <a:prstDash val="solid"/>
                       <a:round/>
@@ -1844,7 +1756,7 @@
                     </a:lnT>
                     <a:lnB w="6350" cap="flat" cmpd="sng" algn="ctr">
                       <a:solidFill>
-                        <a:srgbClr val="AEB2B8"/>
+                        <a:srgbClr val="C6C9CD"/>
                       </a:solidFill>
                       <a:prstDash val="solid"/>
                       <a:round/>
@@ -1867,7 +1779,7 @@
                         <a:buNone/>
                       </a:pPr>
                       <a:r>
-                        <a:rPr lang="en-US" sz="1200" b="1" dirty="0">
+                        <a:rPr lang="en-US" sz="1100" b="1" dirty="0">
                           <a:solidFill>
                             <a:srgbClr val="FFFFFF"/>
                           </a:solidFill>
@@ -1877,17 +1789,17 @@
                         </a:rPr>
                         <a:t>Adoption</a:t>
                       </a:r>
-                      <a:endParaRPr lang="en-US" sz="1200" dirty="0">
+                      <a:endParaRPr lang="en-US" sz="1100" dirty="0">
                         <a:latin typeface="Arial" charset="0"/>
                         <a:ea typeface="Arial" charset="0"/>
                         <a:cs typeface="Arial" charset="0"/>
                       </a:endParaRPr>
                     </a:p>
                   </a:txBody>
-                  <a:tcPr marL="0" marR="0" marT="0" marB="0" anchor="ctr">
+                  <a:tcPr marL="101600" marR="101600" marT="38100" marB="38100" anchor="ctr">
                     <a:lnL w="6350" cap="flat" cmpd="sng" algn="ctr">
                       <a:solidFill>
-                        <a:srgbClr val="AEB2B8"/>
+                        <a:srgbClr val="C6C9CD"/>
                       </a:solidFill>
                       <a:prstDash val="solid"/>
                       <a:round/>
@@ -1896,7 +1808,7 @@
                     </a:lnL>
                     <a:lnR w="6350" cap="flat" cmpd="sng" algn="ctr">
                       <a:solidFill>
-                        <a:srgbClr val="AEB2B8"/>
+                        <a:srgbClr val="C6C9CD"/>
                       </a:solidFill>
                       <a:prstDash val="solid"/>
                       <a:round/>
@@ -1905,7 +1817,7 @@
                     </a:lnR>
                     <a:lnT w="6350" cap="flat" cmpd="sng" algn="ctr">
                       <a:solidFill>
-                        <a:srgbClr val="AEB2B8"/>
+                        <a:srgbClr val="C6C9CD"/>
                       </a:solidFill>
                       <a:prstDash val="solid"/>
                       <a:round/>
@@ -1914,7 +1826,7 @@
                     </a:lnT>
                     <a:lnB w="6350" cap="flat" cmpd="sng" algn="ctr">
                       <a:solidFill>
-                        <a:srgbClr val="AEB2B8"/>
+                        <a:srgbClr val="C6C9CD"/>
                       </a:solidFill>
                       <a:prstDash val="solid"/>
                       <a:round/>
@@ -1937,7 +1849,7 @@
                         <a:buNone/>
                       </a:pPr>
                       <a:r>
-                        <a:rPr lang="en-US" sz="1200" b="1" dirty="0">
+                        <a:rPr lang="en-US" sz="1100" b="1" dirty="0">
                           <a:solidFill>
                             <a:srgbClr val="FFFFFF"/>
                           </a:solidFill>
@@ -1947,17 +1859,17 @@
                         </a:rPr>
                         <a:t>Time saved</a:t>
                       </a:r>
-                      <a:endParaRPr lang="en-US" sz="1200" dirty="0">
+                      <a:endParaRPr lang="en-US" sz="1100" dirty="0">
                         <a:latin typeface="Arial" charset="0"/>
                         <a:ea typeface="Arial" charset="0"/>
                         <a:cs typeface="Arial" charset="0"/>
                       </a:endParaRPr>
                     </a:p>
                   </a:txBody>
-                  <a:tcPr marL="0" marR="0" marT="0" marB="0" anchor="ctr">
+                  <a:tcPr marL="101600" marR="101600" marT="38100" marB="38100" anchor="ctr">
                     <a:lnL w="6350" cap="flat" cmpd="sng" algn="ctr">
                       <a:solidFill>
-                        <a:srgbClr val="AEB2B8"/>
+                        <a:srgbClr val="C6C9CD"/>
                       </a:solidFill>
                       <a:prstDash val="solid"/>
                       <a:round/>
@@ -1966,7 +1878,7 @@
                     </a:lnL>
                     <a:lnR w="6350" cap="flat" cmpd="sng" algn="ctr">
                       <a:solidFill>
-                        <a:srgbClr val="AEB2B8"/>
+                        <a:srgbClr val="C6C9CD"/>
                       </a:solidFill>
                       <a:prstDash val="solid"/>
                       <a:round/>
@@ -1975,7 +1887,7 @@
                     </a:lnR>
                     <a:lnT w="6350" cap="flat" cmpd="sng" algn="ctr">
                       <a:solidFill>
-                        <a:srgbClr val="AEB2B8"/>
+                        <a:srgbClr val="C6C9CD"/>
                       </a:solidFill>
                       <a:prstDash val="solid"/>
                       <a:round/>
@@ -1984,7 +1896,7 @@
                     </a:lnT>
                     <a:lnB w="6350" cap="flat" cmpd="sng" algn="ctr">
                       <a:solidFill>
-                        <a:srgbClr val="AEB2B8"/>
+                        <a:srgbClr val="C6C9CD"/>
                       </a:solidFill>
                       <a:prstDash val="solid"/>
                       <a:round/>
@@ -1997,7 +1909,7 @@
                   </a:tcPr>
                 </a:tc>
               </a:tr>
-              <a:tr h="311150">
+              <a:tr h="374650">
                 <a:tc>
                   <a:txBody>
                     <a:bodyPr>
@@ -2009,7 +1921,7 @@
                         <a:buNone/>
                       </a:pPr>
                       <a:r>
-                        <a:rPr lang="en-US" sz="1200" b="1" dirty="0">
+                        <a:rPr lang="en-US" sz="1100" b="1" dirty="0">
                           <a:solidFill>
                             <a:srgbClr val="000000"/>
                           </a:solidFill>
@@ -2019,17 +1931,17 @@
                         </a:rPr>
                         <a:t>Research</a:t>
                       </a:r>
-                      <a:endParaRPr lang="en-US" sz="1200" dirty="0">
+                      <a:endParaRPr lang="en-US" sz="1100" dirty="0">
                         <a:latin typeface="Arial" charset="0"/>
                         <a:ea typeface="Arial" charset="0"/>
                         <a:cs typeface="Arial" charset="0"/>
                       </a:endParaRPr>
                     </a:p>
                   </a:txBody>
-                  <a:tcPr marL="63500" marR="63500" marT="63500" marB="63500" anchor="ctr">
+                  <a:tcPr marL="101600" marR="101600" marT="38100" marB="38100" anchor="ctr">
                     <a:lnL w="6350" cap="flat" cmpd="sng" algn="ctr">
                       <a:solidFill>
-                        <a:srgbClr val="AEB2B8"/>
+                        <a:srgbClr val="C6C9CD"/>
                       </a:solidFill>
                       <a:prstDash val="solid"/>
                       <a:round/>
@@ -2038,7 +1950,7 @@
                     </a:lnL>
                     <a:lnR w="6350" cap="flat" cmpd="sng" algn="ctr">
                       <a:solidFill>
-                        <a:srgbClr val="AEB2B8"/>
+                        <a:srgbClr val="C6C9CD"/>
                       </a:solidFill>
                       <a:prstDash val="solid"/>
                       <a:round/>
@@ -2047,7 +1959,7 @@
                     </a:lnR>
                     <a:lnT w="6350" cap="flat" cmpd="sng" algn="ctr">
                       <a:solidFill>
-                        <a:srgbClr val="AEB2B8"/>
+                        <a:srgbClr val="C6C9CD"/>
                       </a:solidFill>
                       <a:prstDash val="solid"/>
                       <a:round/>
@@ -2056,7 +1968,7 @@
                     </a:lnT>
                     <a:lnB w="6350" cap="flat" cmpd="sng" algn="ctr">
                       <a:solidFill>
-                        <a:srgbClr val="AEB2B8"/>
+                        <a:srgbClr val="C6C9CD"/>
                       </a:solidFill>
                       <a:prstDash val="solid"/>
                       <a:round/>
@@ -2079,7 +1991,7 @@
                         <a:buNone/>
                       </a:pPr>
                       <a:r>
-                        <a:rPr lang="en-US" sz="1200" dirty="0">
+                        <a:rPr lang="en-US" sz="1100" dirty="0">
                           <a:solidFill>
                             <a:srgbClr val="000000"/>
                           </a:solidFill>
@@ -2089,17 +2001,17 @@
                         </a:rPr>
                         <a:t>12</a:t>
                       </a:r>
-                      <a:endParaRPr lang="en-US" sz="1200" dirty="0">
+                      <a:endParaRPr lang="en-US" sz="1100" dirty="0">
                         <a:latin typeface="Arial" charset="0"/>
                         <a:ea typeface="Arial" charset="0"/>
                         <a:cs typeface="Arial" charset="0"/>
                       </a:endParaRPr>
                     </a:p>
                   </a:txBody>
-                  <a:tcPr marL="63500" marR="63500" marT="63500" marB="63500" anchor="ctr">
+                  <a:tcPr marL="101600" marR="101600" marT="38100" marB="38100" anchor="ctr">
                     <a:lnL w="6350" cap="flat" cmpd="sng" algn="ctr">
                       <a:solidFill>
-                        <a:srgbClr val="AEB2B8"/>
+                        <a:srgbClr val="C6C9CD"/>
                       </a:solidFill>
                       <a:prstDash val="solid"/>
                       <a:round/>
@@ -2108,7 +2020,7 @@
                     </a:lnL>
                     <a:lnR w="6350" cap="flat" cmpd="sng" algn="ctr">
                       <a:solidFill>
-                        <a:srgbClr val="AEB2B8"/>
+                        <a:srgbClr val="C6C9CD"/>
                       </a:solidFill>
                       <a:prstDash val="solid"/>
                       <a:round/>
@@ -2117,7 +2029,7 @@
                     </a:lnR>
                     <a:lnT w="6350" cap="flat" cmpd="sng" algn="ctr">
                       <a:solidFill>
-                        <a:srgbClr val="AEB2B8"/>
+                        <a:srgbClr val="C6C9CD"/>
                       </a:solidFill>
                       <a:prstDash val="solid"/>
                       <a:round/>
@@ -2126,7 +2038,7 @@
                     </a:lnT>
                     <a:lnB w="6350" cap="flat" cmpd="sng" algn="ctr">
                       <a:solidFill>
-                        <a:srgbClr val="AEB2B8"/>
+                        <a:srgbClr val="C6C9CD"/>
                       </a:solidFill>
                       <a:prstDash val="solid"/>
                       <a:round/>
@@ -2149,7 +2061,7 @@
                         <a:buNone/>
                       </a:pPr>
                       <a:r>
-                        <a:rPr lang="en-US" sz="1200" dirty="0">
+                        <a:rPr lang="en-US" sz="1100" dirty="0">
                           <a:solidFill>
                             <a:srgbClr val="000000"/>
                           </a:solidFill>
@@ -2159,17 +2071,17 @@
                         </a:rPr>
                         <a:t>60%</a:t>
                       </a:r>
-                      <a:endParaRPr lang="en-US" sz="1200" dirty="0">
+                      <a:endParaRPr lang="en-US" sz="1100" dirty="0">
                         <a:latin typeface="Arial" charset="0"/>
                         <a:ea typeface="Arial" charset="0"/>
                         <a:cs typeface="Arial" charset="0"/>
                       </a:endParaRPr>
                     </a:p>
                   </a:txBody>
-                  <a:tcPr marL="63500" marR="63500" marT="63500" marB="63500" anchor="ctr">
+                  <a:tcPr marL="101600" marR="101600" marT="38100" marB="38100" anchor="ctr">
                     <a:lnL w="6350" cap="flat" cmpd="sng" algn="ctr">
                       <a:solidFill>
-                        <a:srgbClr val="AEB2B8"/>
+                        <a:srgbClr val="C6C9CD"/>
                       </a:solidFill>
                       <a:prstDash val="solid"/>
                       <a:round/>
@@ -2178,7 +2090,7 @@
                     </a:lnL>
                     <a:lnR w="6350" cap="flat" cmpd="sng" algn="ctr">
                       <a:solidFill>
-                        <a:srgbClr val="AEB2B8"/>
+                        <a:srgbClr val="C6C9CD"/>
                       </a:solidFill>
                       <a:prstDash val="solid"/>
                       <a:round/>
@@ -2187,7 +2099,7 @@
                     </a:lnR>
                     <a:lnT w="6350" cap="flat" cmpd="sng" algn="ctr">
                       <a:solidFill>
-                        <a:srgbClr val="AEB2B8"/>
+                        <a:srgbClr val="C6C9CD"/>
                       </a:solidFill>
                       <a:prstDash val="solid"/>
                       <a:round/>
@@ -2196,7 +2108,7 @@
                     </a:lnT>
                     <a:lnB w="6350" cap="flat" cmpd="sng" algn="ctr">
                       <a:solidFill>
-                        <a:srgbClr val="AEB2B8"/>
+                        <a:srgbClr val="C6C9CD"/>
                       </a:solidFill>
                       <a:prstDash val="solid"/>
                       <a:round/>
@@ -2219,7 +2131,7 @@
                         <a:buNone/>
                       </a:pPr>
                       <a:r>
-                        <a:rPr lang="en-US" sz="1200" dirty="0">
+                        <a:rPr lang="en-US" sz="1100" dirty="0">
                           <a:solidFill>
                             <a:srgbClr val="000000"/>
                           </a:solidFill>
@@ -2229,17 +2141,17 @@
                         </a:rPr>
                         <a:t>30%</a:t>
                       </a:r>
-                      <a:endParaRPr lang="en-US" sz="1200" dirty="0">
+                      <a:endParaRPr lang="en-US" sz="1100" dirty="0">
                         <a:latin typeface="Arial" charset="0"/>
                         <a:ea typeface="Arial" charset="0"/>
                         <a:cs typeface="Arial" charset="0"/>
                       </a:endParaRPr>
                     </a:p>
                   </a:txBody>
-                  <a:tcPr marL="63500" marR="63500" marT="63500" marB="63500" anchor="ctr">
+                  <a:tcPr marL="101600" marR="101600" marT="38100" marB="38100" anchor="ctr">
                     <a:lnL w="6350" cap="flat" cmpd="sng" algn="ctr">
                       <a:solidFill>
-                        <a:srgbClr val="AEB2B8"/>
+                        <a:srgbClr val="C6C9CD"/>
                       </a:solidFill>
                       <a:prstDash val="solid"/>
                       <a:round/>
@@ -2248,7 +2160,7 @@
                     </a:lnL>
                     <a:lnR w="6350" cap="flat" cmpd="sng" algn="ctr">
                       <a:solidFill>
-                        <a:srgbClr val="AEB2B8"/>
+                        <a:srgbClr val="C6C9CD"/>
                       </a:solidFill>
                       <a:prstDash val="solid"/>
                       <a:round/>
@@ -2257,7 +2169,7 @@
                     </a:lnR>
                     <a:lnT w="6350" cap="flat" cmpd="sng" algn="ctr">
                       <a:solidFill>
-                        <a:srgbClr val="AEB2B8"/>
+                        <a:srgbClr val="C6C9CD"/>
                       </a:solidFill>
                       <a:prstDash val="solid"/>
                       <a:round/>
@@ -2266,7 +2178,7 @@
                     </a:lnT>
                     <a:lnB w="6350" cap="flat" cmpd="sng" algn="ctr">
                       <a:solidFill>
-                        <a:srgbClr val="AEB2B8"/>
+                        <a:srgbClr val="C6C9CD"/>
                       </a:solidFill>
                       <a:prstDash val="solid"/>
                       <a:round/>
@@ -2279,7 +2191,7 @@
                   </a:tcPr>
                 </a:tc>
               </a:tr>
-              <a:tr h="311150">
+              <a:tr h="374650">
                 <a:tc>
                   <a:txBody>
                     <a:bodyPr>
@@ -2291,7 +2203,7 @@
                         <a:buNone/>
                       </a:pPr>
                       <a:r>
-                        <a:rPr lang="en-US" sz="1200" b="1" dirty="0">
+                        <a:rPr lang="en-US" sz="1100" b="1" dirty="0">
                           <a:solidFill>
                             <a:srgbClr val="000000"/>
                           </a:solidFill>
@@ -2301,17 +2213,17 @@
                         </a:rPr>
                         <a:t>Proposal</a:t>
                       </a:r>
-                      <a:endParaRPr lang="en-US" sz="1200" dirty="0">
+                      <a:endParaRPr lang="en-US" sz="1100" dirty="0">
                         <a:latin typeface="Arial" charset="0"/>
                         <a:ea typeface="Arial" charset="0"/>
                         <a:cs typeface="Arial" charset="0"/>
                       </a:endParaRPr>
                     </a:p>
                   </a:txBody>
-                  <a:tcPr marL="63500" marR="63500" marT="63500" marB="63500" anchor="ctr">
+                  <a:tcPr marL="101600" marR="101600" marT="38100" marB="38100" anchor="ctr">
                     <a:lnL w="6350" cap="flat" cmpd="sng" algn="ctr">
                       <a:solidFill>
-                        <a:srgbClr val="AEB2B8"/>
+                        <a:srgbClr val="C6C9CD"/>
                       </a:solidFill>
                       <a:prstDash val="solid"/>
                       <a:round/>
@@ -2320,7 +2232,7 @@
                     </a:lnL>
                     <a:lnR w="6350" cap="flat" cmpd="sng" algn="ctr">
                       <a:solidFill>
-                        <a:srgbClr val="AEB2B8"/>
+                        <a:srgbClr val="C6C9CD"/>
                       </a:solidFill>
                       <a:prstDash val="solid"/>
                       <a:round/>
@@ -2329,7 +2241,7 @@
                     </a:lnR>
                     <a:lnT w="6350" cap="flat" cmpd="sng" algn="ctr">
                       <a:solidFill>
-                        <a:srgbClr val="AEB2B8"/>
+                        <a:srgbClr val="C6C9CD"/>
                       </a:solidFill>
                       <a:prstDash val="solid"/>
                       <a:round/>
@@ -2338,7 +2250,7 @@
                     </a:lnT>
                     <a:lnB w="6350" cap="flat" cmpd="sng" algn="ctr">
                       <a:solidFill>
-                        <a:srgbClr val="AEB2B8"/>
+                        <a:srgbClr val="C6C9CD"/>
                       </a:solidFill>
                       <a:prstDash val="solid"/>
                       <a:round/>
@@ -2361,7 +2273,7 @@
                         <a:buNone/>
                       </a:pPr>
                       <a:r>
-                        <a:rPr lang="en-US" sz="1200" dirty="0">
+                        <a:rPr lang="en-US" sz="1100" dirty="0">
                           <a:solidFill>
                             <a:srgbClr val="000000"/>
                           </a:solidFill>
@@ -2371,17 +2283,17 @@
                         </a:rPr>
                         <a:t>8</a:t>
                       </a:r>
-                      <a:endParaRPr lang="en-US" sz="1200" dirty="0">
+                      <a:endParaRPr lang="en-US" sz="1100" dirty="0">
                         <a:latin typeface="Arial" charset="0"/>
                         <a:ea typeface="Arial" charset="0"/>
                         <a:cs typeface="Arial" charset="0"/>
                       </a:endParaRPr>
                     </a:p>
                   </a:txBody>
-                  <a:tcPr marL="63500" marR="63500" marT="63500" marB="63500" anchor="ctr">
+                  <a:tcPr marL="101600" marR="101600" marT="38100" marB="38100" anchor="ctr">
                     <a:lnL w="6350" cap="flat" cmpd="sng" algn="ctr">
                       <a:solidFill>
-                        <a:srgbClr val="AEB2B8"/>
+                        <a:srgbClr val="C6C9CD"/>
                       </a:solidFill>
                       <a:prstDash val="solid"/>
                       <a:round/>
@@ -2390,7 +2302,7 @@
                     </a:lnL>
                     <a:lnR w="6350" cap="flat" cmpd="sng" algn="ctr">
                       <a:solidFill>
-                        <a:srgbClr val="AEB2B8"/>
+                        <a:srgbClr val="C6C9CD"/>
                       </a:solidFill>
                       <a:prstDash val="solid"/>
                       <a:round/>
@@ -2399,7 +2311,7 @@
                     </a:lnR>
                     <a:lnT w="6350" cap="flat" cmpd="sng" algn="ctr">
                       <a:solidFill>
-                        <a:srgbClr val="AEB2B8"/>
+                        <a:srgbClr val="C6C9CD"/>
                       </a:solidFill>
                       <a:prstDash val="solid"/>
                       <a:round/>
@@ -2408,7 +2320,7 @@
                     </a:lnT>
                     <a:lnB w="6350" cap="flat" cmpd="sng" algn="ctr">
                       <a:solidFill>
-                        <a:srgbClr val="AEB2B8"/>
+                        <a:srgbClr val="C6C9CD"/>
                       </a:solidFill>
                       <a:prstDash val="solid"/>
                       <a:round/>
@@ -2431,7 +2343,7 @@
                         <a:buNone/>
                       </a:pPr>
                       <a:r>
-                        <a:rPr lang="en-US" sz="1200" dirty="0">
+                        <a:rPr lang="en-US" sz="1100" dirty="0">
                           <a:solidFill>
                             <a:srgbClr val="000000"/>
                           </a:solidFill>
@@ -2441,17 +2353,17 @@
                         </a:rPr>
                         <a:t>50%</a:t>
                       </a:r>
-                      <a:endParaRPr lang="en-US" sz="1200" dirty="0">
+                      <a:endParaRPr lang="en-US" sz="1100" dirty="0">
                         <a:latin typeface="Arial" charset="0"/>
                         <a:ea typeface="Arial" charset="0"/>
                         <a:cs typeface="Arial" charset="0"/>
                       </a:endParaRPr>
                     </a:p>
                   </a:txBody>
-                  <a:tcPr marL="63500" marR="63500" marT="63500" marB="63500" anchor="ctr">
+                  <a:tcPr marL="101600" marR="101600" marT="38100" marB="38100" anchor="ctr">
                     <a:lnL w="6350" cap="flat" cmpd="sng" algn="ctr">
                       <a:solidFill>
-                        <a:srgbClr val="AEB2B8"/>
+                        <a:srgbClr val="C6C9CD"/>
                       </a:solidFill>
                       <a:prstDash val="solid"/>
                       <a:round/>
@@ -2460,7 +2372,7 @@
                     </a:lnL>
                     <a:lnR w="6350" cap="flat" cmpd="sng" algn="ctr">
                       <a:solidFill>
-                        <a:srgbClr val="AEB2B8"/>
+                        <a:srgbClr val="C6C9CD"/>
                       </a:solidFill>
                       <a:prstDash val="solid"/>
                       <a:round/>
@@ -2469,7 +2381,7 @@
                     </a:lnR>
                     <a:lnT w="6350" cap="flat" cmpd="sng" algn="ctr">
                       <a:solidFill>
-                        <a:srgbClr val="AEB2B8"/>
+                        <a:srgbClr val="C6C9CD"/>
                       </a:solidFill>
                       <a:prstDash val="solid"/>
                       <a:round/>
@@ -2478,7 +2390,7 @@
                     </a:lnT>
                     <a:lnB w="6350" cap="flat" cmpd="sng" algn="ctr">
                       <a:solidFill>
-                        <a:srgbClr val="AEB2B8"/>
+                        <a:srgbClr val="C6C9CD"/>
                       </a:solidFill>
                       <a:prstDash val="solid"/>
                       <a:round/>
@@ -2501,7 +2413,7 @@
                         <a:buNone/>
                       </a:pPr>
                       <a:r>
-                        <a:rPr lang="en-US" sz="1200" dirty="0">
+                        <a:rPr lang="en-US" sz="1100" dirty="0">
                           <a:solidFill>
                             <a:srgbClr val="000000"/>
                           </a:solidFill>
@@ -2511,17 +2423,17 @@
                         </a:rPr>
                         <a:t>40%</a:t>
                       </a:r>
-                      <a:endParaRPr lang="en-US" sz="1200" dirty="0">
+                      <a:endParaRPr lang="en-US" sz="1100" dirty="0">
                         <a:latin typeface="Arial" charset="0"/>
                         <a:ea typeface="Arial" charset="0"/>
                         <a:cs typeface="Arial" charset="0"/>
                       </a:endParaRPr>
                     </a:p>
                   </a:txBody>
-                  <a:tcPr marL="63500" marR="63500" marT="63500" marB="63500" anchor="ctr">
+                  <a:tcPr marL="101600" marR="101600" marT="38100" marB="38100" anchor="ctr">
                     <a:lnL w="6350" cap="flat" cmpd="sng" algn="ctr">
                       <a:solidFill>
-                        <a:srgbClr val="AEB2B8"/>
+                        <a:srgbClr val="C6C9CD"/>
                       </a:solidFill>
                       <a:prstDash val="solid"/>
                       <a:round/>
@@ -2530,7 +2442,7 @@
                     </a:lnL>
                     <a:lnR w="6350" cap="flat" cmpd="sng" algn="ctr">
                       <a:solidFill>
-                        <a:srgbClr val="AEB2B8"/>
+                        <a:srgbClr val="C6C9CD"/>
                       </a:solidFill>
                       <a:prstDash val="solid"/>
                       <a:round/>
@@ -2539,7 +2451,7 @@
                     </a:lnR>
                     <a:lnT w="6350" cap="flat" cmpd="sng" algn="ctr">
                       <a:solidFill>
-                        <a:srgbClr val="AEB2B8"/>
+                        <a:srgbClr val="C6C9CD"/>
                       </a:solidFill>
                       <a:prstDash val="solid"/>
                       <a:round/>
@@ -2548,7 +2460,7 @@
                     </a:lnT>
                     <a:lnB w="6350" cap="flat" cmpd="sng" algn="ctr">
                       <a:solidFill>
-                        <a:srgbClr val="AEB2B8"/>
+                        <a:srgbClr val="C6C9CD"/>
                       </a:solidFill>
                       <a:prstDash val="solid"/>
                       <a:round/>
@@ -2561,7 +2473,7 @@
                   </a:tcPr>
                 </a:tc>
               </a:tr>
-              <a:tr h="317500">
+              <a:tr h="381000">
                 <a:tc>
                   <a:txBody>
                     <a:bodyPr>
@@ -2573,7 +2485,7 @@
                         <a:buNone/>
                       </a:pPr>
                       <a:r>
-                        <a:rPr lang="en-US" sz="1200" b="1" dirty="0">
+                        <a:rPr lang="en-US" sz="1100" b="1" dirty="0">
                           <a:solidFill>
                             <a:srgbClr val="000000"/>
                           </a:solidFill>
@@ -2583,17 +2495,17 @@
                         </a:rPr>
                         <a:t>Retrieval</a:t>
                       </a:r>
-                      <a:endParaRPr lang="en-US" sz="1200" dirty="0">
+                      <a:endParaRPr lang="en-US" sz="1100" dirty="0">
                         <a:latin typeface="Arial" charset="0"/>
                         <a:ea typeface="Arial" charset="0"/>
                         <a:cs typeface="Arial" charset="0"/>
                       </a:endParaRPr>
                     </a:p>
                   </a:txBody>
-                  <a:tcPr marL="63500" marR="63500" marT="63500" marB="63500" anchor="ctr">
+                  <a:tcPr marL="101600" marR="101600" marT="38100" marB="38100" anchor="ctr">
                     <a:lnL w="6350" cap="flat" cmpd="sng" algn="ctr">
                       <a:solidFill>
-                        <a:srgbClr val="AEB2B8"/>
+                        <a:srgbClr val="C6C9CD"/>
                       </a:solidFill>
                       <a:prstDash val="solid"/>
                       <a:round/>
@@ -2602,7 +2514,7 @@
                     </a:lnL>
                     <a:lnR w="6350" cap="flat" cmpd="sng" algn="ctr">
                       <a:solidFill>
-                        <a:srgbClr val="AEB2B8"/>
+                        <a:srgbClr val="C6C9CD"/>
                       </a:solidFill>
                       <a:prstDash val="solid"/>
                       <a:round/>
@@ -2611,7 +2523,7 @@
                     </a:lnR>
                     <a:lnT w="6350" cap="flat" cmpd="sng" algn="ctr">
                       <a:solidFill>
-                        <a:srgbClr val="AEB2B8"/>
+                        <a:srgbClr val="C6C9CD"/>
                       </a:solidFill>
                       <a:prstDash val="solid"/>
                       <a:round/>
@@ -2620,7 +2532,7 @@
                     </a:lnT>
                     <a:lnB w="6350" cap="flat" cmpd="sng" algn="ctr">
                       <a:solidFill>
-                        <a:srgbClr val="AEB2B8"/>
+                        <a:srgbClr val="C6C9CD"/>
                       </a:solidFill>
                       <a:prstDash val="solid"/>
                       <a:round/>
@@ -2643,7 +2555,7 @@
                         <a:buNone/>
                       </a:pPr>
                       <a:r>
-                        <a:rPr lang="en-US" sz="1200" dirty="0">
+                        <a:rPr lang="en-US" sz="1100" dirty="0">
                           <a:solidFill>
                             <a:srgbClr val="000000"/>
                           </a:solidFill>
@@ -2653,17 +2565,17 @@
                         </a:rPr>
                         <a:t>5</a:t>
                       </a:r>
-                      <a:endParaRPr lang="en-US" sz="1200" dirty="0">
+                      <a:endParaRPr lang="en-US" sz="1100" dirty="0">
                         <a:latin typeface="Arial" charset="0"/>
                         <a:ea typeface="Arial" charset="0"/>
                         <a:cs typeface="Arial" charset="0"/>
                       </a:endParaRPr>
                     </a:p>
                   </a:txBody>
-                  <a:tcPr marL="63500" marR="63500" marT="63500" marB="63500" anchor="ctr">
+                  <a:tcPr marL="101600" marR="101600" marT="38100" marB="38100" anchor="ctr">
                     <a:lnL w="6350" cap="flat" cmpd="sng" algn="ctr">
                       <a:solidFill>
-                        <a:srgbClr val="AEB2B8"/>
+                        <a:srgbClr val="C6C9CD"/>
                       </a:solidFill>
                       <a:prstDash val="solid"/>
                       <a:round/>
@@ -2672,7 +2584,7 @@
                     </a:lnL>
                     <a:lnR w="6350" cap="flat" cmpd="sng" algn="ctr">
                       <a:solidFill>
-                        <a:srgbClr val="AEB2B8"/>
+                        <a:srgbClr val="C6C9CD"/>
                       </a:solidFill>
                       <a:prstDash val="solid"/>
                       <a:round/>
@@ -2681,7 +2593,7 @@
                     </a:lnR>
                     <a:lnT w="6350" cap="flat" cmpd="sng" algn="ctr">
                       <a:solidFill>
-                        <a:srgbClr val="AEB2B8"/>
+                        <a:srgbClr val="C6C9CD"/>
                       </a:solidFill>
                       <a:prstDash val="solid"/>
                       <a:round/>
@@ -2690,7 +2602,7 @@
                     </a:lnT>
                     <a:lnB w="6350" cap="flat" cmpd="sng" algn="ctr">
                       <a:solidFill>
-                        <a:srgbClr val="AEB2B8"/>
+                        <a:srgbClr val="C6C9CD"/>
                       </a:solidFill>
                       <a:prstDash val="solid"/>
                       <a:round/>
@@ -2713,7 +2625,7 @@
                         <a:buNone/>
                       </a:pPr>
                       <a:r>
-                        <a:rPr lang="en-US" sz="1200" dirty="0">
+                        <a:rPr lang="en-US" sz="1100" dirty="0">
                           <a:solidFill>
                             <a:srgbClr val="000000"/>
                           </a:solidFill>
@@ -2723,17 +2635,17 @@
                         </a:rPr>
                         <a:t>60%</a:t>
                       </a:r>
-                      <a:endParaRPr lang="en-US" sz="1200" dirty="0">
+                      <a:endParaRPr lang="en-US" sz="1100" dirty="0">
                         <a:latin typeface="Arial" charset="0"/>
                         <a:ea typeface="Arial" charset="0"/>
                         <a:cs typeface="Arial" charset="0"/>
                       </a:endParaRPr>
                     </a:p>
                   </a:txBody>
-                  <a:tcPr marL="63500" marR="63500" marT="63500" marB="63500" anchor="ctr">
+                  <a:tcPr marL="101600" marR="101600" marT="38100" marB="38100" anchor="ctr">
                     <a:lnL w="6350" cap="flat" cmpd="sng" algn="ctr">
                       <a:solidFill>
-                        <a:srgbClr val="AEB2B8"/>
+                        <a:srgbClr val="C6C9CD"/>
                       </a:solidFill>
                       <a:prstDash val="solid"/>
                       <a:round/>
@@ -2742,7 +2654,7 @@
                     </a:lnL>
                     <a:lnR w="6350" cap="flat" cmpd="sng" algn="ctr">
                       <a:solidFill>
-                        <a:srgbClr val="AEB2B8"/>
+                        <a:srgbClr val="C6C9CD"/>
                       </a:solidFill>
                       <a:prstDash val="solid"/>
                       <a:round/>
@@ -2751,7 +2663,7 @@
                     </a:lnR>
                     <a:lnT w="6350" cap="flat" cmpd="sng" algn="ctr">
                       <a:solidFill>
-                        <a:srgbClr val="AEB2B8"/>
+                        <a:srgbClr val="C6C9CD"/>
                       </a:solidFill>
                       <a:prstDash val="solid"/>
                       <a:round/>
@@ -2760,7 +2672,7 @@
                     </a:lnT>
                     <a:lnB w="6350" cap="flat" cmpd="sng" algn="ctr">
                       <a:solidFill>
-                        <a:srgbClr val="AEB2B8"/>
+                        <a:srgbClr val="C6C9CD"/>
                       </a:solidFill>
                       <a:prstDash val="solid"/>
                       <a:round/>
@@ -2783,7 +2695,7 @@
                         <a:buNone/>
                       </a:pPr>
                       <a:r>
-                        <a:rPr lang="en-US" sz="1200" dirty="0">
+                        <a:rPr lang="en-US" sz="1100" dirty="0">
                           <a:solidFill>
                             <a:srgbClr val="000000"/>
                           </a:solidFill>
@@ -2793,17 +2705,17 @@
                         </a:rPr>
                         <a:t>40%</a:t>
                       </a:r>
-                      <a:endParaRPr lang="en-US" sz="1200" dirty="0">
+                      <a:endParaRPr lang="en-US" sz="1100" dirty="0">
                         <a:latin typeface="Arial" charset="0"/>
                         <a:ea typeface="Arial" charset="0"/>
                         <a:cs typeface="Arial" charset="0"/>
                       </a:endParaRPr>
                     </a:p>
                   </a:txBody>
-                  <a:tcPr marL="63500" marR="63500" marT="63500" marB="63500" anchor="ctr">
+                  <a:tcPr marL="101600" marR="101600" marT="38100" marB="38100" anchor="ctr">
                     <a:lnL w="6350" cap="flat" cmpd="sng" algn="ctr">
                       <a:solidFill>
-                        <a:srgbClr val="AEB2B8"/>
+                        <a:srgbClr val="C6C9CD"/>
                       </a:solidFill>
                       <a:prstDash val="solid"/>
                       <a:round/>
@@ -2812,7 +2724,7 @@
                     </a:lnL>
                     <a:lnR w="6350" cap="flat" cmpd="sng" algn="ctr">
                       <a:solidFill>
-                        <a:srgbClr val="AEB2B8"/>
+                        <a:srgbClr val="C6C9CD"/>
                       </a:solidFill>
                       <a:prstDash val="solid"/>
                       <a:round/>
@@ -2821,7 +2733,7 @@
                     </a:lnR>
                     <a:lnT w="6350" cap="flat" cmpd="sng" algn="ctr">
                       <a:solidFill>
-                        <a:srgbClr val="AEB2B8"/>
+                        <a:srgbClr val="C6C9CD"/>
                       </a:solidFill>
                       <a:prstDash val="solid"/>
                       <a:round/>
@@ -2830,7 +2742,7 @@
                     </a:lnT>
                     <a:lnB w="6350" cap="flat" cmpd="sng" algn="ctr">
                       <a:solidFill>
-                        <a:srgbClr val="AEB2B8"/>
+                        <a:srgbClr val="C6C9CD"/>
                       </a:solidFill>
                       <a:prstDash val="solid"/>
                       <a:round/>
@@ -2849,7 +2761,7 @@
       </p:graphicFrame>
       <p:graphicFrame>
         <p:nvGraphicFramePr>
-          <p:cNvPr id="10" name="pilot-sequencing"/>
+          <p:cNvPr id="7" name="pilot-sequencing"/>
           <p:cNvGraphicFramePr>
             <a:graphicFrameLocks noGrp="1"/>
           </p:cNvGraphicFramePr>
@@ -2862,20 +2774,20 @@
           </p:nvPr>
         </p:nvGraphicFramePr>
         <p:xfrm>
-          <a:off x="4254500" y="2019300"/>
-          <a:ext cx="4197350" cy="3213100"/>
+          <a:off x="4826000" y="3987800"/>
+          <a:ext cx="7048500" cy="1524000"/>
         </p:xfrm>
         <a:graphic>
           <a:graphicData uri="http://schemas.openxmlformats.org/drawingml/2006/table">
             <a:tbl>
               <a:tblPr/>
               <a:tblGrid>
-                <a:gridCol w="946150"/>
-                <a:gridCol w="1606550"/>
-                <a:gridCol w="774700"/>
-                <a:gridCol w="869950"/>
+                <a:gridCol w="1841500"/>
+                <a:gridCol w="2286000"/>
+                <a:gridCol w="1587500"/>
+                <a:gridCol w="1333500"/>
               </a:tblGrid>
-              <a:tr h="482600">
+              <a:tr h="317500">
                 <a:tc>
                   <a:txBody>
                     <a:bodyPr>
@@ -2887,7 +2799,7 @@
                         <a:buNone/>
                       </a:pPr>
                       <a:r>
-                        <a:rPr lang="en-US" sz="1200" b="1" dirty="0">
+                        <a:rPr lang="en-US" sz="1000" b="1" dirty="0">
                           <a:solidFill>
                             <a:srgbClr val="FFFFFF"/>
                           </a:solidFill>
@@ -2897,17 +2809,17 @@
                         </a:rPr>
                         <a:t>Workflow</a:t>
                       </a:r>
-                      <a:endParaRPr lang="en-US" sz="1200" dirty="0">
+                      <a:endParaRPr lang="en-US" sz="1000" dirty="0">
                         <a:latin typeface="Arial" charset="0"/>
                         <a:ea typeface="Arial" charset="0"/>
                         <a:cs typeface="Arial" charset="0"/>
                       </a:endParaRPr>
                     </a:p>
                   </a:txBody>
-                  <a:tcPr marL="63500" marR="63500" marT="63500" marB="63500" anchor="ctr">
+                  <a:tcPr marL="101600" marR="101600" marT="38100" marB="38100" anchor="ctr">
                     <a:lnL w="6350" cap="flat" cmpd="sng" algn="ctr">
                       <a:solidFill>
-                        <a:srgbClr val="AEB2B8"/>
+                        <a:srgbClr val="C6C9CD"/>
                       </a:solidFill>
                       <a:prstDash val="solid"/>
                       <a:round/>
@@ -2916,7 +2828,7 @@
                     </a:lnL>
                     <a:lnR w="6350" cap="flat" cmpd="sng" algn="ctr">
                       <a:solidFill>
-                        <a:srgbClr val="AEB2B8"/>
+                        <a:srgbClr val="C6C9CD"/>
                       </a:solidFill>
                       <a:prstDash val="solid"/>
                       <a:round/>
@@ -2925,7 +2837,7 @@
                     </a:lnR>
                     <a:lnT w="6350" cap="flat" cmpd="sng" algn="ctr">
                       <a:solidFill>
-                        <a:srgbClr val="AEB2B8"/>
+                        <a:srgbClr val="C6C9CD"/>
                       </a:solidFill>
                       <a:prstDash val="solid"/>
                       <a:round/>
@@ -2934,77 +2846,7 @@
                     </a:lnT>
                     <a:lnB w="6350" cap="flat" cmpd="sng" algn="ctr">
                       <a:solidFill>
-                        <a:srgbClr val="AEB2B8"/>
-                      </a:solidFill>
-                      <a:prstDash val="solid"/>
-                      <a:round/>
-                      <a:headEnd type="none" w="med" len="med"/>
-                      <a:tailEnd type="none" w="med" len="med"/>
-                    </a:lnB>
-                    <a:solidFill>
-                      <a:srgbClr val="000000"/>
-                    </a:solidFill>
-                  </a:tcPr>
-                </a:tc>
-                <a:tc>
-                  <a:txBody>
-                    <a:bodyPr>
-                      <a:noAutofit/>
-                    </a:bodyPr>
-                    <a:lstStyle/>
-                    <a:p>
-                      <a:pPr algn="l" indent="0" marL="0">
-                        <a:buNone/>
-                      </a:pPr>
-                      <a:r>
-                        <a:rPr lang="en-US" sz="1200" b="1" dirty="0">
-                          <a:solidFill>
-                            <a:srgbClr val="FFFFFF"/>
-                          </a:solidFill>
-                          <a:latin typeface="Arial" pitchFamily="34" charset="0"/>
-                          <a:ea typeface="Arial" pitchFamily="34" charset="-122"/>
-                          <a:cs typeface="Arial" pitchFamily="34" charset="-120"/>
-                        </a:rPr>
-                        <a:t>Control readiness</a:t>
-                      </a:r>
-                      <a:endParaRPr lang="en-US" sz="1200" dirty="0">
-                        <a:latin typeface="Arial" charset="0"/>
-                        <a:ea typeface="Arial" charset="0"/>
-                        <a:cs typeface="Arial" charset="0"/>
-                      </a:endParaRPr>
-                    </a:p>
-                  </a:txBody>
-                  <a:tcPr marL="63500" marR="63500" marT="63500" marB="63500" anchor="ctr">
-                    <a:lnL w="6350" cap="flat" cmpd="sng" algn="ctr">
-                      <a:solidFill>
-                        <a:srgbClr val="AEB2B8"/>
-                      </a:solidFill>
-                      <a:prstDash val="solid"/>
-                      <a:round/>
-                      <a:headEnd type="none" w="med" len="med"/>
-                      <a:tailEnd type="none" w="med" len="med"/>
-                    </a:lnL>
-                    <a:lnR w="6350" cap="flat" cmpd="sng" algn="ctr">
-                      <a:solidFill>
-                        <a:srgbClr val="AEB2B8"/>
-                      </a:solidFill>
-                      <a:prstDash val="solid"/>
-                      <a:round/>
-                      <a:headEnd type="none" w="med" len="med"/>
-                      <a:tailEnd type="none" w="med" len="med"/>
-                    </a:lnR>
-                    <a:lnT w="6350" cap="flat" cmpd="sng" algn="ctr">
-                      <a:solidFill>
-                        <a:srgbClr val="AEB2B8"/>
-                      </a:solidFill>
-                      <a:prstDash val="solid"/>
-                      <a:round/>
-                      <a:headEnd type="none" w="med" len="med"/>
-                      <a:tailEnd type="none" w="med" len="med"/>
-                    </a:lnT>
-                    <a:lnB w="6350" cap="flat" cmpd="sng" algn="ctr">
-                      <a:solidFill>
-                        <a:srgbClr val="AEB2B8"/>
+                        <a:srgbClr val="C6C9CD"/>
                       </a:solidFill>
                       <a:prstDash val="solid"/>
                       <a:round/>
@@ -3027,7 +2869,7 @@
                         <a:buNone/>
                       </a:pPr>
                       <a:r>
-                        <a:rPr lang="en-US" sz="1200" b="1" dirty="0">
+                        <a:rPr lang="en-US" sz="1000" b="1" dirty="0">
                           <a:solidFill>
                             <a:srgbClr val="FFFFFF"/>
                           </a:solidFill>
@@ -3035,19 +2877,19 @@
                           <a:ea typeface="Arial" pitchFamily="34" charset="-122"/>
                           <a:cs typeface="Arial" pitchFamily="34" charset="-120"/>
                         </a:rPr>
-                        <a:t>Owner</a:t>
+                        <a:t>Control readiness</a:t>
                       </a:r>
-                      <a:endParaRPr lang="en-US" sz="1200" dirty="0">
+                      <a:endParaRPr lang="en-US" sz="1000" dirty="0">
                         <a:latin typeface="Arial" charset="0"/>
                         <a:ea typeface="Arial" charset="0"/>
                         <a:cs typeface="Arial" charset="0"/>
                       </a:endParaRPr>
                     </a:p>
                   </a:txBody>
-                  <a:tcPr marL="0" marR="0" marT="0" marB="0" anchor="ctr">
+                  <a:tcPr marL="101600" marR="101600" marT="38100" marB="38100" anchor="ctr">
                     <a:lnL w="6350" cap="flat" cmpd="sng" algn="ctr">
                       <a:solidFill>
-                        <a:srgbClr val="AEB2B8"/>
+                        <a:srgbClr val="C6C9CD"/>
                       </a:solidFill>
                       <a:prstDash val="solid"/>
                       <a:round/>
@@ -3056,7 +2898,7 @@
                     </a:lnL>
                     <a:lnR w="6350" cap="flat" cmpd="sng" algn="ctr">
                       <a:solidFill>
-                        <a:srgbClr val="AEB2B8"/>
+                        <a:srgbClr val="C6C9CD"/>
                       </a:solidFill>
                       <a:prstDash val="solid"/>
                       <a:round/>
@@ -3065,7 +2907,7 @@
                     </a:lnR>
                     <a:lnT w="6350" cap="flat" cmpd="sng" algn="ctr">
                       <a:solidFill>
-                        <a:srgbClr val="AEB2B8"/>
+                        <a:srgbClr val="C6C9CD"/>
                       </a:solidFill>
                       <a:prstDash val="solid"/>
                       <a:round/>
@@ -3074,7 +2916,7 @@
                     </a:lnT>
                     <a:lnB w="6350" cap="flat" cmpd="sng" algn="ctr">
                       <a:solidFill>
-                        <a:srgbClr val="AEB2B8"/>
+                        <a:srgbClr val="C6C9CD"/>
                       </a:solidFill>
                       <a:prstDash val="solid"/>
                       <a:round/>
@@ -3097,7 +2939,77 @@
                         <a:buNone/>
                       </a:pPr>
                       <a:r>
-                        <a:rPr lang="en-US" sz="1200" b="1" dirty="0">
+                        <a:rPr lang="en-US" sz="1000" b="1" dirty="0">
+                          <a:solidFill>
+                            <a:srgbClr val="FFFFFF"/>
+                          </a:solidFill>
+                          <a:latin typeface="Arial" pitchFamily="34" charset="0"/>
+                          <a:ea typeface="Arial" pitchFamily="34" charset="-122"/>
+                          <a:cs typeface="Arial" pitchFamily="34" charset="-120"/>
+                        </a:rPr>
+                        <a:t>Owner</a:t>
+                      </a:r>
+                      <a:endParaRPr lang="en-US" sz="1000" dirty="0">
+                        <a:latin typeface="Arial" charset="0"/>
+                        <a:ea typeface="Arial" charset="0"/>
+                        <a:cs typeface="Arial" charset="0"/>
+                      </a:endParaRPr>
+                    </a:p>
+                  </a:txBody>
+                  <a:tcPr marL="101600" marR="101600" marT="38100" marB="38100" anchor="ctr">
+                    <a:lnL w="6350" cap="flat" cmpd="sng" algn="ctr">
+                      <a:solidFill>
+                        <a:srgbClr val="C6C9CD"/>
+                      </a:solidFill>
+                      <a:prstDash val="solid"/>
+                      <a:round/>
+                      <a:headEnd type="none" w="med" len="med"/>
+                      <a:tailEnd type="none" w="med" len="med"/>
+                    </a:lnL>
+                    <a:lnR w="6350" cap="flat" cmpd="sng" algn="ctr">
+                      <a:solidFill>
+                        <a:srgbClr val="C6C9CD"/>
+                      </a:solidFill>
+                      <a:prstDash val="solid"/>
+                      <a:round/>
+                      <a:headEnd type="none" w="med" len="med"/>
+                      <a:tailEnd type="none" w="med" len="med"/>
+                    </a:lnR>
+                    <a:lnT w="6350" cap="flat" cmpd="sng" algn="ctr">
+                      <a:solidFill>
+                        <a:srgbClr val="C6C9CD"/>
+                      </a:solidFill>
+                      <a:prstDash val="solid"/>
+                      <a:round/>
+                      <a:headEnd type="none" w="med" len="med"/>
+                      <a:tailEnd type="none" w="med" len="med"/>
+                    </a:lnT>
+                    <a:lnB w="6350" cap="flat" cmpd="sng" algn="ctr">
+                      <a:solidFill>
+                        <a:srgbClr val="C6C9CD"/>
+                      </a:solidFill>
+                      <a:prstDash val="solid"/>
+                      <a:round/>
+                      <a:headEnd type="none" w="med" len="med"/>
+                      <a:tailEnd type="none" w="med" len="med"/>
+                    </a:lnB>
+                    <a:solidFill>
+                      <a:srgbClr val="000000"/>
+                    </a:solidFill>
+                  </a:tcPr>
+                </a:tc>
+                <a:tc>
+                  <a:txBody>
+                    <a:bodyPr>
+                      <a:noAutofit/>
+                    </a:bodyPr>
+                    <a:lstStyle/>
+                    <a:p>
+                      <a:pPr algn="ctr" indent="0" marL="0">
+                        <a:buNone/>
+                      </a:pPr>
+                      <a:r>
+                        <a:rPr lang="en-US" sz="1000" b="1" dirty="0">
                           <a:solidFill>
                             <a:srgbClr val="FFFFFF"/>
                           </a:solidFill>
@@ -3107,17 +3019,17 @@
                         </a:rPr>
                         <a:t>Sequence</a:t>
                       </a:r>
-                      <a:endParaRPr lang="en-US" sz="1200" dirty="0">
+                      <a:endParaRPr lang="en-US" sz="1000" dirty="0">
                         <a:latin typeface="Arial" charset="0"/>
                         <a:ea typeface="Arial" charset="0"/>
                         <a:cs typeface="Arial" charset="0"/>
                       </a:endParaRPr>
                     </a:p>
                   </a:txBody>
-                  <a:tcPr marL="63500" marR="63500" marT="63500" marB="63500" anchor="ctr">
+                  <a:tcPr marL="101600" marR="101600" marT="38100" marB="38100" anchor="ctr">
                     <a:lnL w="6350" cap="flat" cmpd="sng" algn="ctr">
                       <a:solidFill>
-                        <a:srgbClr val="AEB2B8"/>
+                        <a:srgbClr val="C6C9CD"/>
                       </a:solidFill>
                       <a:prstDash val="solid"/>
                       <a:round/>
@@ -3126,7 +3038,7 @@
                     </a:lnL>
                     <a:lnR w="6350" cap="flat" cmpd="sng" algn="ctr">
                       <a:solidFill>
-                        <a:srgbClr val="AEB2B8"/>
+                        <a:srgbClr val="C6C9CD"/>
                       </a:solidFill>
                       <a:prstDash val="solid"/>
                       <a:round/>
@@ -3135,7 +3047,7 @@
                     </a:lnR>
                     <a:lnT w="6350" cap="flat" cmpd="sng" algn="ctr">
                       <a:solidFill>
-                        <a:srgbClr val="AEB2B8"/>
+                        <a:srgbClr val="C6C9CD"/>
                       </a:solidFill>
                       <a:prstDash val="solid"/>
                       <a:round/>
@@ -3144,7 +3056,7 @@
                     </a:lnT>
                     <a:lnB w="6350" cap="flat" cmpd="sng" algn="ctr">
                       <a:solidFill>
-                        <a:srgbClr val="AEB2B8"/>
+                        <a:srgbClr val="C6C9CD"/>
                       </a:solidFill>
                       <a:prstDash val="solid"/>
                       <a:round/>
@@ -3157,7 +3069,7 @@
                   </a:tcPr>
                 </a:tc>
               </a:tr>
-              <a:tr h="869950">
+              <a:tr h="400050">
                 <a:tc>
                   <a:txBody>
                     <a:bodyPr>
@@ -3169,7 +3081,7 @@
                         <a:buNone/>
                       </a:pPr>
                       <a:r>
-                        <a:rPr lang="en-US" sz="1200" b="1" dirty="0">
+                        <a:rPr lang="en-US" sz="1000" b="1" dirty="0">
                           <a:solidFill>
                             <a:srgbClr val="000000"/>
                           </a:solidFill>
@@ -3177,40 +3089,19 @@
                           <a:ea typeface="Arial" pitchFamily="34" charset="-122"/>
                           <a:cs typeface="Arial" pitchFamily="34" charset="-120"/>
                         </a:rPr>
-                        <a:t>Research</a:t>
+                        <a:t>Research synthesis</a:t>
                       </a:r>
-                      <a:endParaRPr lang="en-US" sz="1200" dirty="0">
-                        <a:latin typeface="Arial" charset="0"/>
-                        <a:ea typeface="Arial" charset="0"/>
-                        <a:cs typeface="Arial" charset="0"/>
-                      </a:endParaRPr>
-                    </a:p>
-                    <a:p>
-                      <a:pPr algn="l" indent="0" marL="0">
-                        <a:buNone/>
-                      </a:pPr>
-                      <a:r>
-                        <a:rPr lang="en-US" sz="1200" b="1" dirty="0">
-                          <a:solidFill>
-                            <a:srgbClr val="000000"/>
-                          </a:solidFill>
-                          <a:latin typeface="Arial" pitchFamily="34" charset="0"/>
-                          <a:ea typeface="Arial" pitchFamily="34" charset="-122"/>
-                          <a:cs typeface="Arial" pitchFamily="34" charset="-120"/>
-                        </a:rPr>
-                        <a:t>synthesis</a:t>
-                      </a:r>
-                      <a:endParaRPr lang="en-US" sz="1200" dirty="0">
+                      <a:endParaRPr lang="en-US" sz="1000" dirty="0">
                         <a:latin typeface="Arial" charset="0"/>
                         <a:ea typeface="Arial" charset="0"/>
                         <a:cs typeface="Arial" charset="0"/>
                       </a:endParaRPr>
                     </a:p>
                   </a:txBody>
-                  <a:tcPr marL="63500" marR="63500" marT="63500" marB="63500" anchor="ctr">
+                  <a:tcPr marL="101600" marR="101600" marT="38100" marB="38100" anchor="ctr">
                     <a:lnL w="6350" cap="flat" cmpd="sng" algn="ctr">
                       <a:solidFill>
-                        <a:srgbClr val="AEB2B8"/>
+                        <a:srgbClr val="C6C9CD"/>
                       </a:solidFill>
                       <a:prstDash val="solid"/>
                       <a:round/>
@@ -3219,7 +3110,7 @@
                     </a:lnL>
                     <a:lnR w="6350" cap="flat" cmpd="sng" algn="ctr">
                       <a:solidFill>
-                        <a:srgbClr val="AEB2B8"/>
+                        <a:srgbClr val="C6C9CD"/>
                       </a:solidFill>
                       <a:prstDash val="solid"/>
                       <a:round/>
@@ -3228,7 +3119,7 @@
                     </a:lnR>
                     <a:lnT w="6350" cap="flat" cmpd="sng" algn="ctr">
                       <a:solidFill>
-                        <a:srgbClr val="AEB2B8"/>
+                        <a:srgbClr val="C6C9CD"/>
                       </a:solidFill>
                       <a:prstDash val="solid"/>
                       <a:round/>
@@ -3237,98 +3128,7 @@
                     </a:lnT>
                     <a:lnB w="6350" cap="flat" cmpd="sng" algn="ctr">
                       <a:solidFill>
-                        <a:srgbClr val="AEB2B8"/>
-                      </a:solidFill>
-                      <a:prstDash val="solid"/>
-                      <a:round/>
-                      <a:headEnd type="none" w="med" len="med"/>
-                      <a:tailEnd type="none" w="med" len="med"/>
-                    </a:lnB>
-                    <a:solidFill>
-                      <a:srgbClr val="FFFFFF"/>
-                    </a:solidFill>
-                  </a:tcPr>
-                </a:tc>
-                <a:tc>
-                  <a:txBody>
-                    <a:bodyPr>
-                      <a:noAutofit/>
-                    </a:bodyPr>
-                    <a:lstStyle/>
-                    <a:p>
-                      <a:pPr algn="l" indent="0" marL="0">
-                        <a:buNone/>
-                      </a:pPr>
-                      <a:r>
-                        <a:rPr lang="en-US" sz="1200" dirty="0">
-                          <a:solidFill>
-                            <a:srgbClr val="000000"/>
-                          </a:solidFill>
-                          <a:latin typeface="Arial" pitchFamily="34" charset="0"/>
-                          <a:ea typeface="Arial" pitchFamily="34" charset="-122"/>
-                          <a:cs typeface="Arial" pitchFamily="34" charset="-120"/>
-                        </a:rPr>
-                        <a:t>Approved corpus</a:t>
-                      </a:r>
-                      <a:endParaRPr lang="en-US" sz="1200" dirty="0">
-                        <a:latin typeface="Arial" charset="0"/>
-                        <a:ea typeface="Arial" charset="0"/>
-                        <a:cs typeface="Arial" charset="0"/>
-                      </a:endParaRPr>
-                    </a:p>
-                    <a:p>
-                      <a:pPr algn="l" indent="0" marL="0">
-                        <a:buNone/>
-                      </a:pPr>
-                      <a:r>
-                        <a:rPr lang="en-US" sz="1200" dirty="0">
-                          <a:solidFill>
-                            <a:srgbClr val="000000"/>
-                          </a:solidFill>
-                          <a:latin typeface="Arial" pitchFamily="34" charset="0"/>
-                          <a:ea typeface="Arial" pitchFamily="34" charset="-122"/>
-                          <a:cs typeface="Arial" pitchFamily="34" charset="-120"/>
-                        </a:rPr>
-                        <a:t>Explicit review</a:t>
-                      </a:r>
-                      <a:endParaRPr lang="en-US" sz="1200" dirty="0">
-                        <a:latin typeface="Arial" charset="0"/>
-                        <a:ea typeface="Arial" charset="0"/>
-                        <a:cs typeface="Arial" charset="0"/>
-                      </a:endParaRPr>
-                    </a:p>
-                  </a:txBody>
-                  <a:tcPr marL="63500" marR="63500" marT="63500" marB="63500" anchor="ctr">
-                    <a:lnL w="6350" cap="flat" cmpd="sng" algn="ctr">
-                      <a:solidFill>
-                        <a:srgbClr val="AEB2B8"/>
-                      </a:solidFill>
-                      <a:prstDash val="solid"/>
-                      <a:round/>
-                      <a:headEnd type="none" w="med" len="med"/>
-                      <a:tailEnd type="none" w="med" len="med"/>
-                    </a:lnL>
-                    <a:lnR w="6350" cap="flat" cmpd="sng" algn="ctr">
-                      <a:solidFill>
-                        <a:srgbClr val="AEB2B8"/>
-                      </a:solidFill>
-                      <a:prstDash val="solid"/>
-                      <a:round/>
-                      <a:headEnd type="none" w="med" len="med"/>
-                      <a:tailEnd type="none" w="med" len="med"/>
-                    </a:lnR>
-                    <a:lnT w="6350" cap="flat" cmpd="sng" algn="ctr">
-                      <a:solidFill>
-                        <a:srgbClr val="AEB2B8"/>
-                      </a:solidFill>
-                      <a:prstDash val="solid"/>
-                      <a:round/>
-                      <a:headEnd type="none" w="med" len="med"/>
-                      <a:tailEnd type="none" w="med" len="med"/>
-                    </a:lnT>
-                    <a:lnB w="6350" cap="flat" cmpd="sng" algn="ctr">
-                      <a:solidFill>
-                        <a:srgbClr val="AEB2B8"/>
+                        <a:srgbClr val="C6C9CD"/>
                       </a:solidFill>
                       <a:prstDash val="solid"/>
                       <a:round/>
@@ -3351,7 +3151,7 @@
                         <a:buNone/>
                       </a:pPr>
                       <a:r>
-                        <a:rPr lang="en-US" sz="1200" dirty="0">
+                        <a:rPr lang="en-US" sz="1000" dirty="0">
                           <a:solidFill>
                             <a:srgbClr val="000000"/>
                           </a:solidFill>
@@ -3359,9 +3159,9 @@
                           <a:ea typeface="Arial" pitchFamily="34" charset="-122"/>
                           <a:cs typeface="Arial" pitchFamily="34" charset="-120"/>
                         </a:rPr>
-                        <a:t>Practice</a:t>
+                        <a:t>Approved corpus</a:t>
                       </a:r>
-                      <a:endParaRPr lang="en-US" sz="1200" dirty="0">
+                      <a:endParaRPr lang="en-US" sz="1000" dirty="0">
                         <a:latin typeface="Arial" charset="0"/>
                         <a:ea typeface="Arial" charset="0"/>
                         <a:cs typeface="Arial" charset="0"/>
@@ -3372,7 +3172,7 @@
                         <a:buNone/>
                       </a:pPr>
                       <a:r>
-                        <a:rPr lang="en-US" sz="1200" dirty="0">
+                        <a:rPr lang="en-US" sz="1000" dirty="0">
                           <a:solidFill>
                             <a:srgbClr val="000000"/>
                           </a:solidFill>
@@ -3380,19 +3180,19 @@
                           <a:ea typeface="Arial" pitchFamily="34" charset="-122"/>
                           <a:cs typeface="Arial" pitchFamily="34" charset="-120"/>
                         </a:rPr>
-                        <a:t>lead</a:t>
+                        <a:t>Explicit review</a:t>
                       </a:r>
-                      <a:endParaRPr lang="en-US" sz="1200" dirty="0">
+                      <a:endParaRPr lang="en-US" sz="1000" dirty="0">
                         <a:latin typeface="Arial" charset="0"/>
                         <a:ea typeface="Arial" charset="0"/>
                         <a:cs typeface="Arial" charset="0"/>
                       </a:endParaRPr>
                     </a:p>
                   </a:txBody>
-                  <a:tcPr marL="0" marR="0" marT="0" marB="0" anchor="ctr">
+                  <a:tcPr marL="101600" marR="101600" marT="38100" marB="38100" anchor="ctr">
                     <a:lnL w="6350" cap="flat" cmpd="sng" algn="ctr">
                       <a:solidFill>
-                        <a:srgbClr val="AEB2B8"/>
+                        <a:srgbClr val="C6C9CD"/>
                       </a:solidFill>
                       <a:prstDash val="solid"/>
                       <a:round/>
@@ -3401,7 +3201,7 @@
                     </a:lnL>
                     <a:lnR w="6350" cap="flat" cmpd="sng" algn="ctr">
                       <a:solidFill>
-                        <a:srgbClr val="AEB2B8"/>
+                        <a:srgbClr val="C6C9CD"/>
                       </a:solidFill>
                       <a:prstDash val="solid"/>
                       <a:round/>
@@ -3410,7 +3210,7 @@
                     </a:lnR>
                     <a:lnT w="6350" cap="flat" cmpd="sng" algn="ctr">
                       <a:solidFill>
-                        <a:srgbClr val="AEB2B8"/>
+                        <a:srgbClr val="C6C9CD"/>
                       </a:solidFill>
                       <a:prstDash val="solid"/>
                       <a:round/>
@@ -3419,7 +3219,7 @@
                     </a:lnT>
                     <a:lnB w="6350" cap="flat" cmpd="sng" algn="ctr">
                       <a:solidFill>
-                        <a:srgbClr val="AEB2B8"/>
+                        <a:srgbClr val="C6C9CD"/>
                       </a:solidFill>
                       <a:prstDash val="solid"/>
                       <a:round/>
@@ -3442,7 +3242,77 @@
                         <a:buNone/>
                       </a:pPr>
                       <a:r>
-                        <a:rPr lang="en-US" sz="1200" b="1" dirty="0">
+                        <a:rPr lang="en-US" sz="1000" dirty="0">
+                          <a:solidFill>
+                            <a:srgbClr val="000000"/>
+                          </a:solidFill>
+                          <a:latin typeface="Arial" pitchFamily="34" charset="0"/>
+                          <a:ea typeface="Arial" pitchFamily="34" charset="-122"/>
+                          <a:cs typeface="Arial" pitchFamily="34" charset="-120"/>
+                        </a:rPr>
+                        <a:t>Practice lead</a:t>
+                      </a:r>
+                      <a:endParaRPr lang="en-US" sz="1000" dirty="0">
+                        <a:latin typeface="Arial" charset="0"/>
+                        <a:ea typeface="Arial" charset="0"/>
+                        <a:cs typeface="Arial" charset="0"/>
+                      </a:endParaRPr>
+                    </a:p>
+                  </a:txBody>
+                  <a:tcPr marL="101600" marR="101600" marT="38100" marB="38100" anchor="ctr">
+                    <a:lnL w="6350" cap="flat" cmpd="sng" algn="ctr">
+                      <a:solidFill>
+                        <a:srgbClr val="C6C9CD"/>
+                      </a:solidFill>
+                      <a:prstDash val="solid"/>
+                      <a:round/>
+                      <a:headEnd type="none" w="med" len="med"/>
+                      <a:tailEnd type="none" w="med" len="med"/>
+                    </a:lnL>
+                    <a:lnR w="6350" cap="flat" cmpd="sng" algn="ctr">
+                      <a:solidFill>
+                        <a:srgbClr val="C6C9CD"/>
+                      </a:solidFill>
+                      <a:prstDash val="solid"/>
+                      <a:round/>
+                      <a:headEnd type="none" w="med" len="med"/>
+                      <a:tailEnd type="none" w="med" len="med"/>
+                    </a:lnR>
+                    <a:lnT w="6350" cap="flat" cmpd="sng" algn="ctr">
+                      <a:solidFill>
+                        <a:srgbClr val="C6C9CD"/>
+                      </a:solidFill>
+                      <a:prstDash val="solid"/>
+                      <a:round/>
+                      <a:headEnd type="none" w="med" len="med"/>
+                      <a:tailEnd type="none" w="med" len="med"/>
+                    </a:lnT>
+                    <a:lnB w="6350" cap="flat" cmpd="sng" algn="ctr">
+                      <a:solidFill>
+                        <a:srgbClr val="C6C9CD"/>
+                      </a:solidFill>
+                      <a:prstDash val="solid"/>
+                      <a:round/>
+                      <a:headEnd type="none" w="med" len="med"/>
+                      <a:tailEnd type="none" w="med" len="med"/>
+                    </a:lnB>
+                    <a:solidFill>
+                      <a:srgbClr val="FFFFFF"/>
+                    </a:solidFill>
+                  </a:tcPr>
+                </a:tc>
+                <a:tc>
+                  <a:txBody>
+                    <a:bodyPr>
+                      <a:noAutofit/>
+                    </a:bodyPr>
+                    <a:lstStyle/>
+                    <a:p>
+                      <a:pPr algn="ctr" indent="0" marL="0">
+                        <a:buNone/>
+                      </a:pPr>
+                      <a:r>
+                        <a:rPr lang="en-US" sz="1000" b="1" dirty="0">
                           <a:solidFill>
                             <a:srgbClr val="FD5108"/>
                           </a:solidFill>
@@ -3452,17 +3322,17 @@
                         </a:rPr>
                         <a:t>START</a:t>
                       </a:r>
-                      <a:endParaRPr lang="en-US" sz="1200" dirty="0">
+                      <a:endParaRPr lang="en-US" sz="1000" dirty="0">
                         <a:latin typeface="Arial" charset="0"/>
                         <a:ea typeface="Arial" charset="0"/>
                         <a:cs typeface="Arial" charset="0"/>
                       </a:endParaRPr>
                     </a:p>
                   </a:txBody>
-                  <a:tcPr marL="63500" marR="63500" marT="63500" marB="63500" anchor="ctr">
+                  <a:tcPr marL="101600" marR="101600" marT="38100" marB="38100" anchor="ctr">
                     <a:lnL w="6350" cap="flat" cmpd="sng" algn="ctr">
                       <a:solidFill>
-                        <a:srgbClr val="AEB2B8"/>
+                        <a:srgbClr val="C6C9CD"/>
                       </a:solidFill>
                       <a:prstDash val="solid"/>
                       <a:round/>
@@ -3471,7 +3341,7 @@
                     </a:lnL>
                     <a:lnR w="6350" cap="flat" cmpd="sng" algn="ctr">
                       <a:solidFill>
-                        <a:srgbClr val="AEB2B8"/>
+                        <a:srgbClr val="C6C9CD"/>
                       </a:solidFill>
                       <a:prstDash val="solid"/>
                       <a:round/>
@@ -3480,7 +3350,7 @@
                     </a:lnR>
                     <a:lnT w="6350" cap="flat" cmpd="sng" algn="ctr">
                       <a:solidFill>
-                        <a:srgbClr val="AEB2B8"/>
+                        <a:srgbClr val="C6C9CD"/>
                       </a:solidFill>
                       <a:prstDash val="solid"/>
                       <a:round/>
@@ -3489,7 +3359,7 @@
                     </a:lnT>
                     <a:lnB w="6350" cap="flat" cmpd="sng" algn="ctr">
                       <a:solidFill>
-                        <a:srgbClr val="AEB2B8"/>
+                        <a:srgbClr val="C6C9CD"/>
                       </a:solidFill>
                       <a:prstDash val="solid"/>
                       <a:round/>
@@ -3502,7 +3372,7 @@
                   </a:tcPr>
                 </a:tc>
               </a:tr>
-              <a:tr h="939800">
+              <a:tr h="400050">
                 <a:tc>
                   <a:txBody>
                     <a:bodyPr>
@@ -3514,7 +3384,7 @@
                         <a:buNone/>
                       </a:pPr>
                       <a:r>
-                        <a:rPr lang="en-US" sz="1200" b="1" dirty="0">
+                        <a:rPr lang="en-US" sz="1000" b="1" dirty="0">
                           <a:solidFill>
                             <a:srgbClr val="000000"/>
                           </a:solidFill>
@@ -3522,40 +3392,19 @@
                           <a:ea typeface="Arial" pitchFamily="34" charset="-122"/>
                           <a:cs typeface="Arial" pitchFamily="34" charset="-120"/>
                         </a:rPr>
-                        <a:t>Proposal</a:t>
+                        <a:t>Proposal drafting</a:t>
                       </a:r>
-                      <a:endParaRPr lang="en-US" sz="1200" dirty="0">
-                        <a:latin typeface="Arial" charset="0"/>
-                        <a:ea typeface="Arial" charset="0"/>
-                        <a:cs typeface="Arial" charset="0"/>
-                      </a:endParaRPr>
-                    </a:p>
-                    <a:p>
-                      <a:pPr algn="l" indent="0" marL="0">
-                        <a:buNone/>
-                      </a:pPr>
-                      <a:r>
-                        <a:rPr lang="en-US" sz="1200" b="1" dirty="0">
-                          <a:solidFill>
-                            <a:srgbClr val="000000"/>
-                          </a:solidFill>
-                          <a:latin typeface="Arial" pitchFamily="34" charset="0"/>
-                          <a:ea typeface="Arial" pitchFamily="34" charset="-122"/>
-                          <a:cs typeface="Arial" pitchFamily="34" charset="-120"/>
-                        </a:rPr>
-                        <a:t>drafting</a:t>
-                      </a:r>
-                      <a:endParaRPr lang="en-US" sz="1200" dirty="0">
+                      <a:endParaRPr lang="en-US" sz="1000" dirty="0">
                         <a:latin typeface="Arial" charset="0"/>
                         <a:ea typeface="Arial" charset="0"/>
                         <a:cs typeface="Arial" charset="0"/>
                       </a:endParaRPr>
                     </a:p>
                   </a:txBody>
-                  <a:tcPr marL="63500" marR="63500" marT="63500" marB="63500" anchor="ctr">
+                  <a:tcPr marL="101600" marR="101600" marT="38100" marB="38100" anchor="ctr">
                     <a:lnL w="6350" cap="flat" cmpd="sng" algn="ctr">
                       <a:solidFill>
-                        <a:srgbClr val="AEB2B8"/>
+                        <a:srgbClr val="C6C9CD"/>
                       </a:solidFill>
                       <a:prstDash val="solid"/>
                       <a:round/>
@@ -3564,7 +3413,7 @@
                     </a:lnL>
                     <a:lnR w="6350" cap="flat" cmpd="sng" algn="ctr">
                       <a:solidFill>
-                        <a:srgbClr val="AEB2B8"/>
+                        <a:srgbClr val="C6C9CD"/>
                       </a:solidFill>
                       <a:prstDash val="solid"/>
                       <a:round/>
@@ -3573,7 +3422,7 @@
                     </a:lnR>
                     <a:lnT w="6350" cap="flat" cmpd="sng" algn="ctr">
                       <a:solidFill>
-                        <a:srgbClr val="AEB2B8"/>
+                        <a:srgbClr val="C6C9CD"/>
                       </a:solidFill>
                       <a:prstDash val="solid"/>
                       <a:round/>
@@ -3582,119 +3431,7 @@
                     </a:lnT>
                     <a:lnB w="6350" cap="flat" cmpd="sng" algn="ctr">
                       <a:solidFill>
-                        <a:srgbClr val="AEB2B8"/>
-                      </a:solidFill>
-                      <a:prstDash val="solid"/>
-                      <a:round/>
-                      <a:headEnd type="none" w="med" len="med"/>
-                      <a:tailEnd type="none" w="med" len="med"/>
-                    </a:lnB>
-                    <a:solidFill>
-                      <a:srgbClr val="F5F7F8"/>
-                    </a:solidFill>
-                  </a:tcPr>
-                </a:tc>
-                <a:tc>
-                  <a:txBody>
-                    <a:bodyPr>
-                      <a:noAutofit/>
-                    </a:bodyPr>
-                    <a:lstStyle/>
-                    <a:p>
-                      <a:pPr algn="l" indent="0" marL="0">
-                        <a:buNone/>
-                      </a:pPr>
-                      <a:r>
-                        <a:rPr lang="en-US" sz="1200" dirty="0">
-                          <a:solidFill>
-                            <a:srgbClr val="000000"/>
-                          </a:solidFill>
-                          <a:latin typeface="Arial" pitchFamily="34" charset="0"/>
-                          <a:ea typeface="Arial" pitchFamily="34" charset="-122"/>
-                          <a:cs typeface="Arial" pitchFamily="34" charset="-120"/>
-                        </a:rPr>
-                        <a:t>Claims and</a:t>
-                      </a:r>
-                      <a:endParaRPr lang="en-US" sz="1200" dirty="0">
-                        <a:latin typeface="Arial" charset="0"/>
-                        <a:ea typeface="Arial" charset="0"/>
-                        <a:cs typeface="Arial" charset="0"/>
-                      </a:endParaRPr>
-                    </a:p>
-                    <a:p>
-                      <a:pPr algn="l" indent="0" marL="0">
-                        <a:buNone/>
-                      </a:pPr>
-                      <a:r>
-                        <a:rPr lang="en-US" sz="1200" dirty="0">
-                          <a:solidFill>
-                            <a:srgbClr val="000000"/>
-                          </a:solidFill>
-                          <a:latin typeface="Arial" pitchFamily="34" charset="0"/>
-                          <a:ea typeface="Arial" pitchFamily="34" charset="-122"/>
-                          <a:cs typeface="Arial" pitchFamily="34" charset="-120"/>
-                        </a:rPr>
-                        <a:t>commitments</a:t>
-                      </a:r>
-                      <a:endParaRPr lang="en-US" sz="1200" dirty="0">
-                        <a:latin typeface="Arial" charset="0"/>
-                        <a:ea typeface="Arial" charset="0"/>
-                        <a:cs typeface="Arial" charset="0"/>
-                      </a:endParaRPr>
-                    </a:p>
-                    <a:p>
-                      <a:pPr algn="l" indent="0" marL="0">
-                        <a:buNone/>
-                      </a:pPr>
-                      <a:r>
-                        <a:rPr lang="en-US" sz="1200" dirty="0">
-                          <a:solidFill>
-                            <a:srgbClr val="000000"/>
-                          </a:solidFill>
-                          <a:latin typeface="Arial" pitchFamily="34" charset="0"/>
-                          <a:ea typeface="Arial" pitchFamily="34" charset="-122"/>
-                          <a:cs typeface="Arial" pitchFamily="34" charset="-120"/>
-                        </a:rPr>
-                        <a:t>need controls</a:t>
-                      </a:r>
-                      <a:endParaRPr lang="en-US" sz="1200" dirty="0">
-                        <a:latin typeface="Arial" charset="0"/>
-                        <a:ea typeface="Arial" charset="0"/>
-                        <a:cs typeface="Arial" charset="0"/>
-                      </a:endParaRPr>
-                    </a:p>
-                  </a:txBody>
-                  <a:tcPr marL="63500" marR="63500" marT="63500" marB="63500" anchor="ctr">
-                    <a:lnL w="6350" cap="flat" cmpd="sng" algn="ctr">
-                      <a:solidFill>
-                        <a:srgbClr val="AEB2B8"/>
-                      </a:solidFill>
-                      <a:prstDash val="solid"/>
-                      <a:round/>
-                      <a:headEnd type="none" w="med" len="med"/>
-                      <a:tailEnd type="none" w="med" len="med"/>
-                    </a:lnL>
-                    <a:lnR w="6350" cap="flat" cmpd="sng" algn="ctr">
-                      <a:solidFill>
-                        <a:srgbClr val="AEB2B8"/>
-                      </a:solidFill>
-                      <a:prstDash val="solid"/>
-                      <a:round/>
-                      <a:headEnd type="none" w="med" len="med"/>
-                      <a:tailEnd type="none" w="med" len="med"/>
-                    </a:lnR>
-                    <a:lnT w="6350" cap="flat" cmpd="sng" algn="ctr">
-                      <a:solidFill>
-                        <a:srgbClr val="AEB2B8"/>
-                      </a:solidFill>
-                      <a:prstDash val="solid"/>
-                      <a:round/>
-                      <a:headEnd type="none" w="med" len="med"/>
-                      <a:tailEnd type="none" w="med" len="med"/>
-                    </a:lnT>
-                    <a:lnB w="6350" cap="flat" cmpd="sng" algn="ctr">
-                      <a:solidFill>
-                        <a:srgbClr val="AEB2B8"/>
+                        <a:srgbClr val="C6C9CD"/>
                       </a:solidFill>
                       <a:prstDash val="solid"/>
                       <a:round/>
@@ -3717,7 +3454,7 @@
                         <a:buNone/>
                       </a:pPr>
                       <a:r>
-                        <a:rPr lang="en-US" sz="1200" dirty="0">
+                        <a:rPr lang="en-US" sz="1000" dirty="0">
                           <a:solidFill>
                             <a:srgbClr val="000000"/>
                           </a:solidFill>
@@ -3725,9 +3462,9 @@
                           <a:ea typeface="Arial" pitchFamily="34" charset="-122"/>
                           <a:cs typeface="Arial" pitchFamily="34" charset="-120"/>
                         </a:rPr>
-                        <a:t>BD</a:t>
+                        <a:t>Claims and commitments</a:t>
                       </a:r>
-                      <a:endParaRPr lang="en-US" sz="1200" dirty="0">
+                      <a:endParaRPr lang="en-US" sz="1000" dirty="0">
                         <a:latin typeface="Arial" charset="0"/>
                         <a:ea typeface="Arial" charset="0"/>
                         <a:cs typeface="Arial" charset="0"/>
@@ -3738,7 +3475,7 @@
                         <a:buNone/>
                       </a:pPr>
                       <a:r>
-                        <a:rPr lang="en-US" sz="1200" dirty="0">
+                        <a:rPr lang="en-US" sz="1000" dirty="0">
                           <a:solidFill>
                             <a:srgbClr val="000000"/>
                           </a:solidFill>
@@ -3746,19 +3483,19 @@
                           <a:ea typeface="Arial" pitchFamily="34" charset="-122"/>
                           <a:cs typeface="Arial" pitchFamily="34" charset="-120"/>
                         </a:rPr>
-                        <a:t>lead</a:t>
+                        <a:t>need controls</a:t>
                       </a:r>
-                      <a:endParaRPr lang="en-US" sz="1200" dirty="0">
+                      <a:endParaRPr lang="en-US" sz="1000" dirty="0">
                         <a:latin typeface="Arial" charset="0"/>
                         <a:ea typeface="Arial" charset="0"/>
                         <a:cs typeface="Arial" charset="0"/>
                       </a:endParaRPr>
                     </a:p>
                   </a:txBody>
-                  <a:tcPr marL="0" marR="0" marT="0" marB="0" anchor="ctr">
+                  <a:tcPr marL="101600" marR="101600" marT="38100" marB="38100" anchor="ctr">
                     <a:lnL w="6350" cap="flat" cmpd="sng" algn="ctr">
                       <a:solidFill>
-                        <a:srgbClr val="AEB2B8"/>
+                        <a:srgbClr val="C6C9CD"/>
                       </a:solidFill>
                       <a:prstDash val="solid"/>
                       <a:round/>
@@ -3767,7 +3504,7 @@
                     </a:lnL>
                     <a:lnR w="6350" cap="flat" cmpd="sng" algn="ctr">
                       <a:solidFill>
-                        <a:srgbClr val="AEB2B8"/>
+                        <a:srgbClr val="C6C9CD"/>
                       </a:solidFill>
                       <a:prstDash val="solid"/>
                       <a:round/>
@@ -3776,7 +3513,7 @@
                     </a:lnR>
                     <a:lnT w="6350" cap="flat" cmpd="sng" algn="ctr">
                       <a:solidFill>
-                        <a:srgbClr val="AEB2B8"/>
+                        <a:srgbClr val="C6C9CD"/>
                       </a:solidFill>
                       <a:prstDash val="solid"/>
                       <a:round/>
@@ -3785,7 +3522,7 @@
                     </a:lnT>
                     <a:lnB w="6350" cap="flat" cmpd="sng" algn="ctr">
                       <a:solidFill>
-                        <a:srgbClr val="AEB2B8"/>
+                        <a:srgbClr val="C6C9CD"/>
                       </a:solidFill>
                       <a:prstDash val="solid"/>
                       <a:round/>
@@ -3808,7 +3545,77 @@
                         <a:buNone/>
                       </a:pPr>
                       <a:r>
-                        <a:rPr lang="en-US" sz="1200" b="1" dirty="0">
+                        <a:rPr lang="en-US" sz="1000" dirty="0">
+                          <a:solidFill>
+                            <a:srgbClr val="000000"/>
+                          </a:solidFill>
+                          <a:latin typeface="Arial" pitchFamily="34" charset="0"/>
+                          <a:ea typeface="Arial" pitchFamily="34" charset="-122"/>
+                          <a:cs typeface="Arial" pitchFamily="34" charset="-120"/>
+                        </a:rPr>
+                        <a:t>BD lead</a:t>
+                      </a:r>
+                      <a:endParaRPr lang="en-US" sz="1000" dirty="0">
+                        <a:latin typeface="Arial" charset="0"/>
+                        <a:ea typeface="Arial" charset="0"/>
+                        <a:cs typeface="Arial" charset="0"/>
+                      </a:endParaRPr>
+                    </a:p>
+                  </a:txBody>
+                  <a:tcPr marL="101600" marR="101600" marT="38100" marB="38100" anchor="ctr">
+                    <a:lnL w="6350" cap="flat" cmpd="sng" algn="ctr">
+                      <a:solidFill>
+                        <a:srgbClr val="C6C9CD"/>
+                      </a:solidFill>
+                      <a:prstDash val="solid"/>
+                      <a:round/>
+                      <a:headEnd type="none" w="med" len="med"/>
+                      <a:tailEnd type="none" w="med" len="med"/>
+                    </a:lnL>
+                    <a:lnR w="6350" cap="flat" cmpd="sng" algn="ctr">
+                      <a:solidFill>
+                        <a:srgbClr val="C6C9CD"/>
+                      </a:solidFill>
+                      <a:prstDash val="solid"/>
+                      <a:round/>
+                      <a:headEnd type="none" w="med" len="med"/>
+                      <a:tailEnd type="none" w="med" len="med"/>
+                    </a:lnR>
+                    <a:lnT w="6350" cap="flat" cmpd="sng" algn="ctr">
+                      <a:solidFill>
+                        <a:srgbClr val="C6C9CD"/>
+                      </a:solidFill>
+                      <a:prstDash val="solid"/>
+                      <a:round/>
+                      <a:headEnd type="none" w="med" len="med"/>
+                      <a:tailEnd type="none" w="med" len="med"/>
+                    </a:lnT>
+                    <a:lnB w="6350" cap="flat" cmpd="sng" algn="ctr">
+                      <a:solidFill>
+                        <a:srgbClr val="C6C9CD"/>
+                      </a:solidFill>
+                      <a:prstDash val="solid"/>
+                      <a:round/>
+                      <a:headEnd type="none" w="med" len="med"/>
+                      <a:tailEnd type="none" w="med" len="med"/>
+                    </a:lnB>
+                    <a:solidFill>
+                      <a:srgbClr val="F5F7F8"/>
+                    </a:solidFill>
+                  </a:tcPr>
+                </a:tc>
+                <a:tc>
+                  <a:txBody>
+                    <a:bodyPr>
+                      <a:noAutofit/>
+                    </a:bodyPr>
+                    <a:lstStyle/>
+                    <a:p>
+                      <a:pPr algn="ctr" indent="0" marL="0">
+                        <a:buNone/>
+                      </a:pPr>
+                      <a:r>
+                        <a:rPr lang="en-US" sz="1000" b="1" dirty="0">
                           <a:solidFill>
                             <a:srgbClr val="FD5108"/>
                           </a:solidFill>
@@ -3818,17 +3625,17 @@
                         </a:rPr>
                         <a:t>NEXT</a:t>
                       </a:r>
-                      <a:endParaRPr lang="en-US" sz="1200" dirty="0">
+                      <a:endParaRPr lang="en-US" sz="1000" dirty="0">
                         <a:latin typeface="Arial" charset="0"/>
                         <a:ea typeface="Arial" charset="0"/>
                         <a:cs typeface="Arial" charset="0"/>
                       </a:endParaRPr>
                     </a:p>
                   </a:txBody>
-                  <a:tcPr marL="63500" marR="63500" marT="63500" marB="63500" anchor="ctr">
+                  <a:tcPr marL="101600" marR="101600" marT="38100" marB="38100" anchor="ctr">
                     <a:lnL w="6350" cap="flat" cmpd="sng" algn="ctr">
                       <a:solidFill>
-                        <a:srgbClr val="AEB2B8"/>
+                        <a:srgbClr val="C6C9CD"/>
                       </a:solidFill>
                       <a:prstDash val="solid"/>
                       <a:round/>
@@ -3837,7 +3644,7 @@
                     </a:lnL>
                     <a:lnR w="6350" cap="flat" cmpd="sng" algn="ctr">
                       <a:solidFill>
-                        <a:srgbClr val="AEB2B8"/>
+                        <a:srgbClr val="C6C9CD"/>
                       </a:solidFill>
                       <a:prstDash val="solid"/>
                       <a:round/>
@@ -3846,7 +3653,7 @@
                     </a:lnR>
                     <a:lnT w="6350" cap="flat" cmpd="sng" algn="ctr">
                       <a:solidFill>
-                        <a:srgbClr val="AEB2B8"/>
+                        <a:srgbClr val="C6C9CD"/>
                       </a:solidFill>
                       <a:prstDash val="solid"/>
                       <a:round/>
@@ -3855,7 +3662,7 @@
                     </a:lnT>
                     <a:lnB w="6350" cap="flat" cmpd="sng" algn="ctr">
                       <a:solidFill>
-                        <a:srgbClr val="AEB2B8"/>
+                        <a:srgbClr val="C6C9CD"/>
                       </a:solidFill>
                       <a:prstDash val="solid"/>
                       <a:round/>
@@ -3868,7 +3675,7 @@
                   </a:tcPr>
                 </a:tc>
               </a:tr>
-              <a:tr h="920750">
+              <a:tr h="406400">
                 <a:tc>
                   <a:txBody>
                     <a:bodyPr>
@@ -3880,7 +3687,7 @@
                         <a:buNone/>
                       </a:pPr>
                       <a:r>
-                        <a:rPr lang="en-US" sz="1200" b="1" dirty="0">
+                        <a:rPr lang="en-US" sz="1000" b="1" dirty="0">
                           <a:solidFill>
                             <a:srgbClr val="000000"/>
                           </a:solidFill>
@@ -3888,40 +3695,19 @@
                           <a:ea typeface="Arial" pitchFamily="34" charset="-122"/>
                           <a:cs typeface="Arial" pitchFamily="34" charset="-120"/>
                         </a:rPr>
-                        <a:t>Knowledge</a:t>
+                        <a:t>Knowledge retrieval</a:t>
                       </a:r>
-                      <a:endParaRPr lang="en-US" sz="1200" dirty="0">
-                        <a:latin typeface="Arial" charset="0"/>
-                        <a:ea typeface="Arial" charset="0"/>
-                        <a:cs typeface="Arial" charset="0"/>
-                      </a:endParaRPr>
-                    </a:p>
-                    <a:p>
-                      <a:pPr algn="l" indent="0" marL="0">
-                        <a:buNone/>
-                      </a:pPr>
-                      <a:r>
-                        <a:rPr lang="en-US" sz="1200" b="1" dirty="0">
-                          <a:solidFill>
-                            <a:srgbClr val="000000"/>
-                          </a:solidFill>
-                          <a:latin typeface="Arial" pitchFamily="34" charset="0"/>
-                          <a:ea typeface="Arial" pitchFamily="34" charset="-122"/>
-                          <a:cs typeface="Arial" pitchFamily="34" charset="-120"/>
-                        </a:rPr>
-                        <a:t>retrieval</a:t>
-                      </a:r>
-                      <a:endParaRPr lang="en-US" sz="1200" dirty="0">
+                      <a:endParaRPr lang="en-US" sz="1000" dirty="0">
                         <a:latin typeface="Arial" charset="0"/>
                         <a:ea typeface="Arial" charset="0"/>
                         <a:cs typeface="Arial" charset="0"/>
                       </a:endParaRPr>
                     </a:p>
                   </a:txBody>
-                  <a:tcPr marL="63500" marR="63500" marT="63500" marB="63500" anchor="ctr">
+                  <a:tcPr marL="101600" marR="101600" marT="38100" marB="38100" anchor="ctr">
                     <a:lnL w="6350" cap="flat" cmpd="sng" algn="ctr">
                       <a:solidFill>
-                        <a:srgbClr val="AEB2B8"/>
+                        <a:srgbClr val="C6C9CD"/>
                       </a:solidFill>
                       <a:prstDash val="solid"/>
                       <a:round/>
@@ -3930,7 +3716,7 @@
                     </a:lnL>
                     <a:lnR w="6350" cap="flat" cmpd="sng" algn="ctr">
                       <a:solidFill>
-                        <a:srgbClr val="AEB2B8"/>
+                        <a:srgbClr val="C6C9CD"/>
                       </a:solidFill>
                       <a:prstDash val="solid"/>
                       <a:round/>
@@ -3939,7 +3725,7 @@
                     </a:lnR>
                     <a:lnT w="6350" cap="flat" cmpd="sng" algn="ctr">
                       <a:solidFill>
-                        <a:srgbClr val="AEB2B8"/>
+                        <a:srgbClr val="C6C9CD"/>
                       </a:solidFill>
                       <a:prstDash val="solid"/>
                       <a:round/>
@@ -3948,98 +3734,7 @@
                     </a:lnT>
                     <a:lnB w="6350" cap="flat" cmpd="sng" algn="ctr">
                       <a:solidFill>
-                        <a:srgbClr val="AEB2B8"/>
-                      </a:solidFill>
-                      <a:prstDash val="solid"/>
-                      <a:round/>
-                      <a:headEnd type="none" w="med" len="med"/>
-                      <a:tailEnd type="none" w="med" len="med"/>
-                    </a:lnB>
-                    <a:solidFill>
-                      <a:srgbClr val="FFFFFF"/>
-                    </a:solidFill>
-                  </a:tcPr>
-                </a:tc>
-                <a:tc>
-                  <a:txBody>
-                    <a:bodyPr>
-                      <a:noAutofit/>
-                    </a:bodyPr>
-                    <a:lstStyle/>
-                    <a:p>
-                      <a:pPr algn="l" indent="0" marL="0">
-                        <a:buNone/>
-                      </a:pPr>
-                      <a:r>
-                        <a:rPr lang="en-US" sz="1200" dirty="0">
-                          <a:solidFill>
-                            <a:srgbClr val="000000"/>
-                          </a:solidFill>
-                          <a:latin typeface="Arial" pitchFamily="34" charset="0"/>
-                          <a:ea typeface="Arial" pitchFamily="34" charset="-122"/>
-                          <a:cs typeface="Arial" pitchFamily="34" charset="-120"/>
-                        </a:rPr>
-                        <a:t>Permissions need</a:t>
-                      </a:r>
-                      <a:endParaRPr lang="en-US" sz="1200" dirty="0">
-                        <a:latin typeface="Arial" charset="0"/>
-                        <a:ea typeface="Arial" charset="0"/>
-                        <a:cs typeface="Arial" charset="0"/>
-                      </a:endParaRPr>
-                    </a:p>
-                    <a:p>
-                      <a:pPr algn="l" indent="0" marL="0">
-                        <a:buNone/>
-                      </a:pPr>
-                      <a:r>
-                        <a:rPr lang="en-US" sz="1200" dirty="0">
-                          <a:solidFill>
-                            <a:srgbClr val="000000"/>
-                          </a:solidFill>
-                          <a:latin typeface="Arial" pitchFamily="34" charset="0"/>
-                          <a:ea typeface="Arial" pitchFamily="34" charset="-122"/>
-                          <a:cs typeface="Arial" pitchFamily="34" charset="-120"/>
-                        </a:rPr>
-                        <a:t>cleanup</a:t>
-                      </a:r>
-                      <a:endParaRPr lang="en-US" sz="1200" dirty="0">
-                        <a:latin typeface="Arial" charset="0"/>
-                        <a:ea typeface="Arial" charset="0"/>
-                        <a:cs typeface="Arial" charset="0"/>
-                      </a:endParaRPr>
-                    </a:p>
-                  </a:txBody>
-                  <a:tcPr marL="63500" marR="63500" marT="63500" marB="63500" anchor="ctr">
-                    <a:lnL w="6350" cap="flat" cmpd="sng" algn="ctr">
-                      <a:solidFill>
-                        <a:srgbClr val="AEB2B8"/>
-                      </a:solidFill>
-                      <a:prstDash val="solid"/>
-                      <a:round/>
-                      <a:headEnd type="none" w="med" len="med"/>
-                      <a:tailEnd type="none" w="med" len="med"/>
-                    </a:lnL>
-                    <a:lnR w="6350" cap="flat" cmpd="sng" algn="ctr">
-                      <a:solidFill>
-                        <a:srgbClr val="AEB2B8"/>
-                      </a:solidFill>
-                      <a:prstDash val="solid"/>
-                      <a:round/>
-                      <a:headEnd type="none" w="med" len="med"/>
-                      <a:tailEnd type="none" w="med" len="med"/>
-                    </a:lnR>
-                    <a:lnT w="6350" cap="flat" cmpd="sng" algn="ctr">
-                      <a:solidFill>
-                        <a:srgbClr val="AEB2B8"/>
-                      </a:solidFill>
-                      <a:prstDash val="solid"/>
-                      <a:round/>
-                      <a:headEnd type="none" w="med" len="med"/>
-                      <a:tailEnd type="none" w="med" len="med"/>
-                    </a:lnT>
-                    <a:lnB w="6350" cap="flat" cmpd="sng" algn="ctr">
-                      <a:solidFill>
-                        <a:srgbClr val="AEB2B8"/>
+                        <a:srgbClr val="C6C9CD"/>
                       </a:solidFill>
                       <a:prstDash val="solid"/>
                       <a:round/>
@@ -4062,7 +3757,7 @@
                         <a:buNone/>
                       </a:pPr>
                       <a:r>
-                        <a:rPr lang="en-US" sz="1200" dirty="0">
+                        <a:rPr lang="en-US" sz="1000" dirty="0">
                           <a:solidFill>
                             <a:srgbClr val="000000"/>
                           </a:solidFill>
@@ -4070,9 +3765,9 @@
                           <a:ea typeface="Arial" pitchFamily="34" charset="-122"/>
                           <a:cs typeface="Arial" pitchFamily="34" charset="-120"/>
                         </a:rPr>
-                        <a:t>Knowledge</a:t>
+                        <a:t>Permissions need</a:t>
                       </a:r>
-                      <a:endParaRPr lang="en-US" sz="1200" dirty="0">
+                      <a:endParaRPr lang="en-US" sz="1000" dirty="0">
                         <a:latin typeface="Arial" charset="0"/>
                         <a:ea typeface="Arial" charset="0"/>
                         <a:cs typeface="Arial" charset="0"/>
@@ -4083,7 +3778,7 @@
                         <a:buNone/>
                       </a:pPr>
                       <a:r>
-                        <a:rPr lang="en-US" sz="1200" dirty="0">
+                        <a:rPr lang="en-US" sz="1000" dirty="0">
                           <a:solidFill>
                             <a:srgbClr val="000000"/>
                           </a:solidFill>
@@ -4091,19 +3786,19 @@
                           <a:ea typeface="Arial" pitchFamily="34" charset="-122"/>
                           <a:cs typeface="Arial" pitchFamily="34" charset="-120"/>
                         </a:rPr>
-                        <a:t>lead</a:t>
+                        <a:t>cleanup</a:t>
                       </a:r>
-                      <a:endParaRPr lang="en-US" sz="1200" dirty="0">
+                      <a:endParaRPr lang="en-US" sz="1000" dirty="0">
                         <a:latin typeface="Arial" charset="0"/>
                         <a:ea typeface="Arial" charset="0"/>
                         <a:cs typeface="Arial" charset="0"/>
                       </a:endParaRPr>
                     </a:p>
                   </a:txBody>
-                  <a:tcPr marL="0" marR="0" marT="0" marB="0" anchor="ctr">
+                  <a:tcPr marL="101600" marR="101600" marT="38100" marB="38100" anchor="ctr">
                     <a:lnL w="6350" cap="flat" cmpd="sng" algn="ctr">
                       <a:solidFill>
-                        <a:srgbClr val="AEB2B8"/>
+                        <a:srgbClr val="C6C9CD"/>
                       </a:solidFill>
                       <a:prstDash val="solid"/>
                       <a:round/>
@@ -4112,7 +3807,7 @@
                     </a:lnL>
                     <a:lnR w="6350" cap="flat" cmpd="sng" algn="ctr">
                       <a:solidFill>
-                        <a:srgbClr val="AEB2B8"/>
+                        <a:srgbClr val="C6C9CD"/>
                       </a:solidFill>
                       <a:prstDash val="solid"/>
                       <a:round/>
@@ -4121,7 +3816,7 @@
                     </a:lnR>
                     <a:lnT w="6350" cap="flat" cmpd="sng" algn="ctr">
                       <a:solidFill>
-                        <a:srgbClr val="AEB2B8"/>
+                        <a:srgbClr val="C6C9CD"/>
                       </a:solidFill>
                       <a:prstDash val="solid"/>
                       <a:round/>
@@ -4130,7 +3825,7 @@
                     </a:lnT>
                     <a:lnB w="6350" cap="flat" cmpd="sng" algn="ctr">
                       <a:solidFill>
-                        <a:srgbClr val="AEB2B8"/>
+                        <a:srgbClr val="C6C9CD"/>
                       </a:solidFill>
                       <a:prstDash val="solid"/>
                       <a:round/>
@@ -4153,7 +3848,77 @@
                         <a:buNone/>
                       </a:pPr>
                       <a:r>
-                        <a:rPr lang="en-US" sz="1200" b="1" dirty="0">
+                        <a:rPr lang="en-US" sz="1000" dirty="0">
+                          <a:solidFill>
+                            <a:srgbClr val="000000"/>
+                          </a:solidFill>
+                          <a:latin typeface="Arial" pitchFamily="34" charset="0"/>
+                          <a:ea typeface="Arial" pitchFamily="34" charset="-122"/>
+                          <a:cs typeface="Arial" pitchFamily="34" charset="-120"/>
+                        </a:rPr>
+                        <a:t>Knowledge lead</a:t>
+                      </a:r>
+                      <a:endParaRPr lang="en-US" sz="1000" dirty="0">
+                        <a:latin typeface="Arial" charset="0"/>
+                        <a:ea typeface="Arial" charset="0"/>
+                        <a:cs typeface="Arial" charset="0"/>
+                      </a:endParaRPr>
+                    </a:p>
+                  </a:txBody>
+                  <a:tcPr marL="101600" marR="101600" marT="38100" marB="38100" anchor="ctr">
+                    <a:lnL w="6350" cap="flat" cmpd="sng" algn="ctr">
+                      <a:solidFill>
+                        <a:srgbClr val="C6C9CD"/>
+                      </a:solidFill>
+                      <a:prstDash val="solid"/>
+                      <a:round/>
+                      <a:headEnd type="none" w="med" len="med"/>
+                      <a:tailEnd type="none" w="med" len="med"/>
+                    </a:lnL>
+                    <a:lnR w="6350" cap="flat" cmpd="sng" algn="ctr">
+                      <a:solidFill>
+                        <a:srgbClr val="C6C9CD"/>
+                      </a:solidFill>
+                      <a:prstDash val="solid"/>
+                      <a:round/>
+                      <a:headEnd type="none" w="med" len="med"/>
+                      <a:tailEnd type="none" w="med" len="med"/>
+                    </a:lnR>
+                    <a:lnT w="6350" cap="flat" cmpd="sng" algn="ctr">
+                      <a:solidFill>
+                        <a:srgbClr val="C6C9CD"/>
+                      </a:solidFill>
+                      <a:prstDash val="solid"/>
+                      <a:round/>
+                      <a:headEnd type="none" w="med" len="med"/>
+                      <a:tailEnd type="none" w="med" len="med"/>
+                    </a:lnT>
+                    <a:lnB w="6350" cap="flat" cmpd="sng" algn="ctr">
+                      <a:solidFill>
+                        <a:srgbClr val="C6C9CD"/>
+                      </a:solidFill>
+                      <a:prstDash val="solid"/>
+                      <a:round/>
+                      <a:headEnd type="none" w="med" len="med"/>
+                      <a:tailEnd type="none" w="med" len="med"/>
+                    </a:lnB>
+                    <a:solidFill>
+                      <a:srgbClr val="FFFFFF"/>
+                    </a:solidFill>
+                  </a:tcPr>
+                </a:tc>
+                <a:tc>
+                  <a:txBody>
+                    <a:bodyPr>
+                      <a:noAutofit/>
+                    </a:bodyPr>
+                    <a:lstStyle/>
+                    <a:p>
+                      <a:pPr algn="ctr" indent="0" marL="0">
+                        <a:buNone/>
+                      </a:pPr>
+                      <a:r>
+                        <a:rPr lang="en-US" sz="1000" b="1" dirty="0">
                           <a:solidFill>
                             <a:srgbClr val="FD5108"/>
                           </a:solidFill>
@@ -4163,17 +3928,17 @@
                         </a:rPr>
                         <a:t>LATER</a:t>
                       </a:r>
-                      <a:endParaRPr lang="en-US" sz="1200" dirty="0">
+                      <a:endParaRPr lang="en-US" sz="1000" dirty="0">
                         <a:latin typeface="Arial" charset="0"/>
                         <a:ea typeface="Arial" charset="0"/>
                         <a:cs typeface="Arial" charset="0"/>
                       </a:endParaRPr>
                     </a:p>
                   </a:txBody>
-                  <a:tcPr marL="63500" marR="63500" marT="63500" marB="63500" anchor="ctr">
+                  <a:tcPr marL="101600" marR="101600" marT="38100" marB="38100" anchor="ctr">
                     <a:lnL w="6350" cap="flat" cmpd="sng" algn="ctr">
                       <a:solidFill>
-                        <a:srgbClr val="AEB2B8"/>
+                        <a:srgbClr val="C6C9CD"/>
                       </a:solidFill>
                       <a:prstDash val="solid"/>
                       <a:round/>
@@ -4182,7 +3947,7 @@
                     </a:lnL>
                     <a:lnR w="6350" cap="flat" cmpd="sng" algn="ctr">
                       <a:solidFill>
-                        <a:srgbClr val="AEB2B8"/>
+                        <a:srgbClr val="C6C9CD"/>
                       </a:solidFill>
                       <a:prstDash val="solid"/>
                       <a:round/>
@@ -4191,7 +3956,7 @@
                     </a:lnR>
                     <a:lnT w="6350" cap="flat" cmpd="sng" algn="ctr">
                       <a:solidFill>
-                        <a:srgbClr val="AEB2B8"/>
+                        <a:srgbClr val="C6C9CD"/>
                       </a:solidFill>
                       <a:prstDash val="solid"/>
                       <a:round/>
@@ -4200,7 +3965,7 @@
                     </a:lnT>
                     <a:lnB w="6350" cap="flat" cmpd="sng" algn="ctr">
                       <a:solidFill>
-                        <a:srgbClr val="AEB2B8"/>
+                        <a:srgbClr val="C6C9CD"/>
                       </a:solidFill>
                       <a:prstDash val="solid"/>
                       <a:round/>
@@ -4219,14 +3984,14 @@
       </p:graphicFrame>
       <p:sp>
         <p:nvSpPr>
-          <p:cNvPr id="11" name="headline"/>
+          <p:cNvPr id="8" name="headline"/>
           <p:cNvSpPr txBox="1"/>
           <p:nvPr/>
         </p:nvSpPr>
         <p:spPr>
           <a:xfrm>
-            <a:off x="304800" y="527050"/>
-            <a:ext cx="11582400" cy="508000"/>
+            <a:off x="292100" y="533400"/>
+            <a:ext cx="11607800" cy="482600"/>
           </a:xfrm>
           <a:prstGeom prst="rect">
             <a:avLst/>
@@ -4264,14 +4029,14 @@
       </p:sp>
       <p:sp>
         <p:nvSpPr>
-          <p:cNvPr id="12" name="subtitle"/>
+          <p:cNvPr id="9" name="subtitle"/>
           <p:cNvSpPr txBox="1"/>
           <p:nvPr/>
         </p:nvSpPr>
         <p:spPr>
           <a:xfrm>
-            <a:off x="304800" y="1060450"/>
-            <a:ext cx="11582400" cy="304800"/>
+            <a:off x="298450" y="1047750"/>
+            <a:ext cx="11588750" cy="304800"/>
           </a:xfrm>
           <a:prstGeom prst="rect">
             <a:avLst/>
@@ -4309,14 +4074,14 @@
       </p:sp>
       <p:sp>
         <p:nvSpPr>
-          <p:cNvPr id="13" name="capacity-heading"/>
+          <p:cNvPr id="10" name="capacity-heading"/>
           <p:cNvSpPr txBox="1"/>
           <p:nvPr/>
         </p:nvSpPr>
         <p:spPr>
           <a:xfrm>
-            <a:off x="203200" y="1625600"/>
-            <a:ext cx="3937000" cy="266700"/>
+            <a:off x="234950" y="1409700"/>
+            <a:ext cx="4318000" cy="241300"/>
           </a:xfrm>
           <a:prstGeom prst="rect">
             <a:avLst/>
@@ -4338,7 +4103,7 @@
               <a:defRPr spc="0"/>
             </a:pPr>
             <a:r>
-              <a:rPr lang="en-US" sz="1400" b="1" dirty="0" spc="0">
+              <a:rPr lang="en-US" sz="1350" b="1" dirty="0" spc="0">
                 <a:solidFill>
                   <a:srgbClr val="000000"/>
                 </a:solidFill>
@@ -4348,20 +4113,20 @@
               </a:rPr>
               <a:t>ANNUAL CAPACITY POTENTIAL</a:t>
             </a:r>
-            <a:endParaRPr lang="en-US" sz="1400" dirty="0" spc="0"/>
+            <a:endParaRPr lang="en-US" sz="1350" dirty="0" spc="0"/>
           </a:p>
         </p:txBody>
       </p:sp>
       <p:sp>
         <p:nvSpPr>
-          <p:cNvPr id="14" name="sequencing-heading"/>
+          <p:cNvPr id="11" name="chart-unit"/>
           <p:cNvSpPr txBox="1"/>
           <p:nvPr/>
         </p:nvSpPr>
         <p:spPr>
           <a:xfrm>
-            <a:off x="4254500" y="1625600"/>
-            <a:ext cx="4197350" cy="266700"/>
+            <a:off x="234950" y="1638300"/>
+            <a:ext cx="1905000" cy="177800"/>
           </a:xfrm>
           <a:prstGeom prst="rect">
             <a:avLst/>
@@ -4383,7 +4148,7 @@
               <a:defRPr spc="0"/>
             </a:pPr>
             <a:r>
-              <a:rPr lang="en-US" sz="1400" b="1" dirty="0" spc="0">
+              <a:rPr lang="en-US" sz="1100" dirty="0" spc="0">
                 <a:solidFill>
                   <a:srgbClr val="000000"/>
                 </a:solidFill>
@@ -4391,22 +4156,22 @@
                 <a:ea typeface="Arial" pitchFamily="34" charset="-122"/>
                 <a:cs typeface="Arial" pitchFamily="34" charset="-120"/>
               </a:rPr>
-              <a:t>PILOT SEQUENCING TEST</a:t>
+              <a:t>Illustrative hours</a:t>
             </a:r>
-            <a:endParaRPr lang="en-US" sz="1400" dirty="0" spc="0"/>
+            <a:endParaRPr lang="en-US" sz="1100" dirty="0" spc="0"/>
           </a:p>
         </p:txBody>
       </p:sp>
       <p:sp>
         <p:nvSpPr>
-          <p:cNvPr id="15" name="reason-heading"/>
+          <p:cNvPr id="12" name="value-model-heading"/>
           <p:cNvSpPr txBox="1"/>
           <p:nvPr/>
         </p:nvSpPr>
         <p:spPr>
           <a:xfrm>
-            <a:off x="8775700" y="1625600"/>
-            <a:ext cx="3175000" cy="266700"/>
+            <a:off x="4826000" y="1409700"/>
+            <a:ext cx="7048500" cy="241300"/>
           </a:xfrm>
           <a:prstGeom prst="rect">
             <a:avLst/>
@@ -4428,7 +4193,97 @@
               <a:defRPr spc="0"/>
             </a:pPr>
             <a:r>
-              <a:rPr lang="en-US" sz="1400" b="1" dirty="0" spc="0">
+              <a:rPr lang="en-US" sz="1350" b="1" dirty="0" spc="0">
+                <a:solidFill>
+                  <a:srgbClr val="000000"/>
+                </a:solidFill>
+                <a:latin typeface="Arial" pitchFamily="34" charset="0"/>
+                <a:ea typeface="Arial" pitchFamily="34" charset="-122"/>
+                <a:cs typeface="Arial" pitchFamily="34" charset="-120"/>
+              </a:rPr>
+              <a:t>WORKFLOW VALUE MODEL</a:t>
+            </a:r>
+            <a:endParaRPr lang="en-US" sz="1350" dirty="0" spc="0"/>
+          </a:p>
+        </p:txBody>
+      </p:sp>
+      <p:sp>
+        <p:nvSpPr>
+          <p:cNvPr id="13" name="capacity-formula"/>
+          <p:cNvSpPr txBox="1"/>
+          <p:nvPr/>
+        </p:nvSpPr>
+        <p:spPr>
+          <a:xfrm>
+            <a:off x="5016500" y="3200400"/>
+            <a:ext cx="6667500" cy="279400"/>
+          </a:xfrm>
+          <a:prstGeom prst="rect">
+            <a:avLst/>
+          </a:prstGeom>
+          <a:noFill/>
+          <a:ln/>
+        </p:spPr>
+        <p:txBody>
+          <a:bodyPr wrap="square" lIns="12700" tIns="12700" rIns="12700" bIns="12700" rtlCol="0" anchor="ctr">
+            <a:noAutofit/>
+          </a:bodyPr>
+          <a:lstStyle/>
+          <a:p>
+            <a:pPr algn="ctr" indent="0" marL="0">
+              <a:lnSpc>
+                <a:spcPct val="100000"/>
+              </a:lnSpc>
+              <a:buNone/>
+              <a:defRPr spc="0"/>
+            </a:pPr>
+            <a:r>
+              <a:rPr lang="en-US" sz="1200" b="1" dirty="0" spc="0">
+                <a:solidFill>
+                  <a:srgbClr val="000000"/>
+                </a:solidFill>
+                <a:latin typeface="Arial" pitchFamily="34" charset="0"/>
+                <a:ea typeface="Arial" pitchFamily="34" charset="-122"/>
+                <a:cs typeface="Arial" pitchFamily="34" charset="-120"/>
+              </a:rPr>
+              <a:t>Annual hours = 900 engagements × baseline h × adoption × time saved</a:t>
+            </a:r>
+            <a:endParaRPr lang="en-US" sz="1200" dirty="0" spc="0"/>
+          </a:p>
+        </p:txBody>
+      </p:sp>
+      <p:sp>
+        <p:nvSpPr>
+          <p:cNvPr id="14" name="reason-heading"/>
+          <p:cNvSpPr txBox="1"/>
+          <p:nvPr/>
+        </p:nvSpPr>
+        <p:spPr>
+          <a:xfrm>
+            <a:off x="234950" y="3784600"/>
+            <a:ext cx="4318000" cy="241300"/>
+          </a:xfrm>
+          <a:prstGeom prst="rect">
+            <a:avLst/>
+          </a:prstGeom>
+          <a:noFill/>
+          <a:ln/>
+        </p:spPr>
+        <p:txBody>
+          <a:bodyPr wrap="square" lIns="12700" tIns="12700" rIns="12700" bIns="12700" rtlCol="0" anchor="t">
+            <a:noAutofit/>
+          </a:bodyPr>
+          <a:lstStyle/>
+          <a:p>
+            <a:pPr algn="l" indent="0" marL="0">
+              <a:lnSpc>
+                <a:spcPct val="100000"/>
+              </a:lnSpc>
+              <a:buNone/>
+              <a:defRPr spc="0"/>
+            </a:pPr>
+            <a:r>
+              <a:rPr lang="en-US" sz="1350" b="1" dirty="0" spc="0">
                 <a:solidFill>
                   <a:srgbClr val="000000"/>
                 </a:solidFill>
@@ -4438,20 +4293,20 @@
               </a:rPr>
               <a:t>WHY RESEARCH WINS FIRST</a:t>
             </a:r>
-            <a:endParaRPr lang="en-US" sz="1400" dirty="0" spc="0"/>
+            <a:endParaRPr lang="en-US" sz="1350" dirty="0" spc="0"/>
           </a:p>
         </p:txBody>
       </p:sp>
       <p:sp>
         <p:nvSpPr>
-          <p:cNvPr id="16" name="chart-unit"/>
+          <p:cNvPr id="15" name="reason-file"/>
           <p:cNvSpPr txBox="1"/>
           <p:nvPr/>
         </p:nvSpPr>
         <p:spPr>
           <a:xfrm>
-            <a:off x="203200" y="1847850"/>
-            <a:ext cx="3937000" cy="228600"/>
+            <a:off x="901700" y="4108450"/>
+            <a:ext cx="3429000" cy="254000"/>
           </a:xfrm>
           <a:prstGeom prst="rect">
             <a:avLst/>
@@ -4481,7 +4336,7 @@
                 <a:ea typeface="Arial" pitchFamily="34" charset="-122"/>
                 <a:cs typeface="Arial" pitchFamily="34" charset="-120"/>
               </a:rPr>
-              <a:t>Illustrative hours</a:t>
+              <a:t>Frequent, comparable tasks</a:t>
             </a:r>
             <a:endParaRPr lang="en-US" sz="1200" dirty="0" spc="0"/>
           </a:p>
@@ -4489,125 +4344,14 @@
       </p:sp>
       <p:sp>
         <p:nvSpPr>
-          <p:cNvPr id="17" name="capacity-formula"/>
+          <p:cNvPr id="16" name="reason-corpus"/>
           <p:cNvSpPr txBox="1"/>
           <p:nvPr/>
         </p:nvSpPr>
         <p:spPr>
           <a:xfrm>
-            <a:off x="203200" y="4895850"/>
-            <a:ext cx="3943350" cy="501650"/>
-          </a:xfrm>
-          <a:prstGeom prst="rect">
-            <a:avLst/>
-          </a:prstGeom>
-          <a:noFill/>
-          <a:ln/>
-        </p:spPr>
-        <p:txBody>
-          <a:bodyPr wrap="square" lIns="12700" tIns="12700" rIns="12700" bIns="12700" rtlCol="0" anchor="t">
-            <a:noAutofit/>
-          </a:bodyPr>
-          <a:lstStyle/>
-          <a:p>
-            <a:pPr algn="l" indent="0" marL="0">
-              <a:lnSpc>
-                <a:spcPct val="120000"/>
-              </a:lnSpc>
-              <a:buNone/>
-              <a:defRPr spc="0"/>
-            </a:pPr>
-            <a:r>
-              <a:rPr lang="en-US" sz="1400" dirty="0" spc="0">
-                <a:solidFill>
-                  <a:srgbClr val="000000"/>
-                </a:solidFill>
-                <a:latin typeface="Arial" pitchFamily="34" charset="0"/>
-                <a:ea typeface="Arial" pitchFamily="34" charset="-122"/>
-                <a:cs typeface="Arial" pitchFamily="34" charset="-120"/>
-              </a:rPr>
-              <a:t>Annual hours = 900 engagements ×</a:t>
-            </a:r>
-            <a:endParaRPr lang="en-US" sz="1400" dirty="0" spc="0"/>
-          </a:p>
-          <a:p>
-            <a:pPr algn="l" indent="0" marL="0">
-              <a:lnSpc>
-                <a:spcPct val="120000"/>
-              </a:lnSpc>
-              <a:buNone/>
-              <a:defRPr spc="0"/>
-            </a:pPr>
-            <a:r>
-              <a:rPr lang="en-US" sz="1400" dirty="0" spc="0">
-                <a:solidFill>
-                  <a:srgbClr val="000000"/>
-                </a:solidFill>
-                <a:latin typeface="Arial" pitchFamily="34" charset="0"/>
-                <a:ea typeface="Arial" pitchFamily="34" charset="-122"/>
-                <a:cs typeface="Arial" pitchFamily="34" charset="-120"/>
-              </a:rPr>
-              <a:t>baseline h × adoption × time saved</a:t>
-            </a:r>
-            <a:endParaRPr lang="en-US" sz="1400" dirty="0" spc="0"/>
-          </a:p>
-        </p:txBody>
-      </p:sp>
-      <p:sp>
-        <p:nvSpPr>
-          <p:cNvPr id="18" name="reason-number-01"/>
-          <p:cNvSpPr txBox="1"/>
-          <p:nvPr/>
-        </p:nvSpPr>
-        <p:spPr>
-          <a:xfrm>
-            <a:off x="8769350" y="2038350"/>
-            <a:ext cx="457200" cy="419100"/>
-          </a:xfrm>
-          <a:prstGeom prst="rect">
-            <a:avLst/>
-          </a:prstGeom>
-          <a:noFill/>
-          <a:ln/>
-        </p:spPr>
-        <p:txBody>
-          <a:bodyPr wrap="square" lIns="0" tIns="0" rIns="0" bIns="0" rtlCol="0" anchor="t">
-            <a:noAutofit/>
-          </a:bodyPr>
-          <a:lstStyle/>
-          <a:p>
-            <a:pPr algn="l" indent="0" marL="0">
-              <a:lnSpc>
-                <a:spcPct val="100000"/>
-              </a:lnSpc>
-              <a:buNone/>
-              <a:defRPr spc="0"/>
-            </a:pPr>
-            <a:r>
-              <a:rPr lang="en-US" sz="2400" b="1" dirty="0" spc="0">
-                <a:solidFill>
-                  <a:srgbClr val="000000"/>
-                </a:solidFill>
-                <a:latin typeface="Arial" pitchFamily="34" charset="0"/>
-                <a:ea typeface="Arial" pitchFamily="34" charset="-122"/>
-                <a:cs typeface="Arial" pitchFamily="34" charset="-120"/>
-              </a:rPr>
-              <a:t>01</a:t>
-            </a:r>
-            <a:endParaRPr lang="en-US" sz="2400" dirty="0" spc="0"/>
-          </a:p>
-        </p:txBody>
-      </p:sp>
-      <p:sp>
-        <p:nvSpPr>
-          <p:cNvPr id="19" name="reason-title-01"/>
-          <p:cNvSpPr txBox="1"/>
-          <p:nvPr/>
-        </p:nvSpPr>
-        <p:spPr>
-          <a:xfrm>
-            <a:off x="9340850" y="1993900"/>
-            <a:ext cx="2717800" cy="279400"/>
+            <a:off x="901700" y="4552950"/>
+            <a:ext cx="3429000" cy="254000"/>
           </a:xfrm>
           <a:prstGeom prst="rect">
             <a:avLst/>
@@ -4629,7 +4373,7 @@
               <a:defRPr spc="0"/>
             </a:pPr>
             <a:r>
-              <a:rPr lang="en-US" sz="1400" b="1" dirty="0" spc="0">
+              <a:rPr lang="en-US" sz="1200" dirty="0" spc="0">
                 <a:solidFill>
                   <a:srgbClr val="000000"/>
                 </a:solidFill>
@@ -4637,133 +4381,22 @@
                 <a:ea typeface="Arial" pitchFamily="34" charset="-122"/>
                 <a:cs typeface="Arial" pitchFamily="34" charset="-120"/>
               </a:rPr>
-              <a:t>Frequent, comparable tasks</a:t>
+              <a:t>A bounded source corpus</a:t>
             </a:r>
-            <a:endParaRPr lang="en-US" sz="1400" dirty="0" spc="0"/>
+            <a:endParaRPr lang="en-US" sz="1200" dirty="0" spc="0"/>
           </a:p>
         </p:txBody>
       </p:sp>
       <p:sp>
         <p:nvSpPr>
-          <p:cNvPr id="20" name="reason-detail-01"/>
+          <p:cNvPr id="17" name="reason-reviewer"/>
           <p:cNvSpPr txBox="1"/>
           <p:nvPr/>
         </p:nvSpPr>
         <p:spPr>
           <a:xfrm>
-            <a:off x="9340850" y="2216150"/>
-            <a:ext cx="2724150" cy="552450"/>
-          </a:xfrm>
-          <a:prstGeom prst="rect">
-            <a:avLst/>
-          </a:prstGeom>
-          <a:noFill/>
-          <a:ln/>
-        </p:spPr>
-        <p:txBody>
-          <a:bodyPr wrap="square" lIns="12700" tIns="12700" rIns="12700" bIns="12700" rtlCol="0" anchor="t">
-            <a:noAutofit/>
-          </a:bodyPr>
-          <a:lstStyle/>
-          <a:p>
-            <a:pPr algn="l" indent="0" marL="0">
-              <a:lnSpc>
-                <a:spcPct val="120000"/>
-              </a:lnSpc>
-              <a:buNone/>
-              <a:defRPr spc="0"/>
-            </a:pPr>
-            <a:r>
-              <a:rPr lang="en-US" sz="1400" dirty="0" spc="0">
-                <a:solidFill>
-                  <a:srgbClr val="000000"/>
-                </a:solidFill>
-                <a:latin typeface="Arial" pitchFamily="34" charset="0"/>
-                <a:ea typeface="Arial" pitchFamily="34" charset="-122"/>
-                <a:cs typeface="Arial" pitchFamily="34" charset="-120"/>
-              </a:rPr>
-              <a:t>Many engagements use the</a:t>
-            </a:r>
-            <a:endParaRPr lang="en-US" sz="1400" dirty="0" spc="0"/>
-          </a:p>
-          <a:p>
-            <a:pPr algn="l" indent="0" marL="0">
-              <a:lnSpc>
-                <a:spcPct val="120000"/>
-              </a:lnSpc>
-              <a:buNone/>
-              <a:defRPr spc="0"/>
-            </a:pPr>
-            <a:r>
-              <a:rPr lang="en-US" sz="1400" dirty="0" spc="0">
-                <a:solidFill>
-                  <a:srgbClr val="000000"/>
-                </a:solidFill>
-                <a:latin typeface="Arial" pitchFamily="34" charset="0"/>
-                <a:ea typeface="Arial" pitchFamily="34" charset="-122"/>
-                <a:cs typeface="Arial" pitchFamily="34" charset="-120"/>
-              </a:rPr>
-              <a:t>same research task.</a:t>
-            </a:r>
-            <a:endParaRPr lang="en-US" sz="1400" dirty="0" spc="0"/>
-          </a:p>
-        </p:txBody>
-      </p:sp>
-      <p:sp>
-        <p:nvSpPr>
-          <p:cNvPr id="21" name="reason-number-02"/>
-          <p:cNvSpPr txBox="1"/>
-          <p:nvPr/>
-        </p:nvSpPr>
-        <p:spPr>
-          <a:xfrm>
-            <a:off x="8769350" y="2933700"/>
-            <a:ext cx="457200" cy="419100"/>
-          </a:xfrm>
-          <a:prstGeom prst="rect">
-            <a:avLst/>
-          </a:prstGeom>
-          <a:noFill/>
-          <a:ln/>
-        </p:spPr>
-        <p:txBody>
-          <a:bodyPr wrap="square" lIns="0" tIns="0" rIns="0" bIns="0" rtlCol="0" anchor="t">
-            <a:noAutofit/>
-          </a:bodyPr>
-          <a:lstStyle/>
-          <a:p>
-            <a:pPr algn="l" indent="0" marL="0">
-              <a:lnSpc>
-                <a:spcPct val="100000"/>
-              </a:lnSpc>
-              <a:buNone/>
-              <a:defRPr spc="0"/>
-            </a:pPr>
-            <a:r>
-              <a:rPr lang="en-US" sz="2400" b="1" dirty="0" spc="0">
-                <a:solidFill>
-                  <a:srgbClr val="000000"/>
-                </a:solidFill>
-                <a:latin typeface="Arial" pitchFamily="34" charset="0"/>
-                <a:ea typeface="Arial" pitchFamily="34" charset="-122"/>
-                <a:cs typeface="Arial" pitchFamily="34" charset="-120"/>
-              </a:rPr>
-              <a:t>02</a:t>
-            </a:r>
-            <a:endParaRPr lang="en-US" sz="2400" dirty="0" spc="0"/>
-          </a:p>
-        </p:txBody>
-      </p:sp>
-      <p:sp>
-        <p:nvSpPr>
-          <p:cNvPr id="22" name="reason-title-02"/>
-          <p:cNvSpPr txBox="1"/>
-          <p:nvPr/>
-        </p:nvSpPr>
-        <p:spPr>
-          <a:xfrm>
-            <a:off x="9340850" y="2946400"/>
-            <a:ext cx="2717800" cy="279400"/>
+            <a:off x="901700" y="4997450"/>
+            <a:ext cx="3429000" cy="254000"/>
           </a:xfrm>
           <a:prstGeom prst="rect">
             <a:avLst/>
@@ -4785,7 +4418,7 @@
               <a:defRPr spc="0"/>
             </a:pPr>
             <a:r>
-              <a:rPr lang="en-US" sz="1400" b="1" dirty="0" spc="0">
+              <a:rPr lang="en-US" sz="1200" dirty="0" spc="0">
                 <a:solidFill>
                   <a:srgbClr val="000000"/>
                 </a:solidFill>
@@ -4793,133 +4426,22 @@
                 <a:ea typeface="Arial" pitchFamily="34" charset="-122"/>
                 <a:cs typeface="Arial" pitchFamily="34" charset="-120"/>
               </a:rPr>
-              <a:t>A bounded source corpus</a:t>
+              <a:t>A named expert reviewer</a:t>
             </a:r>
-            <a:endParaRPr lang="en-US" sz="1400" dirty="0" spc="0"/>
+            <a:endParaRPr lang="en-US" sz="1200" dirty="0" spc="0"/>
           </a:p>
         </p:txBody>
       </p:sp>
       <p:sp>
         <p:nvSpPr>
-          <p:cNvPr id="23" name="reason-detail-02"/>
+          <p:cNvPr id="18" name="sequencing-heading"/>
           <p:cNvSpPr txBox="1"/>
           <p:nvPr/>
         </p:nvSpPr>
         <p:spPr>
           <a:xfrm>
-            <a:off x="9340850" y="3168650"/>
-            <a:ext cx="2724150" cy="552450"/>
-          </a:xfrm>
-          <a:prstGeom prst="rect">
-            <a:avLst/>
-          </a:prstGeom>
-          <a:noFill/>
-          <a:ln/>
-        </p:spPr>
-        <p:txBody>
-          <a:bodyPr wrap="square" lIns="12700" tIns="12700" rIns="12700" bIns="12700" rtlCol="0" anchor="t">
-            <a:noAutofit/>
-          </a:bodyPr>
-          <a:lstStyle/>
-          <a:p>
-            <a:pPr algn="l" indent="0" marL="0">
-              <a:lnSpc>
-                <a:spcPct val="120000"/>
-              </a:lnSpc>
-              <a:buNone/>
-              <a:defRPr spc="0"/>
-            </a:pPr>
-            <a:r>
-              <a:rPr lang="en-US" sz="1400" dirty="0" spc="0">
-                <a:solidFill>
-                  <a:srgbClr val="000000"/>
-                </a:solidFill>
-                <a:latin typeface="Arial" pitchFamily="34" charset="0"/>
-                <a:ea typeface="Arial" pitchFamily="34" charset="-122"/>
-                <a:cs typeface="Arial" pitchFamily="34" charset="-120"/>
-              </a:rPr>
-              <a:t>Approved sources limit scope</a:t>
-            </a:r>
-            <a:endParaRPr lang="en-US" sz="1400" dirty="0" spc="0"/>
-          </a:p>
-          <a:p>
-            <a:pPr algn="l" indent="0" marL="0">
-              <a:lnSpc>
-                <a:spcPct val="120000"/>
-              </a:lnSpc>
-              <a:buNone/>
-              <a:defRPr spc="0"/>
-            </a:pPr>
-            <a:r>
-              <a:rPr lang="en-US" sz="1400" dirty="0" spc="0">
-                <a:solidFill>
-                  <a:srgbClr val="000000"/>
-                </a:solidFill>
-                <a:latin typeface="Arial" pitchFamily="34" charset="0"/>
-                <a:ea typeface="Arial" pitchFamily="34" charset="-122"/>
-                <a:cs typeface="Arial" pitchFamily="34" charset="-120"/>
-              </a:rPr>
-              <a:t>and simplify review.</a:t>
-            </a:r>
-            <a:endParaRPr lang="en-US" sz="1400" dirty="0" spc="0"/>
-          </a:p>
-        </p:txBody>
-      </p:sp>
-      <p:sp>
-        <p:nvSpPr>
-          <p:cNvPr id="24" name="reason-number-03"/>
-          <p:cNvSpPr txBox="1"/>
-          <p:nvPr/>
-        </p:nvSpPr>
-        <p:spPr>
-          <a:xfrm>
-            <a:off x="8769350" y="3892550"/>
-            <a:ext cx="457200" cy="419100"/>
-          </a:xfrm>
-          <a:prstGeom prst="rect">
-            <a:avLst/>
-          </a:prstGeom>
-          <a:noFill/>
-          <a:ln/>
-        </p:spPr>
-        <p:txBody>
-          <a:bodyPr wrap="square" lIns="0" tIns="0" rIns="0" bIns="0" rtlCol="0" anchor="t">
-            <a:noAutofit/>
-          </a:bodyPr>
-          <a:lstStyle/>
-          <a:p>
-            <a:pPr algn="l" indent="0" marL="0">
-              <a:lnSpc>
-                <a:spcPct val="100000"/>
-              </a:lnSpc>
-              <a:buNone/>
-              <a:defRPr spc="0"/>
-            </a:pPr>
-            <a:r>
-              <a:rPr lang="en-US" sz="2400" b="1" dirty="0" spc="0">
-                <a:solidFill>
-                  <a:srgbClr val="000000"/>
-                </a:solidFill>
-                <a:latin typeface="Arial" pitchFamily="34" charset="0"/>
-                <a:ea typeface="Arial" pitchFamily="34" charset="-122"/>
-                <a:cs typeface="Arial" pitchFamily="34" charset="-120"/>
-              </a:rPr>
-              <a:t>03</a:t>
-            </a:r>
-            <a:endParaRPr lang="en-US" sz="2400" dirty="0" spc="0"/>
-          </a:p>
-        </p:txBody>
-      </p:sp>
-      <p:sp>
-        <p:nvSpPr>
-          <p:cNvPr id="25" name="reason-title-03"/>
-          <p:cNvSpPr txBox="1"/>
-          <p:nvPr/>
-        </p:nvSpPr>
-        <p:spPr>
-          <a:xfrm>
-            <a:off x="9340850" y="3905250"/>
-            <a:ext cx="2717800" cy="279400"/>
+            <a:off x="4826000" y="3708400"/>
+            <a:ext cx="7048500" cy="241300"/>
           </a:xfrm>
           <a:prstGeom prst="rect">
             <a:avLst/>
@@ -4941,7 +4463,7 @@
               <a:defRPr spc="0"/>
             </a:pPr>
             <a:r>
-              <a:rPr lang="en-US" sz="1400" b="1" dirty="0" spc="0">
+              <a:rPr lang="en-US" sz="1350" b="1" dirty="0" spc="0">
                 <a:solidFill>
                   <a:srgbClr val="000000"/>
                 </a:solidFill>
@@ -4949,88 +4471,22 @@
                 <a:ea typeface="Arial" pitchFamily="34" charset="-122"/>
                 <a:cs typeface="Arial" pitchFamily="34" charset="-120"/>
               </a:rPr>
-              <a:t>A named expert reviewer</a:t>
+              <a:t>PILOT SEQUENCING TEST</a:t>
             </a:r>
-            <a:endParaRPr lang="en-US" sz="1400" dirty="0" spc="0"/>
+            <a:endParaRPr lang="en-US" sz="1350" dirty="0" spc="0"/>
           </a:p>
         </p:txBody>
       </p:sp>
       <p:sp>
         <p:nvSpPr>
-          <p:cNvPr id="26" name="reason-detail-03"/>
+          <p:cNvPr id="19" name="overlap-note"/>
           <p:cNvSpPr txBox="1"/>
           <p:nvPr/>
         </p:nvSpPr>
         <p:spPr>
           <a:xfrm>
-            <a:off x="9340850" y="4127500"/>
-            <a:ext cx="2724150" cy="552450"/>
-          </a:xfrm>
-          <a:prstGeom prst="rect">
-            <a:avLst/>
-          </a:prstGeom>
-          <a:noFill/>
-          <a:ln/>
-        </p:spPr>
-        <p:txBody>
-          <a:bodyPr wrap="square" lIns="12700" tIns="12700" rIns="12700" bIns="12700" rtlCol="0" anchor="t">
-            <a:noAutofit/>
-          </a:bodyPr>
-          <a:lstStyle/>
-          <a:p>
-            <a:pPr algn="l" indent="0" marL="0">
-              <a:lnSpc>
-                <a:spcPct val="120000"/>
-              </a:lnSpc>
-              <a:buNone/>
-              <a:defRPr spc="0"/>
-            </a:pPr>
-            <a:r>
-              <a:rPr lang="en-US" sz="1400" dirty="0" spc="0">
-                <a:solidFill>
-                  <a:srgbClr val="000000"/>
-                </a:solidFill>
-                <a:latin typeface="Arial" pitchFamily="34" charset="0"/>
-                <a:ea typeface="Arial" pitchFamily="34" charset="-122"/>
-                <a:cs typeface="Arial" pitchFamily="34" charset="-120"/>
-              </a:rPr>
-              <a:t>An accountable reviewer verifies</a:t>
-            </a:r>
-            <a:endParaRPr lang="en-US" sz="1400" dirty="0" spc="0"/>
-          </a:p>
-          <a:p>
-            <a:pPr algn="l" indent="0" marL="0">
-              <a:lnSpc>
-                <a:spcPct val="120000"/>
-              </a:lnSpc>
-              <a:buNone/>
-              <a:defRPr spc="0"/>
-            </a:pPr>
-            <a:r>
-              <a:rPr lang="en-US" sz="1400" dirty="0" spc="0">
-                <a:solidFill>
-                  <a:srgbClr val="000000"/>
-                </a:solidFill>
-                <a:latin typeface="Arial" pitchFamily="34" charset="0"/>
-                <a:ea typeface="Arial" pitchFamily="34" charset="-122"/>
-                <a:cs typeface="Arial" pitchFamily="34" charset="-120"/>
-              </a:rPr>
-              <a:t>outputs before client release.</a:t>
-            </a:r>
-            <a:endParaRPr lang="en-US" sz="1400" dirty="0" spc="0"/>
-          </a:p>
-        </p:txBody>
-      </p:sp>
-      <p:sp>
-        <p:nvSpPr>
-          <p:cNvPr id="27" name="overlap-qualification"/>
-          <p:cNvSpPr txBox="1"/>
-          <p:nvPr/>
-        </p:nvSpPr>
-        <p:spPr>
-          <a:xfrm>
-            <a:off x="8890000" y="4781550"/>
-            <a:ext cx="2959100" cy="520700"/>
+            <a:off x="4826000" y="5530850"/>
+            <a:ext cx="5397500" cy="190500"/>
           </a:xfrm>
           <a:prstGeom prst="rect">
             <a:avLst/>
@@ -5052,7 +4508,7 @@
               <a:defRPr spc="0"/>
             </a:pPr>
             <a:r>
-              <a:rPr lang="en-US" sz="1400" dirty="0" spc="0">
+              <a:rPr lang="en-US" sz="1000" dirty="0" spc="0">
                 <a:solidFill>
                   <a:srgbClr val="000000"/>
                 </a:solidFill>
@@ -5060,43 +4516,22 @@
                 <a:ea typeface="Arial" pitchFamily="34" charset="-122"/>
                 <a:cs typeface="Arial" pitchFamily="34" charset="-120"/>
               </a:rPr>
-              <a:t>Check task overlap before adding</a:t>
+              <a:t>Check task overlap before adding workflow benefits.</a:t>
             </a:r>
-            <a:endParaRPr lang="en-US" sz="1400" dirty="0" spc="0"/>
-          </a:p>
-          <a:p>
-            <a:pPr algn="l" indent="0" marL="0">
-              <a:lnSpc>
-                <a:spcPct val="100000"/>
-              </a:lnSpc>
-              <a:buNone/>
-              <a:defRPr spc="0"/>
-            </a:pPr>
-            <a:r>
-              <a:rPr lang="en-US" sz="1400" dirty="0" spc="0">
-                <a:solidFill>
-                  <a:srgbClr val="000000"/>
-                </a:solidFill>
-                <a:latin typeface="Arial" pitchFamily="34" charset="0"/>
-                <a:ea typeface="Arial" pitchFamily="34" charset="-122"/>
-                <a:cs typeface="Arial" pitchFamily="34" charset="-120"/>
-              </a:rPr>
-              <a:t>workflow benefits.</a:t>
-            </a:r>
-            <a:endParaRPr lang="en-US" sz="1400" dirty="0" spc="0"/>
+            <a:endParaRPr lang="en-US" sz="1000" dirty="0" spc="0"/>
           </a:p>
         </p:txBody>
       </p:sp>
       <p:sp>
         <p:nvSpPr>
-          <p:cNvPr id="28" name="decision-label"/>
+          <p:cNvPr id="20" name="decision-label"/>
           <p:cNvSpPr txBox="1"/>
           <p:nvPr/>
         </p:nvSpPr>
         <p:spPr>
           <a:xfrm>
-            <a:off x="635000" y="5689600"/>
-            <a:ext cx="2667000" cy="330200"/>
+            <a:off x="508000" y="5822950"/>
+            <a:ext cx="2730500" cy="317500"/>
           </a:xfrm>
           <a:prstGeom prst="rect">
             <a:avLst/>
@@ -5134,14 +4569,14 @@
       </p:sp>
       <p:sp>
         <p:nvSpPr>
-          <p:cNvPr id="29" name="decision-message"/>
+          <p:cNvPr id="21" name="decision-message"/>
           <p:cNvSpPr txBox="1"/>
           <p:nvPr/>
         </p:nvSpPr>
         <p:spPr>
           <a:xfrm>
-            <a:off x="3556000" y="5689600"/>
-            <a:ext cx="8032750" cy="330200"/>
+            <a:off x="3302000" y="5822950"/>
+            <a:ext cx="8369300" cy="317500"/>
           </a:xfrm>
           <a:prstGeom prst="rect">
             <a:avLst/>
@@ -5177,9 +4612,99 @@
           </a:p>
         </p:txBody>
       </p:sp>
+      <p:pic>
+        <p:nvPicPr>
+          <p:cNvPr id="22" name="reason-icon-file" descr="remix-file-search-line">    </p:cNvPr>
+          <p:cNvPicPr>
+            <a:picLocks noChangeAspect="1"/>
+          </p:cNvPicPr>
+          <p:nvPr/>
+        </p:nvPicPr>
+        <p:blipFill>
+          <a:blip r:embed="rId2">
+            <a:extLst>
+              <a:ext uri="{96DAC541-7B7A-43D3-8B79-37D633B846F1}">
+                <asvg:svgBlip xmlns:asvg="http://schemas.microsoft.com/office/drawing/2016/SVG/main" r:embed="rId3"/>
+              </a:ext>
+            </a:extLst>
+          </a:blip>
+          <a:stretch>
+            <a:fillRect/>
+          </a:stretch>
+        </p:blipFill>
+        <p:spPr>
+          <a:xfrm>
+            <a:off x="381000" y="4108450"/>
+            <a:ext cx="260350" cy="260350"/>
+          </a:xfrm>
+          <a:prstGeom prst="rect">
+            <a:avLst/>
+          </a:prstGeom>
+        </p:spPr>
+      </p:pic>
+      <p:pic>
+        <p:nvPicPr>
+          <p:cNvPr id="23" name="reason-icon-corpus" descr="remix-database-2-line">    </p:cNvPr>
+          <p:cNvPicPr>
+            <a:picLocks noChangeAspect="1"/>
+          </p:cNvPicPr>
+          <p:nvPr/>
+        </p:nvPicPr>
+        <p:blipFill>
+          <a:blip r:embed="rId4">
+            <a:extLst>
+              <a:ext uri="{96DAC541-7B7A-43D3-8B79-37D633B846F1}">
+                <asvg:svgBlip xmlns:asvg="http://schemas.microsoft.com/office/drawing/2016/SVG/main" r:embed="rId5"/>
+              </a:ext>
+            </a:extLst>
+          </a:blip>
+          <a:stretch>
+            <a:fillRect/>
+          </a:stretch>
+        </p:blipFill>
+        <p:spPr>
+          <a:xfrm>
+            <a:off x="381000" y="4552950"/>
+            <a:ext cx="260350" cy="260350"/>
+          </a:xfrm>
+          <a:prstGeom prst="rect">
+            <a:avLst/>
+          </a:prstGeom>
+        </p:spPr>
+      </p:pic>
+      <p:pic>
+        <p:nvPicPr>
+          <p:cNvPr id="24" name="reason-icon-reviewer" descr="remix-user-star-line">    </p:cNvPr>
+          <p:cNvPicPr>
+            <a:picLocks noChangeAspect="1"/>
+          </p:cNvPicPr>
+          <p:nvPr/>
+        </p:nvPicPr>
+        <p:blipFill>
+          <a:blip r:embed="rId6">
+            <a:extLst>
+              <a:ext uri="{96DAC541-7B7A-43D3-8B79-37D633B846F1}">
+                <asvg:svgBlip xmlns:asvg="http://schemas.microsoft.com/office/drawing/2016/SVG/main" r:embed="rId7"/>
+              </a:ext>
+            </a:extLst>
+          </a:blip>
+          <a:stretch>
+            <a:fillRect/>
+          </a:stretch>
+        </p:blipFill>
+        <p:spPr>
+          <a:xfrm>
+            <a:off x="381000" y="4997450"/>
+            <a:ext cx="260350" cy="260350"/>
+          </a:xfrm>
+          <a:prstGeom prst="rect">
+            <a:avLst/>
+          </a:prstGeom>
+        </p:spPr>
+      </p:pic>
       <p:sp>
         <p:nvSpPr>
-          <p:cNvPr id="30" name="Slide Number Placeholder 0"/>
+          <p:cNvPr id="25" name="Slide Number Placeholder 0"/>
           <p:cNvSpPr>
             <a:spLocks noGrp="1"/>
           </p:cNvSpPr>

--- a/examples/consulting-ai-transformation/run/slides/s02-opportunities/deliverables/slide.pptx
+++ b/examples/consulting-ai-transformation/run/slides/s02-opportunities/deliverables/slide.pptx
@@ -141,13 +141,88 @@
           </c:spPr>
           <c:invertIfNegative val="0"/>
           <c:dLbls>
+            <c:dLbl>
+              <c:idx val="0"/>
+              <c:numFmt formatCode="#,##0" sourceLinked="0"/>
+              <c:txPr>
+                <a:bodyPr wrap="none"/>
+                <a:lstStyle/>
+                <a:p>
+                  <a:pPr>
+                    <a:defRPr b="1" i="0" strike="noStrike" sz="1400" u="none">
+                      <a:solidFill>
+                        <a:srgbClr val="FD5108"/>
+                      </a:solidFill>
+                      <a:latin typeface="Arial"/>
+                    </a:defRPr>
+                  </a:pPr>
+                </a:p>
+              </c:txPr>
+              <c:dLblPos val="outEnd"/>
+              <c:showLegendKey val="0"/>
+              <c:showVal val="1"/>
+              <c:showCatName val="0"/>
+              <c:showSerName val="0"/>
+              <c:showPercent val="0"/>
+              <c:showBubbleSize val="0"/>
+            </c:dLbl>
+            <c:dLbl>
+              <c:idx val="1"/>
+              <c:numFmt formatCode="#,##0" sourceLinked="0"/>
+              <c:txPr>
+                <a:bodyPr wrap="none"/>
+                <a:lstStyle/>
+                <a:p>
+                  <a:pPr>
+                    <a:defRPr b="1" i="0" strike="noStrike" sz="1400" u="none">
+                      <a:solidFill>
+                        <a:srgbClr val="000000"/>
+                      </a:solidFill>
+                      <a:latin typeface="Arial"/>
+                    </a:defRPr>
+                  </a:pPr>
+                </a:p>
+              </c:txPr>
+              <c:dLblPos val="outEnd"/>
+              <c:showLegendKey val="0"/>
+              <c:showVal val="1"/>
+              <c:showCatName val="0"/>
+              <c:showSerName val="0"/>
+              <c:showPercent val="0"/>
+              <c:showBubbleSize val="0"/>
+            </c:dLbl>
+            <c:dLbl>
+              <c:idx val="2"/>
+              <c:numFmt formatCode="#,##0" sourceLinked="0"/>
+              <c:txPr>
+                <a:bodyPr wrap="none"/>
+                <a:lstStyle/>
+                <a:p>
+                  <a:pPr>
+                    <a:defRPr b="1" i="0" strike="noStrike" sz="1400" u="none">
+                      <a:solidFill>
+                        <a:srgbClr val="000000"/>
+                      </a:solidFill>
+                      <a:latin typeface="Arial"/>
+                    </a:defRPr>
+                  </a:pPr>
+                </a:p>
+              </c:txPr>
+              <c:dLblPos val="outEnd"/>
+              <c:showLegendKey val="0"/>
+              <c:showVal val="1"/>
+              <c:showCatName val="0"/>
+              <c:showSerName val="0"/>
+              <c:showPercent val="0"/>
+              <c:showBubbleSize val="0"/>
+            </c:dLbl>
             <c:numFmt formatCode="#,##0" sourceLinked="0"/>
             <c:txPr>
               <a:bodyPr wrap="none"/>
               <a:lstStyle/>
               <a:p>
                 <a:pPr>
-                  <a:defRPr b="0" i="0" strike="noStrike" sz="1200" u="none">
+                  <a:defRPr b="1" i="0" strike="noStrike" sz="1400" u="none">
                     <a:solidFill>
                       <a:srgbClr val="000000"/>
                     </a:solidFill>
@@ -240,13 +315,88 @@
           </c:val>
         </c:ser>
         <c:dLbls>
+          <c:dLbl>
+            <c:idx val="0"/>
+            <c:numFmt formatCode="#,##0" sourceLinked="0"/>
+            <c:txPr>
+              <a:bodyPr wrap="none"/>
+              <a:lstStyle/>
+              <a:p>
+                <a:pPr>
+                  <a:defRPr b="1" i="0" strike="noStrike" sz="1400" u="none">
+                    <a:solidFill>
+                      <a:srgbClr val="FD5108"/>
+                    </a:solidFill>
+                    <a:latin typeface="Arial"/>
+                  </a:defRPr>
+                </a:pPr>
+              </a:p>
+            </c:txPr>
+            <c:dLblPos val="outEnd"/>
+            <c:showLegendKey val="0"/>
+            <c:showVal val="1"/>
+            <c:showCatName val="0"/>
+            <c:showSerName val="0"/>
+            <c:showPercent val="0"/>
+            <c:showBubbleSize val="0"/>
+          </c:dLbl>
+          <c:dLbl>
+            <c:idx val="1"/>
+            <c:numFmt formatCode="#,##0" sourceLinked="0"/>
+            <c:txPr>
+              <a:bodyPr wrap="none"/>
+              <a:lstStyle/>
+              <a:p>
+                <a:pPr>
+                  <a:defRPr b="1" i="0" strike="noStrike" sz="1400" u="none">
+                    <a:solidFill>
+                      <a:srgbClr val="000000"/>
+                    </a:solidFill>
+                    <a:latin typeface="Arial"/>
+                  </a:defRPr>
+                </a:pPr>
+              </a:p>
+            </c:txPr>
+            <c:dLblPos val="outEnd"/>
+            <c:showLegendKey val="0"/>
+            <c:showVal val="1"/>
+            <c:showCatName val="0"/>
+            <c:showSerName val="0"/>
+            <c:showPercent val="0"/>
+            <c:showBubbleSize val="0"/>
+          </c:dLbl>
+          <c:dLbl>
+            <c:idx val="2"/>
+            <c:numFmt formatCode="#,##0" sourceLinked="0"/>
+            <c:txPr>
+              <a:bodyPr wrap="none"/>
+              <a:lstStyle/>
+              <a:p>
+                <a:pPr>
+                  <a:defRPr b="1" i="0" strike="noStrike" sz="1400" u="none">
+                    <a:solidFill>
+                      <a:srgbClr val="000000"/>
+                    </a:solidFill>
+                    <a:latin typeface="Arial"/>
+                  </a:defRPr>
+                </a:pPr>
+              </a:p>
+            </c:txPr>
+            <c:dLblPos val="outEnd"/>
+            <c:showLegendKey val="0"/>
+            <c:showVal val="1"/>
+            <c:showCatName val="0"/>
+            <c:showSerName val="0"/>
+            <c:showPercent val="0"/>
+            <c:showBubbleSize val="0"/>
+          </c:dLbl>
           <c:numFmt formatCode="#,##0" sourceLinked="0"/>
           <c:txPr>
             <a:bodyPr wrap="none"/>
             <a:lstStyle/>
             <a:p>
               <a:pPr>
-                <a:defRPr b="0" i="0" strike="noStrike" sz="1200" u="none">
+                <a:defRPr b="1" i="0" strike="noStrike" sz="1400" u="none">
                   <a:solidFill>
                     <a:srgbClr val="000000"/>
                   </a:solidFill>
@@ -331,7 +481,7 @@
             </a:ln>
           </c:spPr>
         </c:majorGridlines>
-        <c:numFmt formatCode="General" sourceLinked="0"/>
+        <c:numFmt formatCode="#,##0" sourceLinked="0"/>
         <c:majorTickMark val="out"/>
         <c:minorTickMark val="none"/>
         <c:tickLblPos val="nextTo"/>
@@ -787,7 +937,7 @@
               <a:t>This is an illustrative planning model for fictional Northstar Advisory. Annual capacity assumes 900 engagements. Research uses 900 x 12 baseline hours x 60% adoption x 30% time saved = 1,944 hours. The same formula produces 1,440 proposal hours and 1,080 retrieval hours from the displayed assumptions.
 The three workflow estimates may overlap and cannot be added without checking task boundaries. Capacity released is not a cash saving. Control readiness determines the proposed sequence, and expert review remains required before any client release.
 [SlidePoise sources]
-Generated target visual: /private/tmp/.slidepoise-rebuild-h51errnw/slides/s02-opportunities/work/accepted-slide.png
+Generated target visual: /Users/henry/Codes/AI_slide_drafting/examples/consulting-ai-transformation/run/slides/s02-opportunities/work/accepted-slide.png
 Canonical asset remix-file-search-line: /Users/henry/Codes/AI_slide_drafting/examples/consulting-ai-transformation/run/work/icon-cache/file-search/remix-file-search-line.svg
 Canonical asset remix-database-2-line: /Users/henry/Codes/AI_slide_drafting/examples/consulting-ai-transformation/run/work/icon-cache/database-2/remix-database-2-line.svg
 Canonical asset remix-user-star-line: /Users/henry/Codes/AI_slide_drafting/examples/consulting-ai-transformation/run/work/icon-cache/user-star/remix-user-star-line.svg</a:t>
@@ -1590,8 +1740,8 @@
           <p:nvPr/>
         </p:nvGraphicFramePr>
         <p:xfrm>
-          <a:off x="254000" y="1835150"/>
-          <a:ext cx="4191000" cy="1841500"/>
+          <a:off x="234950" y="1860550"/>
+          <a:ext cx="4254500" cy="2044700"/>
         </p:xfrm>
         <a:graphic xmlns:a="http://schemas.openxmlformats.org/drawingml/2006/main">
           <a:graphicData uri="http://schemas.openxmlformats.org/drawingml/2006/chart">
@@ -1639,7 +1789,7 @@
                         <a:buNone/>
                       </a:pPr>
                       <a:r>
-                        <a:rPr lang="en-US" sz="1100" b="1" dirty="0">
+                        <a:rPr lang="en-US" sz="1200" b="1" dirty="0">
                           <a:solidFill>
                             <a:srgbClr val="FFFFFF"/>
                           </a:solidFill>
@@ -1649,14 +1799,14 @@
                         </a:rPr>
                         <a:t>Workflow</a:t>
                       </a:r>
-                      <a:endParaRPr lang="en-US" sz="1100" dirty="0">
+                      <a:endParaRPr lang="en-US" sz="1200" dirty="0">
                         <a:latin typeface="Arial" charset="0"/>
                         <a:ea typeface="Arial" charset="0"/>
                         <a:cs typeface="Arial" charset="0"/>
                       </a:endParaRPr>
                     </a:p>
                   </a:txBody>
-                  <a:tcPr marL="101600" marR="101600" marT="38100" marB="38100" anchor="ctr">
+                  <a:tcPr marL="76200" marR="76200" marT="31750" marB="31750" anchor="ctr">
                     <a:lnL w="6350" cap="flat" cmpd="sng" algn="ctr">
                       <a:solidFill>
                         <a:srgbClr val="C6C9CD"/>
@@ -1709,7 +1859,7 @@
                         <a:buNone/>
                       </a:pPr>
                       <a:r>
-                        <a:rPr lang="en-US" sz="1100" b="1" dirty="0">
+                        <a:rPr lang="en-US" sz="1200" b="1" dirty="0">
                           <a:solidFill>
                             <a:srgbClr val="FFFFFF"/>
                           </a:solidFill>
@@ -1719,14 +1869,14 @@
                         </a:rPr>
                         <a:t>Baseline h</a:t>
                       </a:r>
-                      <a:endParaRPr lang="en-US" sz="1100" dirty="0">
+                      <a:endParaRPr lang="en-US" sz="1200" dirty="0">
                         <a:latin typeface="Arial" charset="0"/>
                         <a:ea typeface="Arial" charset="0"/>
                         <a:cs typeface="Arial" charset="0"/>
                       </a:endParaRPr>
                     </a:p>
                   </a:txBody>
-                  <a:tcPr marL="101600" marR="101600" marT="38100" marB="38100" anchor="ctr">
+                  <a:tcPr marL="76200" marR="76200" marT="31750" marB="31750" anchor="ctr">
                     <a:lnL w="6350" cap="flat" cmpd="sng" algn="ctr">
                       <a:solidFill>
                         <a:srgbClr val="C6C9CD"/>
@@ -1779,7 +1929,7 @@
                         <a:buNone/>
                       </a:pPr>
                       <a:r>
-                        <a:rPr lang="en-US" sz="1100" b="1" dirty="0">
+                        <a:rPr lang="en-US" sz="1200" b="1" dirty="0">
                           <a:solidFill>
                             <a:srgbClr val="FFFFFF"/>
                           </a:solidFill>
@@ -1789,14 +1939,14 @@
                         </a:rPr>
                         <a:t>Adoption</a:t>
                       </a:r>
-                      <a:endParaRPr lang="en-US" sz="1100" dirty="0">
+                      <a:endParaRPr lang="en-US" sz="1200" dirty="0">
                         <a:latin typeface="Arial" charset="0"/>
                         <a:ea typeface="Arial" charset="0"/>
                         <a:cs typeface="Arial" charset="0"/>
                       </a:endParaRPr>
                     </a:p>
                   </a:txBody>
-                  <a:tcPr marL="101600" marR="101600" marT="38100" marB="38100" anchor="ctr">
+                  <a:tcPr marL="76200" marR="76200" marT="31750" marB="31750" anchor="ctr">
                     <a:lnL w="6350" cap="flat" cmpd="sng" algn="ctr">
                       <a:solidFill>
                         <a:srgbClr val="C6C9CD"/>
@@ -1849,7 +1999,7 @@
                         <a:buNone/>
                       </a:pPr>
                       <a:r>
-                        <a:rPr lang="en-US" sz="1100" b="1" dirty="0">
+                        <a:rPr lang="en-US" sz="1200" b="1" dirty="0">
                           <a:solidFill>
                             <a:srgbClr val="FFFFFF"/>
                           </a:solidFill>
@@ -1859,14 +2009,14 @@
                         </a:rPr>
                         <a:t>Time saved</a:t>
                       </a:r>
-                      <a:endParaRPr lang="en-US" sz="1100" dirty="0">
+                      <a:endParaRPr lang="en-US" sz="1200" dirty="0">
                         <a:latin typeface="Arial" charset="0"/>
                         <a:ea typeface="Arial" charset="0"/>
                         <a:cs typeface="Arial" charset="0"/>
                       </a:endParaRPr>
                     </a:p>
                   </a:txBody>
-                  <a:tcPr marL="101600" marR="101600" marT="38100" marB="38100" anchor="ctr">
+                  <a:tcPr marL="76200" marR="76200" marT="31750" marB="31750" anchor="ctr">
                     <a:lnL w="6350" cap="flat" cmpd="sng" algn="ctr">
                       <a:solidFill>
                         <a:srgbClr val="C6C9CD"/>
@@ -1921,7 +2071,7 @@
                         <a:buNone/>
                       </a:pPr>
                       <a:r>
-                        <a:rPr lang="en-US" sz="1100" b="1" dirty="0">
+                        <a:rPr lang="en-US" sz="1200" b="1" dirty="0">
                           <a:solidFill>
                             <a:srgbClr val="000000"/>
                           </a:solidFill>
@@ -1931,14 +2081,14 @@
                         </a:rPr>
                         <a:t>Research</a:t>
                       </a:r>
-                      <a:endParaRPr lang="en-US" sz="1100" dirty="0">
+                      <a:endParaRPr lang="en-US" sz="1200" dirty="0">
                         <a:latin typeface="Arial" charset="0"/>
                         <a:ea typeface="Arial" charset="0"/>
                         <a:cs typeface="Arial" charset="0"/>
                       </a:endParaRPr>
                     </a:p>
                   </a:txBody>
-                  <a:tcPr marL="101600" marR="101600" marT="38100" marB="38100" anchor="ctr">
+                  <a:tcPr marL="76200" marR="76200" marT="31750" marB="31750" anchor="ctr">
                     <a:lnL w="6350" cap="flat" cmpd="sng" algn="ctr">
                       <a:solidFill>
                         <a:srgbClr val="C6C9CD"/>
@@ -1991,7 +2141,7 @@
                         <a:buNone/>
                       </a:pPr>
                       <a:r>
-                        <a:rPr lang="en-US" sz="1100" dirty="0">
+                        <a:rPr lang="en-US" sz="1200" dirty="0">
                           <a:solidFill>
                             <a:srgbClr val="000000"/>
                           </a:solidFill>
@@ -2001,14 +2151,14 @@
                         </a:rPr>
                         <a:t>12</a:t>
                       </a:r>
-                      <a:endParaRPr lang="en-US" sz="1100" dirty="0">
+                      <a:endParaRPr lang="en-US" sz="1200" dirty="0">
                         <a:latin typeface="Arial" charset="0"/>
                         <a:ea typeface="Arial" charset="0"/>
                         <a:cs typeface="Arial" charset="0"/>
                       </a:endParaRPr>
                     </a:p>
                   </a:txBody>
-                  <a:tcPr marL="101600" marR="101600" marT="38100" marB="38100" anchor="ctr">
+                  <a:tcPr marL="76200" marR="76200" marT="31750" marB="31750" anchor="ctr">
                     <a:lnL w="6350" cap="flat" cmpd="sng" algn="ctr">
                       <a:solidFill>
                         <a:srgbClr val="C6C9CD"/>
@@ -2061,7 +2211,7 @@
                         <a:buNone/>
                       </a:pPr>
                       <a:r>
-                        <a:rPr lang="en-US" sz="1100" dirty="0">
+                        <a:rPr lang="en-US" sz="1200" dirty="0">
                           <a:solidFill>
                             <a:srgbClr val="000000"/>
                           </a:solidFill>
@@ -2071,14 +2221,14 @@
                         </a:rPr>
                         <a:t>60%</a:t>
                       </a:r>
-                      <a:endParaRPr lang="en-US" sz="1100" dirty="0">
+                      <a:endParaRPr lang="en-US" sz="1200" dirty="0">
                         <a:latin typeface="Arial" charset="0"/>
                         <a:ea typeface="Arial" charset="0"/>
                         <a:cs typeface="Arial" charset="0"/>
                       </a:endParaRPr>
                     </a:p>
                   </a:txBody>
-                  <a:tcPr marL="101600" marR="101600" marT="38100" marB="38100" anchor="ctr">
+                  <a:tcPr marL="76200" marR="76200" marT="31750" marB="31750" anchor="ctr">
                     <a:lnL w="6350" cap="flat" cmpd="sng" algn="ctr">
                       <a:solidFill>
                         <a:srgbClr val="C6C9CD"/>
@@ -2131,7 +2281,7 @@
                         <a:buNone/>
                       </a:pPr>
                       <a:r>
-                        <a:rPr lang="en-US" sz="1100" dirty="0">
+                        <a:rPr lang="en-US" sz="1200" dirty="0">
                           <a:solidFill>
                             <a:srgbClr val="000000"/>
                           </a:solidFill>
@@ -2141,14 +2291,14 @@
                         </a:rPr>
                         <a:t>30%</a:t>
                       </a:r>
-                      <a:endParaRPr lang="en-US" sz="1100" dirty="0">
+                      <a:endParaRPr lang="en-US" sz="1200" dirty="0">
                         <a:latin typeface="Arial" charset="0"/>
                         <a:ea typeface="Arial" charset="0"/>
                         <a:cs typeface="Arial" charset="0"/>
                       </a:endParaRPr>
                     </a:p>
                   </a:txBody>
-                  <a:tcPr marL="101600" marR="101600" marT="38100" marB="38100" anchor="ctr">
+                  <a:tcPr marL="76200" marR="76200" marT="31750" marB="31750" anchor="ctr">
                     <a:lnL w="6350" cap="flat" cmpd="sng" algn="ctr">
                       <a:solidFill>
                         <a:srgbClr val="C6C9CD"/>
@@ -2203,7 +2353,7 @@
                         <a:buNone/>
                       </a:pPr>
                       <a:r>
-                        <a:rPr lang="en-US" sz="1100" b="1" dirty="0">
+                        <a:rPr lang="en-US" sz="1200" b="1" dirty="0">
                           <a:solidFill>
                             <a:srgbClr val="000000"/>
                           </a:solidFill>
@@ -2213,14 +2363,14 @@
                         </a:rPr>
                         <a:t>Proposal</a:t>
                       </a:r>
-                      <a:endParaRPr lang="en-US" sz="1100" dirty="0">
+                      <a:endParaRPr lang="en-US" sz="1200" dirty="0">
                         <a:latin typeface="Arial" charset="0"/>
                         <a:ea typeface="Arial" charset="0"/>
                         <a:cs typeface="Arial" charset="0"/>
                       </a:endParaRPr>
                     </a:p>
                   </a:txBody>
-                  <a:tcPr marL="101600" marR="101600" marT="38100" marB="38100" anchor="ctr">
+                  <a:tcPr marL="76200" marR="76200" marT="31750" marB="31750" anchor="ctr">
                     <a:lnL w="6350" cap="flat" cmpd="sng" algn="ctr">
                       <a:solidFill>
                         <a:srgbClr val="C6C9CD"/>
@@ -2273,7 +2423,7 @@
                         <a:buNone/>
                       </a:pPr>
                       <a:r>
-                        <a:rPr lang="en-US" sz="1100" dirty="0">
+                        <a:rPr lang="en-US" sz="1200" dirty="0">
                           <a:solidFill>
                             <a:srgbClr val="000000"/>
                           </a:solidFill>
@@ -2283,14 +2433,14 @@
                         </a:rPr>
                         <a:t>8</a:t>
                       </a:r>
-                      <a:endParaRPr lang="en-US" sz="1100" dirty="0">
+                      <a:endParaRPr lang="en-US" sz="1200" dirty="0">
                         <a:latin typeface="Arial" charset="0"/>
                         <a:ea typeface="Arial" charset="0"/>
                         <a:cs typeface="Arial" charset="0"/>
                       </a:endParaRPr>
                     </a:p>
                   </a:txBody>
-                  <a:tcPr marL="101600" marR="101600" marT="38100" marB="38100" anchor="ctr">
+                  <a:tcPr marL="76200" marR="76200" marT="31750" marB="31750" anchor="ctr">
                     <a:lnL w="6350" cap="flat" cmpd="sng" algn="ctr">
                       <a:solidFill>
                         <a:srgbClr val="C6C9CD"/>
@@ -2343,7 +2493,7 @@
                         <a:buNone/>
                       </a:pPr>
                       <a:r>
-                        <a:rPr lang="en-US" sz="1100" dirty="0">
+                        <a:rPr lang="en-US" sz="1200" dirty="0">
                           <a:solidFill>
                             <a:srgbClr val="000000"/>
                           </a:solidFill>
@@ -2353,14 +2503,14 @@
                         </a:rPr>
                         <a:t>50%</a:t>
                       </a:r>
-                      <a:endParaRPr lang="en-US" sz="1100" dirty="0">
+                      <a:endParaRPr lang="en-US" sz="1200" dirty="0">
                         <a:latin typeface="Arial" charset="0"/>
                         <a:ea typeface="Arial" charset="0"/>
                         <a:cs typeface="Arial" charset="0"/>
                       </a:endParaRPr>
                     </a:p>
                   </a:txBody>
-                  <a:tcPr marL="101600" marR="101600" marT="38100" marB="38100" anchor="ctr">
+                  <a:tcPr marL="76200" marR="76200" marT="31750" marB="31750" anchor="ctr">
                     <a:lnL w="6350" cap="flat" cmpd="sng" algn="ctr">
                       <a:solidFill>
                         <a:srgbClr val="C6C9CD"/>
@@ -2413,7 +2563,7 @@
                         <a:buNone/>
                       </a:pPr>
                       <a:r>
-                        <a:rPr lang="en-US" sz="1100" dirty="0">
+                        <a:rPr lang="en-US" sz="1200" dirty="0">
                           <a:solidFill>
                             <a:srgbClr val="000000"/>
                           </a:solidFill>
@@ -2423,14 +2573,14 @@
                         </a:rPr>
                         <a:t>40%</a:t>
                       </a:r>
-                      <a:endParaRPr lang="en-US" sz="1100" dirty="0">
+                      <a:endParaRPr lang="en-US" sz="1200" dirty="0">
                         <a:latin typeface="Arial" charset="0"/>
                         <a:ea typeface="Arial" charset="0"/>
                         <a:cs typeface="Arial" charset="0"/>
                       </a:endParaRPr>
                     </a:p>
                   </a:txBody>
-                  <a:tcPr marL="101600" marR="101600" marT="38100" marB="38100" anchor="ctr">
+                  <a:tcPr marL="76200" marR="76200" marT="31750" marB="31750" anchor="ctr">
                     <a:lnL w="6350" cap="flat" cmpd="sng" algn="ctr">
                       <a:solidFill>
                         <a:srgbClr val="C6C9CD"/>
@@ -2485,7 +2635,7 @@
                         <a:buNone/>
                       </a:pPr>
                       <a:r>
-                        <a:rPr lang="en-US" sz="1100" b="1" dirty="0">
+                        <a:rPr lang="en-US" sz="1200" b="1" dirty="0">
                           <a:solidFill>
                             <a:srgbClr val="000000"/>
                           </a:solidFill>
@@ -2495,14 +2645,14 @@
                         </a:rPr>
                         <a:t>Retrieval</a:t>
                       </a:r>
-                      <a:endParaRPr lang="en-US" sz="1100" dirty="0">
+                      <a:endParaRPr lang="en-US" sz="1200" dirty="0">
                         <a:latin typeface="Arial" charset="0"/>
                         <a:ea typeface="Arial" charset="0"/>
                         <a:cs typeface="Arial" charset="0"/>
                       </a:endParaRPr>
                     </a:p>
                   </a:txBody>
-                  <a:tcPr marL="101600" marR="101600" marT="38100" marB="38100" anchor="ctr">
+                  <a:tcPr marL="76200" marR="76200" marT="31750" marB="31750" anchor="ctr">
                     <a:lnL w="6350" cap="flat" cmpd="sng" algn="ctr">
                       <a:solidFill>
                         <a:srgbClr val="C6C9CD"/>
@@ -2555,7 +2705,7 @@
                         <a:buNone/>
                       </a:pPr>
                       <a:r>
-                        <a:rPr lang="en-US" sz="1100" dirty="0">
+                        <a:rPr lang="en-US" sz="1200" dirty="0">
                           <a:solidFill>
                             <a:srgbClr val="000000"/>
                           </a:solidFill>
@@ -2565,14 +2715,14 @@
                         </a:rPr>
                         <a:t>5</a:t>
                       </a:r>
-                      <a:endParaRPr lang="en-US" sz="1100" dirty="0">
+                      <a:endParaRPr lang="en-US" sz="1200" dirty="0">
                         <a:latin typeface="Arial" charset="0"/>
                         <a:ea typeface="Arial" charset="0"/>
                         <a:cs typeface="Arial" charset="0"/>
                       </a:endParaRPr>
                     </a:p>
                   </a:txBody>
-                  <a:tcPr marL="101600" marR="101600" marT="38100" marB="38100" anchor="ctr">
+                  <a:tcPr marL="76200" marR="76200" marT="31750" marB="31750" anchor="ctr">
                     <a:lnL w="6350" cap="flat" cmpd="sng" algn="ctr">
                       <a:solidFill>
                         <a:srgbClr val="C6C9CD"/>
@@ -2625,7 +2775,7 @@
                         <a:buNone/>
                       </a:pPr>
                       <a:r>
-                        <a:rPr lang="en-US" sz="1100" dirty="0">
+                        <a:rPr lang="en-US" sz="1200" dirty="0">
                           <a:solidFill>
                             <a:srgbClr val="000000"/>
                           </a:solidFill>
@@ -2635,14 +2785,14 @@
                         </a:rPr>
                         <a:t>60%</a:t>
                       </a:r>
-                      <a:endParaRPr lang="en-US" sz="1100" dirty="0">
+                      <a:endParaRPr lang="en-US" sz="1200" dirty="0">
                         <a:latin typeface="Arial" charset="0"/>
                         <a:ea typeface="Arial" charset="0"/>
                         <a:cs typeface="Arial" charset="0"/>
                       </a:endParaRPr>
                     </a:p>
                   </a:txBody>
-                  <a:tcPr marL="101600" marR="101600" marT="38100" marB="38100" anchor="ctr">
+                  <a:tcPr marL="76200" marR="76200" marT="31750" marB="31750" anchor="ctr">
                     <a:lnL w="6350" cap="flat" cmpd="sng" algn="ctr">
                       <a:solidFill>
                         <a:srgbClr val="C6C9CD"/>
@@ -2695,7 +2845,7 @@
                         <a:buNone/>
                       </a:pPr>
                       <a:r>
-                        <a:rPr lang="en-US" sz="1100" dirty="0">
+                        <a:rPr lang="en-US" sz="1200" dirty="0">
                           <a:solidFill>
                             <a:srgbClr val="000000"/>
                           </a:solidFill>
@@ -2705,14 +2855,14 @@
                         </a:rPr>
                         <a:t>40%</a:t>
                       </a:r>
-                      <a:endParaRPr lang="en-US" sz="1100" dirty="0">
+                      <a:endParaRPr lang="en-US" sz="1200" dirty="0">
                         <a:latin typeface="Arial" charset="0"/>
                         <a:ea typeface="Arial" charset="0"/>
                         <a:cs typeface="Arial" charset="0"/>
                       </a:endParaRPr>
                     </a:p>
                   </a:txBody>
-                  <a:tcPr marL="101600" marR="101600" marT="38100" marB="38100" anchor="ctr">
+                  <a:tcPr marL="76200" marR="76200" marT="31750" marB="31750" anchor="ctr">
                     <a:lnL w="6350" cap="flat" cmpd="sng" algn="ctr">
                       <a:solidFill>
                         <a:srgbClr val="C6C9CD"/>
@@ -2774,8 +2924,8 @@
           </p:nvPr>
         </p:nvGraphicFramePr>
         <p:xfrm>
-          <a:off x="4826000" y="3987800"/>
-          <a:ext cx="7048500" cy="1524000"/>
+          <a:off x="4826000" y="3835400"/>
+          <a:ext cx="7048500" cy="1612900"/>
         </p:xfrm>
         <a:graphic>
           <a:graphicData uri="http://schemas.openxmlformats.org/drawingml/2006/table">
@@ -2799,7 +2949,7 @@
                         <a:buNone/>
                       </a:pPr>
                       <a:r>
-                        <a:rPr lang="en-US" sz="1000" b="1" dirty="0">
+                        <a:rPr lang="en-US" sz="1200" b="1" dirty="0">
                           <a:solidFill>
                             <a:srgbClr val="FFFFFF"/>
                           </a:solidFill>
@@ -2809,14 +2959,154 @@
                         </a:rPr>
                         <a:t>Workflow</a:t>
                       </a:r>
-                      <a:endParaRPr lang="en-US" sz="1000" dirty="0">
+                      <a:endParaRPr lang="en-US" sz="1200" dirty="0">
                         <a:latin typeface="Arial" charset="0"/>
                         <a:ea typeface="Arial" charset="0"/>
                         <a:cs typeface="Arial" charset="0"/>
                       </a:endParaRPr>
                     </a:p>
                   </a:txBody>
-                  <a:tcPr marL="101600" marR="101600" marT="38100" marB="38100" anchor="ctr">
+                  <a:tcPr marL="76200" marR="76200" marT="31750" marB="31750" anchor="ctr">
+                    <a:lnL w="6350" cap="flat" cmpd="sng" algn="ctr">
+                      <a:solidFill>
+                        <a:srgbClr val="C6C9CD"/>
+                      </a:solidFill>
+                      <a:prstDash val="solid"/>
+                      <a:round/>
+                      <a:headEnd type="none" w="med" len="med"/>
+                      <a:tailEnd type="none" w="med" len="med"/>
+                    </a:lnL>
+                    <a:lnR w="6350" cap="flat" cmpd="sng" algn="ctr">
+                      <a:solidFill>
+                        <a:srgbClr val="C6C9CD"/>
+                      </a:solidFill>
+                      <a:prstDash val="solid"/>
+                      <a:round/>
+                      <a:headEnd type="none" w="med" len="med"/>
+                      <a:tailEnd type="none" w="med" len="med"/>
+                    </a:lnR>
+                    <a:lnT w="6350" cap="flat" cmpd="sng" algn="ctr">
+                      <a:solidFill>
+                        <a:srgbClr val="C6C9CD"/>
+                      </a:solidFill>
+                      <a:prstDash val="solid"/>
+                      <a:round/>
+                      <a:headEnd type="none" w="med" len="med"/>
+                      <a:tailEnd type="none" w="med" len="med"/>
+                    </a:lnT>
+                    <a:lnB w="6350" cap="flat" cmpd="sng" algn="ctr">
+                      <a:solidFill>
+                        <a:srgbClr val="C6C9CD"/>
+                      </a:solidFill>
+                      <a:prstDash val="solid"/>
+                      <a:round/>
+                      <a:headEnd type="none" w="med" len="med"/>
+                      <a:tailEnd type="none" w="med" len="med"/>
+                    </a:lnB>
+                    <a:solidFill>
+                      <a:srgbClr val="000000"/>
+                    </a:solidFill>
+                  </a:tcPr>
+                </a:tc>
+                <a:tc>
+                  <a:txBody>
+                    <a:bodyPr>
+                      <a:noAutofit/>
+                    </a:bodyPr>
+                    <a:lstStyle/>
+                    <a:p>
+                      <a:pPr algn="l" indent="0" marL="0">
+                        <a:buNone/>
+                      </a:pPr>
+                      <a:r>
+                        <a:rPr lang="en-US" sz="1200" b="1" dirty="0">
+                          <a:solidFill>
+                            <a:srgbClr val="FFFFFF"/>
+                          </a:solidFill>
+                          <a:latin typeface="Arial" pitchFamily="34" charset="0"/>
+                          <a:ea typeface="Arial" pitchFamily="34" charset="-122"/>
+                          <a:cs typeface="Arial" pitchFamily="34" charset="-120"/>
+                        </a:rPr>
+                        <a:t>Control readiness</a:t>
+                      </a:r>
+                      <a:endParaRPr lang="en-US" sz="1200" dirty="0">
+                        <a:latin typeface="Arial" charset="0"/>
+                        <a:ea typeface="Arial" charset="0"/>
+                        <a:cs typeface="Arial" charset="0"/>
+                      </a:endParaRPr>
+                    </a:p>
+                  </a:txBody>
+                  <a:tcPr marL="76200" marR="76200" marT="31750" marB="31750" anchor="ctr">
+                    <a:lnL w="6350" cap="flat" cmpd="sng" algn="ctr">
+                      <a:solidFill>
+                        <a:srgbClr val="C6C9CD"/>
+                      </a:solidFill>
+                      <a:prstDash val="solid"/>
+                      <a:round/>
+                      <a:headEnd type="none" w="med" len="med"/>
+                      <a:tailEnd type="none" w="med" len="med"/>
+                    </a:lnL>
+                    <a:lnR w="6350" cap="flat" cmpd="sng" algn="ctr">
+                      <a:solidFill>
+                        <a:srgbClr val="C6C9CD"/>
+                      </a:solidFill>
+                      <a:prstDash val="solid"/>
+                      <a:round/>
+                      <a:headEnd type="none" w="med" len="med"/>
+                      <a:tailEnd type="none" w="med" len="med"/>
+                    </a:lnR>
+                    <a:lnT w="6350" cap="flat" cmpd="sng" algn="ctr">
+                      <a:solidFill>
+                        <a:srgbClr val="C6C9CD"/>
+                      </a:solidFill>
+                      <a:prstDash val="solid"/>
+                      <a:round/>
+                      <a:headEnd type="none" w="med" len="med"/>
+                      <a:tailEnd type="none" w="med" len="med"/>
+                    </a:lnT>
+                    <a:lnB w="6350" cap="flat" cmpd="sng" algn="ctr">
+                      <a:solidFill>
+                        <a:srgbClr val="C6C9CD"/>
+                      </a:solidFill>
+                      <a:prstDash val="solid"/>
+                      <a:round/>
+                      <a:headEnd type="none" w="med" len="med"/>
+                      <a:tailEnd type="none" w="med" len="med"/>
+                    </a:lnB>
+                    <a:solidFill>
+                      <a:srgbClr val="000000"/>
+                    </a:solidFill>
+                  </a:tcPr>
+                </a:tc>
+                <a:tc>
+                  <a:txBody>
+                    <a:bodyPr>
+                      <a:noAutofit/>
+                    </a:bodyPr>
+                    <a:lstStyle/>
+                    <a:p>
+                      <a:pPr algn="l" indent="0" marL="0">
+                        <a:buNone/>
+                      </a:pPr>
+                      <a:r>
+                        <a:rPr lang="en-US" sz="1200" b="1" dirty="0">
+                          <a:solidFill>
+                            <a:srgbClr val="FFFFFF"/>
+                          </a:solidFill>
+                          <a:latin typeface="Arial" pitchFamily="34" charset="0"/>
+                          <a:ea typeface="Arial" pitchFamily="34" charset="-122"/>
+                          <a:cs typeface="Arial" pitchFamily="34" charset="-120"/>
+                        </a:rPr>
+                        <a:t>Owner</a:t>
+                      </a:r>
+                      <a:endParaRPr lang="en-US" sz="1200" dirty="0">
+                        <a:latin typeface="Arial" charset="0"/>
+                        <a:ea typeface="Arial" charset="0"/>
+                        <a:cs typeface="Arial" charset="0"/>
+                      </a:endParaRPr>
+                    </a:p>
+                  </a:txBody>
+                  <a:tcPr marL="76200" marR="76200" marT="31750" marB="31750" anchor="ctr">
                     <a:lnL w="6350" cap="flat" cmpd="sng" algn="ctr">
                       <a:solidFill>
                         <a:srgbClr val="C6C9CD"/>
@@ -2869,7 +3159,7 @@
                         <a:buNone/>
                       </a:pPr>
                       <a:r>
-                        <a:rPr lang="en-US" sz="1000" b="1" dirty="0">
+                        <a:rPr lang="en-US" sz="1200" b="1" dirty="0">
                           <a:solidFill>
                             <a:srgbClr val="FFFFFF"/>
                           </a:solidFill>
@@ -2877,16 +3167,16 @@
                           <a:ea typeface="Arial" pitchFamily="34" charset="-122"/>
                           <a:cs typeface="Arial" pitchFamily="34" charset="-120"/>
                         </a:rPr>
-                        <a:t>Control readiness</a:t>
+                        <a:t>Sequence</a:t>
                       </a:r>
-                      <a:endParaRPr lang="en-US" sz="1000" dirty="0">
+                      <a:endParaRPr lang="en-US" sz="1200" dirty="0">
                         <a:latin typeface="Arial" charset="0"/>
                         <a:ea typeface="Arial" charset="0"/>
                         <a:cs typeface="Arial" charset="0"/>
                       </a:endParaRPr>
                     </a:p>
                   </a:txBody>
-                  <a:tcPr marL="101600" marR="101600" marT="38100" marB="38100" anchor="ctr">
+                  <a:tcPr marL="76200" marR="76200" marT="31750" marB="31750" anchor="ctr">
                     <a:lnL w="6350" cap="flat" cmpd="sng" algn="ctr">
                       <a:solidFill>
                         <a:srgbClr val="C6C9CD"/>
@@ -2925,6 +3215,239 @@
                     </a:lnB>
                     <a:solidFill>
                       <a:srgbClr val="000000"/>
+                    </a:solidFill>
+                  </a:tcPr>
+                </a:tc>
+              </a:tr>
+              <a:tr h="431800">
+                <a:tc>
+                  <a:txBody>
+                    <a:bodyPr>
+                      <a:noAutofit/>
+                    </a:bodyPr>
+                    <a:lstStyle/>
+                    <a:p>
+                      <a:pPr algn="l" indent="0" marL="0">
+                        <a:buNone/>
+                      </a:pPr>
+                      <a:r>
+                        <a:rPr lang="en-US" sz="1200" b="1" dirty="0">
+                          <a:solidFill>
+                            <a:srgbClr val="000000"/>
+                          </a:solidFill>
+                          <a:latin typeface="Arial" pitchFamily="34" charset="0"/>
+                          <a:ea typeface="Arial" pitchFamily="34" charset="-122"/>
+                          <a:cs typeface="Arial" pitchFamily="34" charset="-120"/>
+                        </a:rPr>
+                        <a:t>Research synthesis</a:t>
+                      </a:r>
+                      <a:endParaRPr lang="en-US" sz="1200" dirty="0">
+                        <a:latin typeface="Arial" charset="0"/>
+                        <a:ea typeface="Arial" charset="0"/>
+                        <a:cs typeface="Arial" charset="0"/>
+                      </a:endParaRPr>
+                    </a:p>
+                  </a:txBody>
+                  <a:tcPr marL="76200" marR="76200" marT="31750" marB="31750" anchor="ctr">
+                    <a:lnL w="6350" cap="flat" cmpd="sng" algn="ctr">
+                      <a:solidFill>
+                        <a:srgbClr val="C6C9CD"/>
+                      </a:solidFill>
+                      <a:prstDash val="solid"/>
+                      <a:round/>
+                      <a:headEnd type="none" w="med" len="med"/>
+                      <a:tailEnd type="none" w="med" len="med"/>
+                    </a:lnL>
+                    <a:lnR w="6350" cap="flat" cmpd="sng" algn="ctr">
+                      <a:solidFill>
+                        <a:srgbClr val="C6C9CD"/>
+                      </a:solidFill>
+                      <a:prstDash val="solid"/>
+                      <a:round/>
+                      <a:headEnd type="none" w="med" len="med"/>
+                      <a:tailEnd type="none" w="med" len="med"/>
+                    </a:lnR>
+                    <a:lnT w="6350" cap="flat" cmpd="sng" algn="ctr">
+                      <a:solidFill>
+                        <a:srgbClr val="C6C9CD"/>
+                      </a:solidFill>
+                      <a:prstDash val="solid"/>
+                      <a:round/>
+                      <a:headEnd type="none" w="med" len="med"/>
+                      <a:tailEnd type="none" w="med" len="med"/>
+                    </a:lnT>
+                    <a:lnB w="6350" cap="flat" cmpd="sng" algn="ctr">
+                      <a:solidFill>
+                        <a:srgbClr val="C6C9CD"/>
+                      </a:solidFill>
+                      <a:prstDash val="solid"/>
+                      <a:round/>
+                      <a:headEnd type="none" w="med" len="med"/>
+                      <a:tailEnd type="none" w="med" len="med"/>
+                    </a:lnB>
+                    <a:solidFill>
+                      <a:srgbClr val="FFF5ED"/>
+                    </a:solidFill>
+                  </a:tcPr>
+                </a:tc>
+                <a:tc>
+                  <a:txBody>
+                    <a:bodyPr>
+                      <a:noAutofit/>
+                    </a:bodyPr>
+                    <a:lstStyle/>
+                    <a:p>
+                      <a:pPr algn="l" indent="0" marL="0">
+                        <a:buNone/>
+                      </a:pPr>
+                      <a:r>
+                        <a:rPr lang="en-US" sz="1200" dirty="0">
+                          <a:solidFill>
+                            <a:srgbClr val="000000"/>
+                          </a:solidFill>
+                          <a:latin typeface="Arial" pitchFamily="34" charset="0"/>
+                          <a:ea typeface="Arial" pitchFamily="34" charset="-122"/>
+                          <a:cs typeface="Arial" pitchFamily="34" charset="-120"/>
+                        </a:rPr>
+                        <a:t>Approved corpus</a:t>
+                      </a:r>
+                      <a:endParaRPr lang="en-US" sz="1200" dirty="0">
+                        <a:latin typeface="Arial" charset="0"/>
+                        <a:ea typeface="Arial" charset="0"/>
+                        <a:cs typeface="Arial" charset="0"/>
+                      </a:endParaRPr>
+                    </a:p>
+                    <a:p>
+                      <a:pPr algn="l" indent="0" marL="0">
+                        <a:buNone/>
+                      </a:pPr>
+                      <a:r>
+                        <a:rPr lang="en-US" sz="1200" dirty="0">
+                          <a:solidFill>
+                            <a:srgbClr val="000000"/>
+                          </a:solidFill>
+                          <a:latin typeface="Arial" pitchFamily="34" charset="0"/>
+                          <a:ea typeface="Arial" pitchFamily="34" charset="-122"/>
+                          <a:cs typeface="Arial" pitchFamily="34" charset="-120"/>
+                        </a:rPr>
+                        <a:t>Explicit review</a:t>
+                      </a:r>
+                      <a:endParaRPr lang="en-US" sz="1200" dirty="0">
+                        <a:latin typeface="Arial" charset="0"/>
+                        <a:ea typeface="Arial" charset="0"/>
+                        <a:cs typeface="Arial" charset="0"/>
+                      </a:endParaRPr>
+                    </a:p>
+                  </a:txBody>
+                  <a:tcPr marL="76200" marR="76200" marT="31750" marB="31750" anchor="ctr">
+                    <a:lnL w="6350" cap="flat" cmpd="sng" algn="ctr">
+                      <a:solidFill>
+                        <a:srgbClr val="C6C9CD"/>
+                      </a:solidFill>
+                      <a:prstDash val="solid"/>
+                      <a:round/>
+                      <a:headEnd type="none" w="med" len="med"/>
+                      <a:tailEnd type="none" w="med" len="med"/>
+                    </a:lnL>
+                    <a:lnR w="6350" cap="flat" cmpd="sng" algn="ctr">
+                      <a:solidFill>
+                        <a:srgbClr val="C6C9CD"/>
+                      </a:solidFill>
+                      <a:prstDash val="solid"/>
+                      <a:round/>
+                      <a:headEnd type="none" w="med" len="med"/>
+                      <a:tailEnd type="none" w="med" len="med"/>
+                    </a:lnR>
+                    <a:lnT w="6350" cap="flat" cmpd="sng" algn="ctr">
+                      <a:solidFill>
+                        <a:srgbClr val="C6C9CD"/>
+                      </a:solidFill>
+                      <a:prstDash val="solid"/>
+                      <a:round/>
+                      <a:headEnd type="none" w="med" len="med"/>
+                      <a:tailEnd type="none" w="med" len="med"/>
+                    </a:lnT>
+                    <a:lnB w="6350" cap="flat" cmpd="sng" algn="ctr">
+                      <a:solidFill>
+                        <a:srgbClr val="C6C9CD"/>
+                      </a:solidFill>
+                      <a:prstDash val="solid"/>
+                      <a:round/>
+                      <a:headEnd type="none" w="med" len="med"/>
+                      <a:tailEnd type="none" w="med" len="med"/>
+                    </a:lnB>
+                    <a:solidFill>
+                      <a:srgbClr val="FFF5ED"/>
+                    </a:solidFill>
+                  </a:tcPr>
+                </a:tc>
+                <a:tc>
+                  <a:txBody>
+                    <a:bodyPr>
+                      <a:noAutofit/>
+                    </a:bodyPr>
+                    <a:lstStyle/>
+                    <a:p>
+                      <a:pPr algn="l" indent="0" marL="0">
+                        <a:buNone/>
+                      </a:pPr>
+                      <a:r>
+                        <a:rPr lang="en-US" sz="1200" dirty="0">
+                          <a:solidFill>
+                            <a:srgbClr val="000000"/>
+                          </a:solidFill>
+                          <a:latin typeface="Arial" pitchFamily="34" charset="0"/>
+                          <a:ea typeface="Arial" pitchFamily="34" charset="-122"/>
+                          <a:cs typeface="Arial" pitchFamily="34" charset="-120"/>
+                        </a:rPr>
+                        <a:t>Practice lead</a:t>
+                      </a:r>
+                      <a:endParaRPr lang="en-US" sz="1200" dirty="0">
+                        <a:latin typeface="Arial" charset="0"/>
+                        <a:ea typeface="Arial" charset="0"/>
+                        <a:cs typeface="Arial" charset="0"/>
+                      </a:endParaRPr>
+                    </a:p>
+                  </a:txBody>
+                  <a:tcPr marL="76200" marR="76200" marT="31750" marB="31750" anchor="ctr">
+                    <a:lnL w="6350" cap="flat" cmpd="sng" algn="ctr">
+                      <a:solidFill>
+                        <a:srgbClr val="C6C9CD"/>
+                      </a:solidFill>
+                      <a:prstDash val="solid"/>
+                      <a:round/>
+                      <a:headEnd type="none" w="med" len="med"/>
+                      <a:tailEnd type="none" w="med" len="med"/>
+                    </a:lnL>
+                    <a:lnR w="6350" cap="flat" cmpd="sng" algn="ctr">
+                      <a:solidFill>
+                        <a:srgbClr val="C6C9CD"/>
+                      </a:solidFill>
+                      <a:prstDash val="solid"/>
+                      <a:round/>
+                      <a:headEnd type="none" w="med" len="med"/>
+                      <a:tailEnd type="none" w="med" len="med"/>
+                    </a:lnR>
+                    <a:lnT w="6350" cap="flat" cmpd="sng" algn="ctr">
+                      <a:solidFill>
+                        <a:srgbClr val="C6C9CD"/>
+                      </a:solidFill>
+                      <a:prstDash val="solid"/>
+                      <a:round/>
+                      <a:headEnd type="none" w="med" len="med"/>
+                      <a:tailEnd type="none" w="med" len="med"/>
+                    </a:lnT>
+                    <a:lnB w="6350" cap="flat" cmpd="sng" algn="ctr">
+                      <a:solidFill>
+                        <a:srgbClr val="C6C9CD"/>
+                      </a:solidFill>
+                      <a:prstDash val="solid"/>
+                      <a:round/>
+                      <a:headEnd type="none" w="med" len="med"/>
+                      <a:tailEnd type="none" w="med" len="med"/>
+                    </a:lnB>
+                    <a:solidFill>
+                      <a:srgbClr val="FFF5ED"/>
                     </a:solidFill>
                   </a:tcPr>
                 </a:tc>
@@ -2939,24 +3462,24 @@
                         <a:buNone/>
                       </a:pPr>
                       <a:r>
-                        <a:rPr lang="en-US" sz="1000" b="1" dirty="0">
+                        <a:rPr lang="en-US" sz="1200" b="1" dirty="0">
                           <a:solidFill>
-                            <a:srgbClr val="FFFFFF"/>
+                            <a:srgbClr val="FD5108"/>
                           </a:solidFill>
                           <a:latin typeface="Arial" pitchFamily="34" charset="0"/>
                           <a:ea typeface="Arial" pitchFamily="34" charset="-122"/>
                           <a:cs typeface="Arial" pitchFamily="34" charset="-120"/>
                         </a:rPr>
-                        <a:t>Owner</a:t>
+                        <a:t>START</a:t>
                       </a:r>
-                      <a:endParaRPr lang="en-US" sz="1000" dirty="0">
+                      <a:endParaRPr lang="en-US" sz="1200" dirty="0">
                         <a:latin typeface="Arial" charset="0"/>
                         <a:ea typeface="Arial" charset="0"/>
                         <a:cs typeface="Arial" charset="0"/>
                       </a:endParaRPr>
                     </a:p>
                   </a:txBody>
-                  <a:tcPr marL="101600" marR="101600" marT="38100" marB="38100" anchor="ctr">
+                  <a:tcPr marL="76200" marR="76200" marT="31750" marB="31750" anchor="ctr">
                     <a:lnL w="6350" cap="flat" cmpd="sng" algn="ctr">
                       <a:solidFill>
                         <a:srgbClr val="C6C9CD"/>
@@ -2994,7 +3517,240 @@
                       <a:tailEnd type="none" w="med" len="med"/>
                     </a:lnB>
                     <a:solidFill>
-                      <a:srgbClr val="000000"/>
+                      <a:srgbClr val="FFF5ED"/>
+                    </a:solidFill>
+                  </a:tcPr>
+                </a:tc>
+              </a:tr>
+              <a:tr h="431800">
+                <a:tc>
+                  <a:txBody>
+                    <a:bodyPr>
+                      <a:noAutofit/>
+                    </a:bodyPr>
+                    <a:lstStyle/>
+                    <a:p>
+                      <a:pPr algn="l" indent="0" marL="0">
+                        <a:buNone/>
+                      </a:pPr>
+                      <a:r>
+                        <a:rPr lang="en-US" sz="1200" b="1" dirty="0">
+                          <a:solidFill>
+                            <a:srgbClr val="000000"/>
+                          </a:solidFill>
+                          <a:latin typeface="Arial" pitchFamily="34" charset="0"/>
+                          <a:ea typeface="Arial" pitchFamily="34" charset="-122"/>
+                          <a:cs typeface="Arial" pitchFamily="34" charset="-120"/>
+                        </a:rPr>
+                        <a:t>Proposal drafting</a:t>
+                      </a:r>
+                      <a:endParaRPr lang="en-US" sz="1200" dirty="0">
+                        <a:latin typeface="Arial" charset="0"/>
+                        <a:ea typeface="Arial" charset="0"/>
+                        <a:cs typeface="Arial" charset="0"/>
+                      </a:endParaRPr>
+                    </a:p>
+                  </a:txBody>
+                  <a:tcPr marL="76200" marR="76200" marT="31750" marB="31750" anchor="ctr">
+                    <a:lnL w="6350" cap="flat" cmpd="sng" algn="ctr">
+                      <a:solidFill>
+                        <a:srgbClr val="C6C9CD"/>
+                      </a:solidFill>
+                      <a:prstDash val="solid"/>
+                      <a:round/>
+                      <a:headEnd type="none" w="med" len="med"/>
+                      <a:tailEnd type="none" w="med" len="med"/>
+                    </a:lnL>
+                    <a:lnR w="6350" cap="flat" cmpd="sng" algn="ctr">
+                      <a:solidFill>
+                        <a:srgbClr val="C6C9CD"/>
+                      </a:solidFill>
+                      <a:prstDash val="solid"/>
+                      <a:round/>
+                      <a:headEnd type="none" w="med" len="med"/>
+                      <a:tailEnd type="none" w="med" len="med"/>
+                    </a:lnR>
+                    <a:lnT w="6350" cap="flat" cmpd="sng" algn="ctr">
+                      <a:solidFill>
+                        <a:srgbClr val="C6C9CD"/>
+                      </a:solidFill>
+                      <a:prstDash val="solid"/>
+                      <a:round/>
+                      <a:headEnd type="none" w="med" len="med"/>
+                      <a:tailEnd type="none" w="med" len="med"/>
+                    </a:lnT>
+                    <a:lnB w="6350" cap="flat" cmpd="sng" algn="ctr">
+                      <a:solidFill>
+                        <a:srgbClr val="C6C9CD"/>
+                      </a:solidFill>
+                      <a:prstDash val="solid"/>
+                      <a:round/>
+                      <a:headEnd type="none" w="med" len="med"/>
+                      <a:tailEnd type="none" w="med" len="med"/>
+                    </a:lnB>
+                    <a:solidFill>
+                      <a:srgbClr val="F5F7F8"/>
+                    </a:solidFill>
+                  </a:tcPr>
+                </a:tc>
+                <a:tc>
+                  <a:txBody>
+                    <a:bodyPr>
+                      <a:noAutofit/>
+                    </a:bodyPr>
+                    <a:lstStyle/>
+                    <a:p>
+                      <a:pPr algn="l" indent="0" marL="0">
+                        <a:buNone/>
+                      </a:pPr>
+                      <a:r>
+                        <a:rPr lang="en-US" sz="1200" dirty="0">
+                          <a:solidFill>
+                            <a:srgbClr val="000000"/>
+                          </a:solidFill>
+                          <a:latin typeface="Arial" pitchFamily="34" charset="0"/>
+                          <a:ea typeface="Arial" pitchFamily="34" charset="-122"/>
+                          <a:cs typeface="Arial" pitchFamily="34" charset="-120"/>
+                        </a:rPr>
+                        <a:t>Claims and commitments</a:t>
+                      </a:r>
+                      <a:endParaRPr lang="en-US" sz="1200" dirty="0">
+                        <a:latin typeface="Arial" charset="0"/>
+                        <a:ea typeface="Arial" charset="0"/>
+                        <a:cs typeface="Arial" charset="0"/>
+                      </a:endParaRPr>
+                    </a:p>
+                    <a:p>
+                      <a:pPr algn="l" indent="0" marL="0">
+                        <a:buNone/>
+                      </a:pPr>
+                      <a:r>
+                        <a:rPr lang="en-US" sz="1200" dirty="0">
+                          <a:solidFill>
+                            <a:srgbClr val="000000"/>
+                          </a:solidFill>
+                          <a:latin typeface="Arial" pitchFamily="34" charset="0"/>
+                          <a:ea typeface="Arial" pitchFamily="34" charset="-122"/>
+                          <a:cs typeface="Arial" pitchFamily="34" charset="-120"/>
+                        </a:rPr>
+                        <a:t>need controls</a:t>
+                      </a:r>
+                      <a:endParaRPr lang="en-US" sz="1200" dirty="0">
+                        <a:latin typeface="Arial" charset="0"/>
+                        <a:ea typeface="Arial" charset="0"/>
+                        <a:cs typeface="Arial" charset="0"/>
+                      </a:endParaRPr>
+                    </a:p>
+                  </a:txBody>
+                  <a:tcPr marL="76200" marR="76200" marT="31750" marB="31750" anchor="ctr">
+                    <a:lnL w="6350" cap="flat" cmpd="sng" algn="ctr">
+                      <a:solidFill>
+                        <a:srgbClr val="C6C9CD"/>
+                      </a:solidFill>
+                      <a:prstDash val="solid"/>
+                      <a:round/>
+                      <a:headEnd type="none" w="med" len="med"/>
+                      <a:tailEnd type="none" w="med" len="med"/>
+                    </a:lnL>
+                    <a:lnR w="6350" cap="flat" cmpd="sng" algn="ctr">
+                      <a:solidFill>
+                        <a:srgbClr val="C6C9CD"/>
+                      </a:solidFill>
+                      <a:prstDash val="solid"/>
+                      <a:round/>
+                      <a:headEnd type="none" w="med" len="med"/>
+                      <a:tailEnd type="none" w="med" len="med"/>
+                    </a:lnR>
+                    <a:lnT w="6350" cap="flat" cmpd="sng" algn="ctr">
+                      <a:solidFill>
+                        <a:srgbClr val="C6C9CD"/>
+                      </a:solidFill>
+                      <a:prstDash val="solid"/>
+                      <a:round/>
+                      <a:headEnd type="none" w="med" len="med"/>
+                      <a:tailEnd type="none" w="med" len="med"/>
+                    </a:lnT>
+                    <a:lnB w="6350" cap="flat" cmpd="sng" algn="ctr">
+                      <a:solidFill>
+                        <a:srgbClr val="C6C9CD"/>
+                      </a:solidFill>
+                      <a:prstDash val="solid"/>
+                      <a:round/>
+                      <a:headEnd type="none" w="med" len="med"/>
+                      <a:tailEnd type="none" w="med" len="med"/>
+                    </a:lnB>
+                    <a:solidFill>
+                      <a:srgbClr val="F5F7F8"/>
+                    </a:solidFill>
+                  </a:tcPr>
+                </a:tc>
+                <a:tc>
+                  <a:txBody>
+                    <a:bodyPr>
+                      <a:noAutofit/>
+                    </a:bodyPr>
+                    <a:lstStyle/>
+                    <a:p>
+                      <a:pPr algn="l" indent="0" marL="0">
+                        <a:buNone/>
+                      </a:pPr>
+                      <a:r>
+                        <a:rPr lang="en-US" sz="1200" dirty="0">
+                          <a:solidFill>
+                            <a:srgbClr val="000000"/>
+                          </a:solidFill>
+                          <a:latin typeface="Arial" pitchFamily="34" charset="0"/>
+                          <a:ea typeface="Arial" pitchFamily="34" charset="-122"/>
+                          <a:cs typeface="Arial" pitchFamily="34" charset="-120"/>
+                        </a:rPr>
+                        <a:t>BD lead</a:t>
+                      </a:r>
+                      <a:endParaRPr lang="en-US" sz="1200" dirty="0">
+                        <a:latin typeface="Arial" charset="0"/>
+                        <a:ea typeface="Arial" charset="0"/>
+                        <a:cs typeface="Arial" charset="0"/>
+                      </a:endParaRPr>
+                    </a:p>
+                  </a:txBody>
+                  <a:tcPr marL="76200" marR="76200" marT="31750" marB="31750" anchor="ctr">
+                    <a:lnL w="6350" cap="flat" cmpd="sng" algn="ctr">
+                      <a:solidFill>
+                        <a:srgbClr val="C6C9CD"/>
+                      </a:solidFill>
+                      <a:prstDash val="solid"/>
+                      <a:round/>
+                      <a:headEnd type="none" w="med" len="med"/>
+                      <a:tailEnd type="none" w="med" len="med"/>
+                    </a:lnL>
+                    <a:lnR w="6350" cap="flat" cmpd="sng" algn="ctr">
+                      <a:solidFill>
+                        <a:srgbClr val="C6C9CD"/>
+                      </a:solidFill>
+                      <a:prstDash val="solid"/>
+                      <a:round/>
+                      <a:headEnd type="none" w="med" len="med"/>
+                      <a:tailEnd type="none" w="med" len="med"/>
+                    </a:lnR>
+                    <a:lnT w="6350" cap="flat" cmpd="sng" algn="ctr">
+                      <a:solidFill>
+                        <a:srgbClr val="C6C9CD"/>
+                      </a:solidFill>
+                      <a:prstDash val="solid"/>
+                      <a:round/>
+                      <a:headEnd type="none" w="med" len="med"/>
+                      <a:tailEnd type="none" w="med" len="med"/>
+                    </a:lnT>
+                    <a:lnB w="6350" cap="flat" cmpd="sng" algn="ctr">
+                      <a:solidFill>
+                        <a:srgbClr val="C6C9CD"/>
+                      </a:solidFill>
+                      <a:prstDash val="solid"/>
+                      <a:round/>
+                      <a:headEnd type="none" w="med" len="med"/>
+                      <a:tailEnd type="none" w="med" len="med"/>
+                    </a:lnB>
+                    <a:solidFill>
+                      <a:srgbClr val="F5F7F8"/>
                     </a:solidFill>
                   </a:tcPr>
                 </a:tc>
@@ -3009,24 +3765,24 @@
                         <a:buNone/>
                       </a:pPr>
                       <a:r>
-                        <a:rPr lang="en-US" sz="1000" b="1" dirty="0">
+                        <a:rPr lang="en-US" sz="1200" b="1" dirty="0">
                           <a:solidFill>
-                            <a:srgbClr val="FFFFFF"/>
+                            <a:srgbClr val="FD5108"/>
                           </a:solidFill>
                           <a:latin typeface="Arial" pitchFamily="34" charset="0"/>
                           <a:ea typeface="Arial" pitchFamily="34" charset="-122"/>
                           <a:cs typeface="Arial" pitchFamily="34" charset="-120"/>
                         </a:rPr>
-                        <a:t>Sequence</a:t>
+                        <a:t>NEXT</a:t>
                       </a:r>
-                      <a:endParaRPr lang="en-US" sz="1000" dirty="0">
+                      <a:endParaRPr lang="en-US" sz="1200" dirty="0">
                         <a:latin typeface="Arial" charset="0"/>
                         <a:ea typeface="Arial" charset="0"/>
                         <a:cs typeface="Arial" charset="0"/>
                       </a:endParaRPr>
                     </a:p>
                   </a:txBody>
-                  <a:tcPr marL="101600" marR="101600" marT="38100" marB="38100" anchor="ctr">
+                  <a:tcPr marL="76200" marR="76200" marT="31750" marB="31750" anchor="ctr">
                     <a:lnL w="6350" cap="flat" cmpd="sng" algn="ctr">
                       <a:solidFill>
                         <a:srgbClr val="C6C9CD"/>
@@ -3064,12 +3820,12 @@
                       <a:tailEnd type="none" w="med" len="med"/>
                     </a:lnB>
                     <a:solidFill>
-                      <a:srgbClr val="000000"/>
+                      <a:srgbClr val="F5F7F8"/>
                     </a:solidFill>
                   </a:tcPr>
                 </a:tc>
               </a:tr>
-              <a:tr h="400050">
+              <a:tr h="431800">
                 <a:tc>
                   <a:txBody>
                     <a:bodyPr>
@@ -3081,7 +3837,7 @@
                         <a:buNone/>
                       </a:pPr>
                       <a:r>
-                        <a:rPr lang="en-US" sz="1000" b="1" dirty="0">
+                        <a:rPr lang="en-US" sz="1200" b="1" dirty="0">
                           <a:solidFill>
                             <a:srgbClr val="000000"/>
                           </a:solidFill>
@@ -3089,16 +3845,177 @@
                           <a:ea typeface="Arial" pitchFamily="34" charset="-122"/>
                           <a:cs typeface="Arial" pitchFamily="34" charset="-120"/>
                         </a:rPr>
-                        <a:t>Research synthesis</a:t>
+                        <a:t>Knowledge retrieval</a:t>
                       </a:r>
-                      <a:endParaRPr lang="en-US" sz="1000" dirty="0">
+                      <a:endParaRPr lang="en-US" sz="1200" dirty="0">
                         <a:latin typeface="Arial" charset="0"/>
                         <a:ea typeface="Arial" charset="0"/>
                         <a:cs typeface="Arial" charset="0"/>
                       </a:endParaRPr>
                     </a:p>
                   </a:txBody>
-                  <a:tcPr marL="101600" marR="101600" marT="38100" marB="38100" anchor="ctr">
+                  <a:tcPr marL="76200" marR="76200" marT="31750" marB="31750" anchor="ctr">
+                    <a:lnL w="6350" cap="flat" cmpd="sng" algn="ctr">
+                      <a:solidFill>
+                        <a:srgbClr val="C6C9CD"/>
+                      </a:solidFill>
+                      <a:prstDash val="solid"/>
+                      <a:round/>
+                      <a:headEnd type="none" w="med" len="med"/>
+                      <a:tailEnd type="none" w="med" len="med"/>
+                    </a:lnL>
+                    <a:lnR w="6350" cap="flat" cmpd="sng" algn="ctr">
+                      <a:solidFill>
+                        <a:srgbClr val="C6C9CD"/>
+                      </a:solidFill>
+                      <a:prstDash val="solid"/>
+                      <a:round/>
+                      <a:headEnd type="none" w="med" len="med"/>
+                      <a:tailEnd type="none" w="med" len="med"/>
+                    </a:lnR>
+                    <a:lnT w="6350" cap="flat" cmpd="sng" algn="ctr">
+                      <a:solidFill>
+                        <a:srgbClr val="C6C9CD"/>
+                      </a:solidFill>
+                      <a:prstDash val="solid"/>
+                      <a:round/>
+                      <a:headEnd type="none" w="med" len="med"/>
+                      <a:tailEnd type="none" w="med" len="med"/>
+                    </a:lnT>
+                    <a:lnB w="6350" cap="flat" cmpd="sng" algn="ctr">
+                      <a:solidFill>
+                        <a:srgbClr val="C6C9CD"/>
+                      </a:solidFill>
+                      <a:prstDash val="solid"/>
+                      <a:round/>
+                      <a:headEnd type="none" w="med" len="med"/>
+                      <a:tailEnd type="none" w="med" len="med"/>
+                    </a:lnB>
+                    <a:solidFill>
+                      <a:srgbClr val="FFFFFF"/>
+                    </a:solidFill>
+                  </a:tcPr>
+                </a:tc>
+                <a:tc>
+                  <a:txBody>
+                    <a:bodyPr>
+                      <a:noAutofit/>
+                    </a:bodyPr>
+                    <a:lstStyle/>
+                    <a:p>
+                      <a:pPr algn="l" indent="0" marL="0">
+                        <a:buNone/>
+                      </a:pPr>
+                      <a:r>
+                        <a:rPr lang="en-US" sz="1200" dirty="0">
+                          <a:solidFill>
+                            <a:srgbClr val="000000"/>
+                          </a:solidFill>
+                          <a:latin typeface="Arial" pitchFamily="34" charset="0"/>
+                          <a:ea typeface="Arial" pitchFamily="34" charset="-122"/>
+                          <a:cs typeface="Arial" pitchFamily="34" charset="-120"/>
+                        </a:rPr>
+                        <a:t>Permissions need</a:t>
+                      </a:r>
+                      <a:endParaRPr lang="en-US" sz="1200" dirty="0">
+                        <a:latin typeface="Arial" charset="0"/>
+                        <a:ea typeface="Arial" charset="0"/>
+                        <a:cs typeface="Arial" charset="0"/>
+                      </a:endParaRPr>
+                    </a:p>
+                    <a:p>
+                      <a:pPr algn="l" indent="0" marL="0">
+                        <a:buNone/>
+                      </a:pPr>
+                      <a:r>
+                        <a:rPr lang="en-US" sz="1200" dirty="0">
+                          <a:solidFill>
+                            <a:srgbClr val="000000"/>
+                          </a:solidFill>
+                          <a:latin typeface="Arial" pitchFamily="34" charset="0"/>
+                          <a:ea typeface="Arial" pitchFamily="34" charset="-122"/>
+                          <a:cs typeface="Arial" pitchFamily="34" charset="-120"/>
+                        </a:rPr>
+                        <a:t>cleanup</a:t>
+                      </a:r>
+                      <a:endParaRPr lang="en-US" sz="1200" dirty="0">
+                        <a:latin typeface="Arial" charset="0"/>
+                        <a:ea typeface="Arial" charset="0"/>
+                        <a:cs typeface="Arial" charset="0"/>
+                      </a:endParaRPr>
+                    </a:p>
+                  </a:txBody>
+                  <a:tcPr marL="76200" marR="76200" marT="31750" marB="31750" anchor="ctr">
+                    <a:lnL w="6350" cap="flat" cmpd="sng" algn="ctr">
+                      <a:solidFill>
+                        <a:srgbClr val="C6C9CD"/>
+                      </a:solidFill>
+                      <a:prstDash val="solid"/>
+                      <a:round/>
+                      <a:headEnd type="none" w="med" len="med"/>
+                      <a:tailEnd type="none" w="med" len="med"/>
+                    </a:lnL>
+                    <a:lnR w="6350" cap="flat" cmpd="sng" algn="ctr">
+                      <a:solidFill>
+                        <a:srgbClr val="C6C9CD"/>
+                      </a:solidFill>
+                      <a:prstDash val="solid"/>
+                      <a:round/>
+                      <a:headEnd type="none" w="med" len="med"/>
+                      <a:tailEnd type="none" w="med" len="med"/>
+                    </a:lnR>
+                    <a:lnT w="6350" cap="flat" cmpd="sng" algn="ctr">
+                      <a:solidFill>
+                        <a:srgbClr val="C6C9CD"/>
+                      </a:solidFill>
+                      <a:prstDash val="solid"/>
+                      <a:round/>
+                      <a:headEnd type="none" w="med" len="med"/>
+                      <a:tailEnd type="none" w="med" len="med"/>
+                    </a:lnT>
+                    <a:lnB w="6350" cap="flat" cmpd="sng" algn="ctr">
+                      <a:solidFill>
+                        <a:srgbClr val="C6C9CD"/>
+                      </a:solidFill>
+                      <a:prstDash val="solid"/>
+                      <a:round/>
+                      <a:headEnd type="none" w="med" len="med"/>
+                      <a:tailEnd type="none" w="med" len="med"/>
+                    </a:lnB>
+                    <a:solidFill>
+                      <a:srgbClr val="FFFFFF"/>
+                    </a:solidFill>
+                  </a:tcPr>
+                </a:tc>
+                <a:tc>
+                  <a:txBody>
+                    <a:bodyPr>
+                      <a:noAutofit/>
+                    </a:bodyPr>
+                    <a:lstStyle/>
+                    <a:p>
+                      <a:pPr algn="l" indent="0" marL="0">
+                        <a:buNone/>
+                      </a:pPr>
+                      <a:r>
+                        <a:rPr lang="en-US" sz="1200" dirty="0">
+                          <a:solidFill>
+                            <a:srgbClr val="000000"/>
+                          </a:solidFill>
+                          <a:latin typeface="Arial" pitchFamily="34" charset="0"/>
+                          <a:ea typeface="Arial" pitchFamily="34" charset="-122"/>
+                          <a:cs typeface="Arial" pitchFamily="34" charset="-120"/>
+                        </a:rPr>
+                        <a:t>Knowledge lead</a:t>
+                      </a:r>
+                      <a:endParaRPr lang="en-US" sz="1200" dirty="0">
+                        <a:latin typeface="Arial" charset="0"/>
+                        <a:ea typeface="Arial" charset="0"/>
+                        <a:cs typeface="Arial" charset="0"/>
+                      </a:endParaRPr>
+                    </a:p>
+                  </a:txBody>
+                  <a:tcPr marL="76200" marR="76200" marT="31750" marB="31750" anchor="ctr">
                     <a:lnL w="6350" cap="flat" cmpd="sng" algn="ctr">
                       <a:solidFill>
                         <a:srgbClr val="C6C9CD"/>
@@ -3151,774 +4068,7 @@
                         <a:buNone/>
                       </a:pPr>
                       <a:r>
-                        <a:rPr lang="en-US" sz="1000" dirty="0">
-                          <a:solidFill>
-                            <a:srgbClr val="000000"/>
-                          </a:solidFill>
-                          <a:latin typeface="Arial" pitchFamily="34" charset="0"/>
-                          <a:ea typeface="Arial" pitchFamily="34" charset="-122"/>
-                          <a:cs typeface="Arial" pitchFamily="34" charset="-120"/>
-                        </a:rPr>
-                        <a:t>Approved corpus</a:t>
-                      </a:r>
-                      <a:endParaRPr lang="en-US" sz="1000" dirty="0">
-                        <a:latin typeface="Arial" charset="0"/>
-                        <a:ea typeface="Arial" charset="0"/>
-                        <a:cs typeface="Arial" charset="0"/>
-                      </a:endParaRPr>
-                    </a:p>
-                    <a:p>
-                      <a:pPr algn="ctr" indent="0" marL="0">
-                        <a:buNone/>
-                      </a:pPr>
-                      <a:r>
-                        <a:rPr lang="en-US" sz="1000" dirty="0">
-                          <a:solidFill>
-                            <a:srgbClr val="000000"/>
-                          </a:solidFill>
-                          <a:latin typeface="Arial" pitchFamily="34" charset="0"/>
-                          <a:ea typeface="Arial" pitchFamily="34" charset="-122"/>
-                          <a:cs typeface="Arial" pitchFamily="34" charset="-120"/>
-                        </a:rPr>
-                        <a:t>Explicit review</a:t>
-                      </a:r>
-                      <a:endParaRPr lang="en-US" sz="1000" dirty="0">
-                        <a:latin typeface="Arial" charset="0"/>
-                        <a:ea typeface="Arial" charset="0"/>
-                        <a:cs typeface="Arial" charset="0"/>
-                      </a:endParaRPr>
-                    </a:p>
-                  </a:txBody>
-                  <a:tcPr marL="101600" marR="101600" marT="38100" marB="38100" anchor="ctr">
-                    <a:lnL w="6350" cap="flat" cmpd="sng" algn="ctr">
-                      <a:solidFill>
-                        <a:srgbClr val="C6C9CD"/>
-                      </a:solidFill>
-                      <a:prstDash val="solid"/>
-                      <a:round/>
-                      <a:headEnd type="none" w="med" len="med"/>
-                      <a:tailEnd type="none" w="med" len="med"/>
-                    </a:lnL>
-                    <a:lnR w="6350" cap="flat" cmpd="sng" algn="ctr">
-                      <a:solidFill>
-                        <a:srgbClr val="C6C9CD"/>
-                      </a:solidFill>
-                      <a:prstDash val="solid"/>
-                      <a:round/>
-                      <a:headEnd type="none" w="med" len="med"/>
-                      <a:tailEnd type="none" w="med" len="med"/>
-                    </a:lnR>
-                    <a:lnT w="6350" cap="flat" cmpd="sng" algn="ctr">
-                      <a:solidFill>
-                        <a:srgbClr val="C6C9CD"/>
-                      </a:solidFill>
-                      <a:prstDash val="solid"/>
-                      <a:round/>
-                      <a:headEnd type="none" w="med" len="med"/>
-                      <a:tailEnd type="none" w="med" len="med"/>
-                    </a:lnT>
-                    <a:lnB w="6350" cap="flat" cmpd="sng" algn="ctr">
-                      <a:solidFill>
-                        <a:srgbClr val="C6C9CD"/>
-                      </a:solidFill>
-                      <a:prstDash val="solid"/>
-                      <a:round/>
-                      <a:headEnd type="none" w="med" len="med"/>
-                      <a:tailEnd type="none" w="med" len="med"/>
-                    </a:lnB>
-                    <a:solidFill>
-                      <a:srgbClr val="FFFFFF"/>
-                    </a:solidFill>
-                  </a:tcPr>
-                </a:tc>
-                <a:tc>
-                  <a:txBody>
-                    <a:bodyPr>
-                      <a:noAutofit/>
-                    </a:bodyPr>
-                    <a:lstStyle/>
-                    <a:p>
-                      <a:pPr algn="ctr" indent="0" marL="0">
-                        <a:buNone/>
-                      </a:pPr>
-                      <a:r>
-                        <a:rPr lang="en-US" sz="1000" dirty="0">
-                          <a:solidFill>
-                            <a:srgbClr val="000000"/>
-                          </a:solidFill>
-                          <a:latin typeface="Arial" pitchFamily="34" charset="0"/>
-                          <a:ea typeface="Arial" pitchFamily="34" charset="-122"/>
-                          <a:cs typeface="Arial" pitchFamily="34" charset="-120"/>
-                        </a:rPr>
-                        <a:t>Practice lead</a:t>
-                      </a:r>
-                      <a:endParaRPr lang="en-US" sz="1000" dirty="0">
-                        <a:latin typeface="Arial" charset="0"/>
-                        <a:ea typeface="Arial" charset="0"/>
-                        <a:cs typeface="Arial" charset="0"/>
-                      </a:endParaRPr>
-                    </a:p>
-                  </a:txBody>
-                  <a:tcPr marL="101600" marR="101600" marT="38100" marB="38100" anchor="ctr">
-                    <a:lnL w="6350" cap="flat" cmpd="sng" algn="ctr">
-                      <a:solidFill>
-                        <a:srgbClr val="C6C9CD"/>
-                      </a:solidFill>
-                      <a:prstDash val="solid"/>
-                      <a:round/>
-                      <a:headEnd type="none" w="med" len="med"/>
-                      <a:tailEnd type="none" w="med" len="med"/>
-                    </a:lnL>
-                    <a:lnR w="6350" cap="flat" cmpd="sng" algn="ctr">
-                      <a:solidFill>
-                        <a:srgbClr val="C6C9CD"/>
-                      </a:solidFill>
-                      <a:prstDash val="solid"/>
-                      <a:round/>
-                      <a:headEnd type="none" w="med" len="med"/>
-                      <a:tailEnd type="none" w="med" len="med"/>
-                    </a:lnR>
-                    <a:lnT w="6350" cap="flat" cmpd="sng" algn="ctr">
-                      <a:solidFill>
-                        <a:srgbClr val="C6C9CD"/>
-                      </a:solidFill>
-                      <a:prstDash val="solid"/>
-                      <a:round/>
-                      <a:headEnd type="none" w="med" len="med"/>
-                      <a:tailEnd type="none" w="med" len="med"/>
-                    </a:lnT>
-                    <a:lnB w="6350" cap="flat" cmpd="sng" algn="ctr">
-                      <a:solidFill>
-                        <a:srgbClr val="C6C9CD"/>
-                      </a:solidFill>
-                      <a:prstDash val="solid"/>
-                      <a:round/>
-                      <a:headEnd type="none" w="med" len="med"/>
-                      <a:tailEnd type="none" w="med" len="med"/>
-                    </a:lnB>
-                    <a:solidFill>
-                      <a:srgbClr val="FFFFFF"/>
-                    </a:solidFill>
-                  </a:tcPr>
-                </a:tc>
-                <a:tc>
-                  <a:txBody>
-                    <a:bodyPr>
-                      <a:noAutofit/>
-                    </a:bodyPr>
-                    <a:lstStyle/>
-                    <a:p>
-                      <a:pPr algn="ctr" indent="0" marL="0">
-                        <a:buNone/>
-                      </a:pPr>
-                      <a:r>
-                        <a:rPr lang="en-US" sz="1000" b="1" dirty="0">
-                          <a:solidFill>
-                            <a:srgbClr val="FD5108"/>
-                          </a:solidFill>
-                          <a:latin typeface="Arial" pitchFamily="34" charset="0"/>
-                          <a:ea typeface="Arial" pitchFamily="34" charset="-122"/>
-                          <a:cs typeface="Arial" pitchFamily="34" charset="-120"/>
-                        </a:rPr>
-                        <a:t>START</a:t>
-                      </a:r>
-                      <a:endParaRPr lang="en-US" sz="1000" dirty="0">
-                        <a:latin typeface="Arial" charset="0"/>
-                        <a:ea typeface="Arial" charset="0"/>
-                        <a:cs typeface="Arial" charset="0"/>
-                      </a:endParaRPr>
-                    </a:p>
-                  </a:txBody>
-                  <a:tcPr marL="101600" marR="101600" marT="38100" marB="38100" anchor="ctr">
-                    <a:lnL w="6350" cap="flat" cmpd="sng" algn="ctr">
-                      <a:solidFill>
-                        <a:srgbClr val="C6C9CD"/>
-                      </a:solidFill>
-                      <a:prstDash val="solid"/>
-                      <a:round/>
-                      <a:headEnd type="none" w="med" len="med"/>
-                      <a:tailEnd type="none" w="med" len="med"/>
-                    </a:lnL>
-                    <a:lnR w="6350" cap="flat" cmpd="sng" algn="ctr">
-                      <a:solidFill>
-                        <a:srgbClr val="C6C9CD"/>
-                      </a:solidFill>
-                      <a:prstDash val="solid"/>
-                      <a:round/>
-                      <a:headEnd type="none" w="med" len="med"/>
-                      <a:tailEnd type="none" w="med" len="med"/>
-                    </a:lnR>
-                    <a:lnT w="6350" cap="flat" cmpd="sng" algn="ctr">
-                      <a:solidFill>
-                        <a:srgbClr val="C6C9CD"/>
-                      </a:solidFill>
-                      <a:prstDash val="solid"/>
-                      <a:round/>
-                      <a:headEnd type="none" w="med" len="med"/>
-                      <a:tailEnd type="none" w="med" len="med"/>
-                    </a:lnT>
-                    <a:lnB w="6350" cap="flat" cmpd="sng" algn="ctr">
-                      <a:solidFill>
-                        <a:srgbClr val="C6C9CD"/>
-                      </a:solidFill>
-                      <a:prstDash val="solid"/>
-                      <a:round/>
-                      <a:headEnd type="none" w="med" len="med"/>
-                      <a:tailEnd type="none" w="med" len="med"/>
-                    </a:lnB>
-                    <a:solidFill>
-                      <a:srgbClr val="FFFFFF"/>
-                    </a:solidFill>
-                  </a:tcPr>
-                </a:tc>
-              </a:tr>
-              <a:tr h="400050">
-                <a:tc>
-                  <a:txBody>
-                    <a:bodyPr>
-                      <a:noAutofit/>
-                    </a:bodyPr>
-                    <a:lstStyle/>
-                    <a:p>
-                      <a:pPr algn="l" indent="0" marL="0">
-                        <a:buNone/>
-                      </a:pPr>
-                      <a:r>
-                        <a:rPr lang="en-US" sz="1000" b="1" dirty="0">
-                          <a:solidFill>
-                            <a:srgbClr val="000000"/>
-                          </a:solidFill>
-                          <a:latin typeface="Arial" pitchFamily="34" charset="0"/>
-                          <a:ea typeface="Arial" pitchFamily="34" charset="-122"/>
-                          <a:cs typeface="Arial" pitchFamily="34" charset="-120"/>
-                        </a:rPr>
-                        <a:t>Proposal drafting</a:t>
-                      </a:r>
-                      <a:endParaRPr lang="en-US" sz="1000" dirty="0">
-                        <a:latin typeface="Arial" charset="0"/>
-                        <a:ea typeface="Arial" charset="0"/>
-                        <a:cs typeface="Arial" charset="0"/>
-                      </a:endParaRPr>
-                    </a:p>
-                  </a:txBody>
-                  <a:tcPr marL="101600" marR="101600" marT="38100" marB="38100" anchor="ctr">
-                    <a:lnL w="6350" cap="flat" cmpd="sng" algn="ctr">
-                      <a:solidFill>
-                        <a:srgbClr val="C6C9CD"/>
-                      </a:solidFill>
-                      <a:prstDash val="solid"/>
-                      <a:round/>
-                      <a:headEnd type="none" w="med" len="med"/>
-                      <a:tailEnd type="none" w="med" len="med"/>
-                    </a:lnL>
-                    <a:lnR w="6350" cap="flat" cmpd="sng" algn="ctr">
-                      <a:solidFill>
-                        <a:srgbClr val="C6C9CD"/>
-                      </a:solidFill>
-                      <a:prstDash val="solid"/>
-                      <a:round/>
-                      <a:headEnd type="none" w="med" len="med"/>
-                      <a:tailEnd type="none" w="med" len="med"/>
-                    </a:lnR>
-                    <a:lnT w="6350" cap="flat" cmpd="sng" algn="ctr">
-                      <a:solidFill>
-                        <a:srgbClr val="C6C9CD"/>
-                      </a:solidFill>
-                      <a:prstDash val="solid"/>
-                      <a:round/>
-                      <a:headEnd type="none" w="med" len="med"/>
-                      <a:tailEnd type="none" w="med" len="med"/>
-                    </a:lnT>
-                    <a:lnB w="6350" cap="flat" cmpd="sng" algn="ctr">
-                      <a:solidFill>
-                        <a:srgbClr val="C6C9CD"/>
-                      </a:solidFill>
-                      <a:prstDash val="solid"/>
-                      <a:round/>
-                      <a:headEnd type="none" w="med" len="med"/>
-                      <a:tailEnd type="none" w="med" len="med"/>
-                    </a:lnB>
-                    <a:solidFill>
-                      <a:srgbClr val="F5F7F8"/>
-                    </a:solidFill>
-                  </a:tcPr>
-                </a:tc>
-                <a:tc>
-                  <a:txBody>
-                    <a:bodyPr>
-                      <a:noAutofit/>
-                    </a:bodyPr>
-                    <a:lstStyle/>
-                    <a:p>
-                      <a:pPr algn="ctr" indent="0" marL="0">
-                        <a:buNone/>
-                      </a:pPr>
-                      <a:r>
-                        <a:rPr lang="en-US" sz="1000" dirty="0">
-                          <a:solidFill>
-                            <a:srgbClr val="000000"/>
-                          </a:solidFill>
-                          <a:latin typeface="Arial" pitchFamily="34" charset="0"/>
-                          <a:ea typeface="Arial" pitchFamily="34" charset="-122"/>
-                          <a:cs typeface="Arial" pitchFamily="34" charset="-120"/>
-                        </a:rPr>
-                        <a:t>Claims and commitments</a:t>
-                      </a:r>
-                      <a:endParaRPr lang="en-US" sz="1000" dirty="0">
-                        <a:latin typeface="Arial" charset="0"/>
-                        <a:ea typeface="Arial" charset="0"/>
-                        <a:cs typeface="Arial" charset="0"/>
-                      </a:endParaRPr>
-                    </a:p>
-                    <a:p>
-                      <a:pPr algn="ctr" indent="0" marL="0">
-                        <a:buNone/>
-                      </a:pPr>
-                      <a:r>
-                        <a:rPr lang="en-US" sz="1000" dirty="0">
-                          <a:solidFill>
-                            <a:srgbClr val="000000"/>
-                          </a:solidFill>
-                          <a:latin typeface="Arial" pitchFamily="34" charset="0"/>
-                          <a:ea typeface="Arial" pitchFamily="34" charset="-122"/>
-                          <a:cs typeface="Arial" pitchFamily="34" charset="-120"/>
-                        </a:rPr>
-                        <a:t>need controls</a:t>
-                      </a:r>
-                      <a:endParaRPr lang="en-US" sz="1000" dirty="0">
-                        <a:latin typeface="Arial" charset="0"/>
-                        <a:ea typeface="Arial" charset="0"/>
-                        <a:cs typeface="Arial" charset="0"/>
-                      </a:endParaRPr>
-                    </a:p>
-                  </a:txBody>
-                  <a:tcPr marL="101600" marR="101600" marT="38100" marB="38100" anchor="ctr">
-                    <a:lnL w="6350" cap="flat" cmpd="sng" algn="ctr">
-                      <a:solidFill>
-                        <a:srgbClr val="C6C9CD"/>
-                      </a:solidFill>
-                      <a:prstDash val="solid"/>
-                      <a:round/>
-                      <a:headEnd type="none" w="med" len="med"/>
-                      <a:tailEnd type="none" w="med" len="med"/>
-                    </a:lnL>
-                    <a:lnR w="6350" cap="flat" cmpd="sng" algn="ctr">
-                      <a:solidFill>
-                        <a:srgbClr val="C6C9CD"/>
-                      </a:solidFill>
-                      <a:prstDash val="solid"/>
-                      <a:round/>
-                      <a:headEnd type="none" w="med" len="med"/>
-                      <a:tailEnd type="none" w="med" len="med"/>
-                    </a:lnR>
-                    <a:lnT w="6350" cap="flat" cmpd="sng" algn="ctr">
-                      <a:solidFill>
-                        <a:srgbClr val="C6C9CD"/>
-                      </a:solidFill>
-                      <a:prstDash val="solid"/>
-                      <a:round/>
-                      <a:headEnd type="none" w="med" len="med"/>
-                      <a:tailEnd type="none" w="med" len="med"/>
-                    </a:lnT>
-                    <a:lnB w="6350" cap="flat" cmpd="sng" algn="ctr">
-                      <a:solidFill>
-                        <a:srgbClr val="C6C9CD"/>
-                      </a:solidFill>
-                      <a:prstDash val="solid"/>
-                      <a:round/>
-                      <a:headEnd type="none" w="med" len="med"/>
-                      <a:tailEnd type="none" w="med" len="med"/>
-                    </a:lnB>
-                    <a:solidFill>
-                      <a:srgbClr val="F5F7F8"/>
-                    </a:solidFill>
-                  </a:tcPr>
-                </a:tc>
-                <a:tc>
-                  <a:txBody>
-                    <a:bodyPr>
-                      <a:noAutofit/>
-                    </a:bodyPr>
-                    <a:lstStyle/>
-                    <a:p>
-                      <a:pPr algn="ctr" indent="0" marL="0">
-                        <a:buNone/>
-                      </a:pPr>
-                      <a:r>
-                        <a:rPr lang="en-US" sz="1000" dirty="0">
-                          <a:solidFill>
-                            <a:srgbClr val="000000"/>
-                          </a:solidFill>
-                          <a:latin typeface="Arial" pitchFamily="34" charset="0"/>
-                          <a:ea typeface="Arial" pitchFamily="34" charset="-122"/>
-                          <a:cs typeface="Arial" pitchFamily="34" charset="-120"/>
-                        </a:rPr>
-                        <a:t>BD lead</a:t>
-                      </a:r>
-                      <a:endParaRPr lang="en-US" sz="1000" dirty="0">
-                        <a:latin typeface="Arial" charset="0"/>
-                        <a:ea typeface="Arial" charset="0"/>
-                        <a:cs typeface="Arial" charset="0"/>
-                      </a:endParaRPr>
-                    </a:p>
-                  </a:txBody>
-                  <a:tcPr marL="101600" marR="101600" marT="38100" marB="38100" anchor="ctr">
-                    <a:lnL w="6350" cap="flat" cmpd="sng" algn="ctr">
-                      <a:solidFill>
-                        <a:srgbClr val="C6C9CD"/>
-                      </a:solidFill>
-                      <a:prstDash val="solid"/>
-                      <a:round/>
-                      <a:headEnd type="none" w="med" len="med"/>
-                      <a:tailEnd type="none" w="med" len="med"/>
-                    </a:lnL>
-                    <a:lnR w="6350" cap="flat" cmpd="sng" algn="ctr">
-                      <a:solidFill>
-                        <a:srgbClr val="C6C9CD"/>
-                      </a:solidFill>
-                      <a:prstDash val="solid"/>
-                      <a:round/>
-                      <a:headEnd type="none" w="med" len="med"/>
-                      <a:tailEnd type="none" w="med" len="med"/>
-                    </a:lnR>
-                    <a:lnT w="6350" cap="flat" cmpd="sng" algn="ctr">
-                      <a:solidFill>
-                        <a:srgbClr val="C6C9CD"/>
-                      </a:solidFill>
-                      <a:prstDash val="solid"/>
-                      <a:round/>
-                      <a:headEnd type="none" w="med" len="med"/>
-                      <a:tailEnd type="none" w="med" len="med"/>
-                    </a:lnT>
-                    <a:lnB w="6350" cap="flat" cmpd="sng" algn="ctr">
-                      <a:solidFill>
-                        <a:srgbClr val="C6C9CD"/>
-                      </a:solidFill>
-                      <a:prstDash val="solid"/>
-                      <a:round/>
-                      <a:headEnd type="none" w="med" len="med"/>
-                      <a:tailEnd type="none" w="med" len="med"/>
-                    </a:lnB>
-                    <a:solidFill>
-                      <a:srgbClr val="F5F7F8"/>
-                    </a:solidFill>
-                  </a:tcPr>
-                </a:tc>
-                <a:tc>
-                  <a:txBody>
-                    <a:bodyPr>
-                      <a:noAutofit/>
-                    </a:bodyPr>
-                    <a:lstStyle/>
-                    <a:p>
-                      <a:pPr algn="ctr" indent="0" marL="0">
-                        <a:buNone/>
-                      </a:pPr>
-                      <a:r>
-                        <a:rPr lang="en-US" sz="1000" b="1" dirty="0">
-                          <a:solidFill>
-                            <a:srgbClr val="FD5108"/>
-                          </a:solidFill>
-                          <a:latin typeface="Arial" pitchFamily="34" charset="0"/>
-                          <a:ea typeface="Arial" pitchFamily="34" charset="-122"/>
-                          <a:cs typeface="Arial" pitchFamily="34" charset="-120"/>
-                        </a:rPr>
-                        <a:t>NEXT</a:t>
-                      </a:r>
-                      <a:endParaRPr lang="en-US" sz="1000" dirty="0">
-                        <a:latin typeface="Arial" charset="0"/>
-                        <a:ea typeface="Arial" charset="0"/>
-                        <a:cs typeface="Arial" charset="0"/>
-                      </a:endParaRPr>
-                    </a:p>
-                  </a:txBody>
-                  <a:tcPr marL="101600" marR="101600" marT="38100" marB="38100" anchor="ctr">
-                    <a:lnL w="6350" cap="flat" cmpd="sng" algn="ctr">
-                      <a:solidFill>
-                        <a:srgbClr val="C6C9CD"/>
-                      </a:solidFill>
-                      <a:prstDash val="solid"/>
-                      <a:round/>
-                      <a:headEnd type="none" w="med" len="med"/>
-                      <a:tailEnd type="none" w="med" len="med"/>
-                    </a:lnL>
-                    <a:lnR w="6350" cap="flat" cmpd="sng" algn="ctr">
-                      <a:solidFill>
-                        <a:srgbClr val="C6C9CD"/>
-                      </a:solidFill>
-                      <a:prstDash val="solid"/>
-                      <a:round/>
-                      <a:headEnd type="none" w="med" len="med"/>
-                      <a:tailEnd type="none" w="med" len="med"/>
-                    </a:lnR>
-                    <a:lnT w="6350" cap="flat" cmpd="sng" algn="ctr">
-                      <a:solidFill>
-                        <a:srgbClr val="C6C9CD"/>
-                      </a:solidFill>
-                      <a:prstDash val="solid"/>
-                      <a:round/>
-                      <a:headEnd type="none" w="med" len="med"/>
-                      <a:tailEnd type="none" w="med" len="med"/>
-                    </a:lnT>
-                    <a:lnB w="6350" cap="flat" cmpd="sng" algn="ctr">
-                      <a:solidFill>
-                        <a:srgbClr val="C6C9CD"/>
-                      </a:solidFill>
-                      <a:prstDash val="solid"/>
-                      <a:round/>
-                      <a:headEnd type="none" w="med" len="med"/>
-                      <a:tailEnd type="none" w="med" len="med"/>
-                    </a:lnB>
-                    <a:solidFill>
-                      <a:srgbClr val="F5F7F8"/>
-                    </a:solidFill>
-                  </a:tcPr>
-                </a:tc>
-              </a:tr>
-              <a:tr h="406400">
-                <a:tc>
-                  <a:txBody>
-                    <a:bodyPr>
-                      <a:noAutofit/>
-                    </a:bodyPr>
-                    <a:lstStyle/>
-                    <a:p>
-                      <a:pPr algn="l" indent="0" marL="0">
-                        <a:buNone/>
-                      </a:pPr>
-                      <a:r>
-                        <a:rPr lang="en-US" sz="1000" b="1" dirty="0">
-                          <a:solidFill>
-                            <a:srgbClr val="000000"/>
-                          </a:solidFill>
-                          <a:latin typeface="Arial" pitchFamily="34" charset="0"/>
-                          <a:ea typeface="Arial" pitchFamily="34" charset="-122"/>
-                          <a:cs typeface="Arial" pitchFamily="34" charset="-120"/>
-                        </a:rPr>
-                        <a:t>Knowledge retrieval</a:t>
-                      </a:r>
-                      <a:endParaRPr lang="en-US" sz="1000" dirty="0">
-                        <a:latin typeface="Arial" charset="0"/>
-                        <a:ea typeface="Arial" charset="0"/>
-                        <a:cs typeface="Arial" charset="0"/>
-                      </a:endParaRPr>
-                    </a:p>
-                  </a:txBody>
-                  <a:tcPr marL="101600" marR="101600" marT="38100" marB="38100" anchor="ctr">
-                    <a:lnL w="6350" cap="flat" cmpd="sng" algn="ctr">
-                      <a:solidFill>
-                        <a:srgbClr val="C6C9CD"/>
-                      </a:solidFill>
-                      <a:prstDash val="solid"/>
-                      <a:round/>
-                      <a:headEnd type="none" w="med" len="med"/>
-                      <a:tailEnd type="none" w="med" len="med"/>
-                    </a:lnL>
-                    <a:lnR w="6350" cap="flat" cmpd="sng" algn="ctr">
-                      <a:solidFill>
-                        <a:srgbClr val="C6C9CD"/>
-                      </a:solidFill>
-                      <a:prstDash val="solid"/>
-                      <a:round/>
-                      <a:headEnd type="none" w="med" len="med"/>
-                      <a:tailEnd type="none" w="med" len="med"/>
-                    </a:lnR>
-                    <a:lnT w="6350" cap="flat" cmpd="sng" algn="ctr">
-                      <a:solidFill>
-                        <a:srgbClr val="C6C9CD"/>
-                      </a:solidFill>
-                      <a:prstDash val="solid"/>
-                      <a:round/>
-                      <a:headEnd type="none" w="med" len="med"/>
-                      <a:tailEnd type="none" w="med" len="med"/>
-                    </a:lnT>
-                    <a:lnB w="6350" cap="flat" cmpd="sng" algn="ctr">
-                      <a:solidFill>
-                        <a:srgbClr val="C6C9CD"/>
-                      </a:solidFill>
-                      <a:prstDash val="solid"/>
-                      <a:round/>
-                      <a:headEnd type="none" w="med" len="med"/>
-                      <a:tailEnd type="none" w="med" len="med"/>
-                    </a:lnB>
-                    <a:solidFill>
-                      <a:srgbClr val="FFFFFF"/>
-                    </a:solidFill>
-                  </a:tcPr>
-                </a:tc>
-                <a:tc>
-                  <a:txBody>
-                    <a:bodyPr>
-                      <a:noAutofit/>
-                    </a:bodyPr>
-                    <a:lstStyle/>
-                    <a:p>
-                      <a:pPr algn="ctr" indent="0" marL="0">
-                        <a:buNone/>
-                      </a:pPr>
-                      <a:r>
-                        <a:rPr lang="en-US" sz="1000" dirty="0">
-                          <a:solidFill>
-                            <a:srgbClr val="000000"/>
-                          </a:solidFill>
-                          <a:latin typeface="Arial" pitchFamily="34" charset="0"/>
-                          <a:ea typeface="Arial" pitchFamily="34" charset="-122"/>
-                          <a:cs typeface="Arial" pitchFamily="34" charset="-120"/>
-                        </a:rPr>
-                        <a:t>Permissions need</a:t>
-                      </a:r>
-                      <a:endParaRPr lang="en-US" sz="1000" dirty="0">
-                        <a:latin typeface="Arial" charset="0"/>
-                        <a:ea typeface="Arial" charset="0"/>
-                        <a:cs typeface="Arial" charset="0"/>
-                      </a:endParaRPr>
-                    </a:p>
-                    <a:p>
-                      <a:pPr algn="ctr" indent="0" marL="0">
-                        <a:buNone/>
-                      </a:pPr>
-                      <a:r>
-                        <a:rPr lang="en-US" sz="1000" dirty="0">
-                          <a:solidFill>
-                            <a:srgbClr val="000000"/>
-                          </a:solidFill>
-                          <a:latin typeface="Arial" pitchFamily="34" charset="0"/>
-                          <a:ea typeface="Arial" pitchFamily="34" charset="-122"/>
-                          <a:cs typeface="Arial" pitchFamily="34" charset="-120"/>
-                        </a:rPr>
-                        <a:t>cleanup</a:t>
-                      </a:r>
-                      <a:endParaRPr lang="en-US" sz="1000" dirty="0">
-                        <a:latin typeface="Arial" charset="0"/>
-                        <a:ea typeface="Arial" charset="0"/>
-                        <a:cs typeface="Arial" charset="0"/>
-                      </a:endParaRPr>
-                    </a:p>
-                  </a:txBody>
-                  <a:tcPr marL="101600" marR="101600" marT="38100" marB="38100" anchor="ctr">
-                    <a:lnL w="6350" cap="flat" cmpd="sng" algn="ctr">
-                      <a:solidFill>
-                        <a:srgbClr val="C6C9CD"/>
-                      </a:solidFill>
-                      <a:prstDash val="solid"/>
-                      <a:round/>
-                      <a:headEnd type="none" w="med" len="med"/>
-                      <a:tailEnd type="none" w="med" len="med"/>
-                    </a:lnL>
-                    <a:lnR w="6350" cap="flat" cmpd="sng" algn="ctr">
-                      <a:solidFill>
-                        <a:srgbClr val="C6C9CD"/>
-                      </a:solidFill>
-                      <a:prstDash val="solid"/>
-                      <a:round/>
-                      <a:headEnd type="none" w="med" len="med"/>
-                      <a:tailEnd type="none" w="med" len="med"/>
-                    </a:lnR>
-                    <a:lnT w="6350" cap="flat" cmpd="sng" algn="ctr">
-                      <a:solidFill>
-                        <a:srgbClr val="C6C9CD"/>
-                      </a:solidFill>
-                      <a:prstDash val="solid"/>
-                      <a:round/>
-                      <a:headEnd type="none" w="med" len="med"/>
-                      <a:tailEnd type="none" w="med" len="med"/>
-                    </a:lnT>
-                    <a:lnB w="6350" cap="flat" cmpd="sng" algn="ctr">
-                      <a:solidFill>
-                        <a:srgbClr val="C6C9CD"/>
-                      </a:solidFill>
-                      <a:prstDash val="solid"/>
-                      <a:round/>
-                      <a:headEnd type="none" w="med" len="med"/>
-                      <a:tailEnd type="none" w="med" len="med"/>
-                    </a:lnB>
-                    <a:solidFill>
-                      <a:srgbClr val="FFFFFF"/>
-                    </a:solidFill>
-                  </a:tcPr>
-                </a:tc>
-                <a:tc>
-                  <a:txBody>
-                    <a:bodyPr>
-                      <a:noAutofit/>
-                    </a:bodyPr>
-                    <a:lstStyle/>
-                    <a:p>
-                      <a:pPr algn="ctr" indent="0" marL="0">
-                        <a:buNone/>
-                      </a:pPr>
-                      <a:r>
-                        <a:rPr lang="en-US" sz="1000" dirty="0">
-                          <a:solidFill>
-                            <a:srgbClr val="000000"/>
-                          </a:solidFill>
-                          <a:latin typeface="Arial" pitchFamily="34" charset="0"/>
-                          <a:ea typeface="Arial" pitchFamily="34" charset="-122"/>
-                          <a:cs typeface="Arial" pitchFamily="34" charset="-120"/>
-                        </a:rPr>
-                        <a:t>Knowledge lead</a:t>
-                      </a:r>
-                      <a:endParaRPr lang="en-US" sz="1000" dirty="0">
-                        <a:latin typeface="Arial" charset="0"/>
-                        <a:ea typeface="Arial" charset="0"/>
-                        <a:cs typeface="Arial" charset="0"/>
-                      </a:endParaRPr>
-                    </a:p>
-                  </a:txBody>
-                  <a:tcPr marL="101600" marR="101600" marT="38100" marB="38100" anchor="ctr">
-                    <a:lnL w="6350" cap="flat" cmpd="sng" algn="ctr">
-                      <a:solidFill>
-                        <a:srgbClr val="C6C9CD"/>
-                      </a:solidFill>
-                      <a:prstDash val="solid"/>
-                      <a:round/>
-                      <a:headEnd type="none" w="med" len="med"/>
-                      <a:tailEnd type="none" w="med" len="med"/>
-                    </a:lnL>
-                    <a:lnR w="6350" cap="flat" cmpd="sng" algn="ctr">
-                      <a:solidFill>
-                        <a:srgbClr val="C6C9CD"/>
-                      </a:solidFill>
-                      <a:prstDash val="solid"/>
-                      <a:round/>
-                      <a:headEnd type="none" w="med" len="med"/>
-                      <a:tailEnd type="none" w="med" len="med"/>
-                    </a:lnR>
-                    <a:lnT w="6350" cap="flat" cmpd="sng" algn="ctr">
-                      <a:solidFill>
-                        <a:srgbClr val="C6C9CD"/>
-                      </a:solidFill>
-                      <a:prstDash val="solid"/>
-                      <a:round/>
-                      <a:headEnd type="none" w="med" len="med"/>
-                      <a:tailEnd type="none" w="med" len="med"/>
-                    </a:lnT>
-                    <a:lnB w="6350" cap="flat" cmpd="sng" algn="ctr">
-                      <a:solidFill>
-                        <a:srgbClr val="C6C9CD"/>
-                      </a:solidFill>
-                      <a:prstDash val="solid"/>
-                      <a:round/>
-                      <a:headEnd type="none" w="med" len="med"/>
-                      <a:tailEnd type="none" w="med" len="med"/>
-                    </a:lnB>
-                    <a:solidFill>
-                      <a:srgbClr val="FFFFFF"/>
-                    </a:solidFill>
-                  </a:tcPr>
-                </a:tc>
-                <a:tc>
-                  <a:txBody>
-                    <a:bodyPr>
-                      <a:noAutofit/>
-                    </a:bodyPr>
-                    <a:lstStyle/>
-                    <a:p>
-                      <a:pPr algn="ctr" indent="0" marL="0">
-                        <a:buNone/>
-                      </a:pPr>
-                      <a:r>
-                        <a:rPr lang="en-US" sz="1000" b="1" dirty="0">
+                        <a:rPr lang="en-US" sz="1200" b="1" dirty="0">
                           <a:solidFill>
                             <a:srgbClr val="FD5108"/>
                           </a:solidFill>
@@ -3928,14 +4078,14 @@
                         </a:rPr>
                         <a:t>LATER</a:t>
                       </a:r>
-                      <a:endParaRPr lang="en-US" sz="1000" dirty="0">
+                      <a:endParaRPr lang="en-US" sz="1200" dirty="0">
                         <a:latin typeface="Arial" charset="0"/>
                         <a:ea typeface="Arial" charset="0"/>
                         <a:cs typeface="Arial" charset="0"/>
                       </a:endParaRPr>
                     </a:p>
                   </a:txBody>
-                  <a:tcPr marL="101600" marR="101600" marT="38100" marB="38100" anchor="ctr">
+                  <a:tcPr marL="76200" marR="76200" marT="31750" marB="31750" anchor="ctr">
                     <a:lnL w="6350" cap="flat" cmpd="sng" algn="ctr">
                       <a:solidFill>
                         <a:srgbClr val="C6C9CD"/>
@@ -4103,7 +4253,7 @@
               <a:defRPr spc="0"/>
             </a:pPr>
             <a:r>
-              <a:rPr lang="en-US" sz="1350" b="1" dirty="0" spc="0">
+              <a:rPr lang="en-US" sz="1400" b="1" dirty="0" spc="0">
                 <a:solidFill>
                   <a:srgbClr val="000000"/>
                 </a:solidFill>
@@ -4113,7 +4263,7 @@
               </a:rPr>
               <a:t>ANNUAL CAPACITY POTENTIAL</a:t>
             </a:r>
-            <a:endParaRPr lang="en-US" sz="1350" dirty="0" spc="0"/>
+            <a:endParaRPr lang="en-US" sz="1400" dirty="0" spc="0"/>
           </a:p>
         </p:txBody>
       </p:sp>
@@ -4193,7 +4343,7 @@
               <a:defRPr spc="0"/>
             </a:pPr>
             <a:r>
-              <a:rPr lang="en-US" sz="1350" b="1" dirty="0" spc="0">
+              <a:rPr lang="en-US" sz="1400" b="1" dirty="0" spc="0">
                 <a:solidFill>
                   <a:srgbClr val="000000"/>
                 </a:solidFill>
@@ -4203,7 +4353,7 @@
               </a:rPr>
               <a:t>WORKFLOW VALUE MODEL</a:t>
             </a:r>
-            <a:endParaRPr lang="en-US" sz="1350" dirty="0" spc="0"/>
+            <a:endParaRPr lang="en-US" sz="1400" dirty="0" spc="0"/>
           </a:p>
         </p:txBody>
       </p:sp>
@@ -4260,8 +4410,8 @@
         </p:nvSpPr>
         <p:spPr>
           <a:xfrm>
-            <a:off x="234950" y="3784600"/>
-            <a:ext cx="4318000" cy="241300"/>
+            <a:off x="234950" y="4064000"/>
+            <a:ext cx="4445000" cy="241300"/>
           </a:xfrm>
           <a:prstGeom prst="rect">
             <a:avLst/>
@@ -4283,7 +4433,7 @@
               <a:defRPr spc="0"/>
             </a:pPr>
             <a:r>
-              <a:rPr lang="en-US" sz="1350" b="1" dirty="0" spc="0">
+              <a:rPr lang="en-US" sz="1400" b="1" dirty="0" spc="0">
                 <a:solidFill>
                   <a:srgbClr val="000000"/>
                 </a:solidFill>
@@ -4293,7 +4443,7 @@
               </a:rPr>
               <a:t>WHY RESEARCH WINS FIRST</a:t>
             </a:r>
-            <a:endParaRPr lang="en-US" sz="1350" dirty="0" spc="0"/>
+            <a:endParaRPr lang="en-US" sz="1400" dirty="0" spc="0"/>
           </a:p>
         </p:txBody>
       </p:sp>
@@ -4305,8 +4455,8 @@
         </p:nvSpPr>
         <p:spPr>
           <a:xfrm>
-            <a:off x="901700" y="4108450"/>
-            <a:ext cx="3429000" cy="254000"/>
+            <a:off x="1016000" y="4311650"/>
+            <a:ext cx="3505200" cy="266700"/>
           </a:xfrm>
           <a:prstGeom prst="rect">
             <a:avLst/>
@@ -4328,7 +4478,7 @@
               <a:defRPr spc="0"/>
             </a:pPr>
             <a:r>
-              <a:rPr lang="en-US" sz="1200" dirty="0" spc="0">
+              <a:rPr lang="en-US" sz="1400" dirty="0" spc="0">
                 <a:solidFill>
                   <a:srgbClr val="000000"/>
                 </a:solidFill>
@@ -4338,7 +4488,7 @@
               </a:rPr>
               <a:t>Frequent, comparable tasks</a:t>
             </a:r>
-            <a:endParaRPr lang="en-US" sz="1200" dirty="0" spc="0"/>
+            <a:endParaRPr lang="en-US" sz="1400" dirty="0" spc="0"/>
           </a:p>
         </p:txBody>
       </p:sp>
@@ -4350,8 +4500,8 @@
         </p:nvSpPr>
         <p:spPr>
           <a:xfrm>
-            <a:off x="901700" y="4552950"/>
-            <a:ext cx="3429000" cy="254000"/>
+            <a:off x="1016000" y="4806950"/>
+            <a:ext cx="3505200" cy="266700"/>
           </a:xfrm>
           <a:prstGeom prst="rect">
             <a:avLst/>
@@ -4373,7 +4523,7 @@
               <a:defRPr spc="0"/>
             </a:pPr>
             <a:r>
-              <a:rPr lang="en-US" sz="1200" dirty="0" spc="0">
+              <a:rPr lang="en-US" sz="1400" dirty="0" spc="0">
                 <a:solidFill>
                   <a:srgbClr val="000000"/>
                 </a:solidFill>
@@ -4383,7 +4533,7 @@
               </a:rPr>
               <a:t>A bounded source corpus</a:t>
             </a:r>
-            <a:endParaRPr lang="en-US" sz="1200" dirty="0" spc="0"/>
+            <a:endParaRPr lang="en-US" sz="1400" dirty="0" spc="0"/>
           </a:p>
         </p:txBody>
       </p:sp>
@@ -4395,8 +4545,8 @@
         </p:nvSpPr>
         <p:spPr>
           <a:xfrm>
-            <a:off x="901700" y="4997450"/>
-            <a:ext cx="3429000" cy="254000"/>
+            <a:off x="1016000" y="5302250"/>
+            <a:ext cx="3505200" cy="266700"/>
           </a:xfrm>
           <a:prstGeom prst="rect">
             <a:avLst/>
@@ -4418,7 +4568,7 @@
               <a:defRPr spc="0"/>
             </a:pPr>
             <a:r>
-              <a:rPr lang="en-US" sz="1200" dirty="0" spc="0">
+              <a:rPr lang="en-US" sz="1400" dirty="0" spc="0">
                 <a:solidFill>
                   <a:srgbClr val="000000"/>
                 </a:solidFill>
@@ -4428,7 +4578,7 @@
               </a:rPr>
               <a:t>A named expert reviewer</a:t>
             </a:r>
-            <a:endParaRPr lang="en-US" sz="1200" dirty="0" spc="0"/>
+            <a:endParaRPr lang="en-US" sz="1400" dirty="0" spc="0"/>
           </a:p>
         </p:txBody>
       </p:sp>
@@ -4440,7 +4590,7 @@
         </p:nvSpPr>
         <p:spPr>
           <a:xfrm>
-            <a:off x="4826000" y="3708400"/>
+            <a:off x="4826000" y="3556000"/>
             <a:ext cx="7048500" cy="241300"/>
           </a:xfrm>
           <a:prstGeom prst="rect">
@@ -4463,7 +4613,7 @@
               <a:defRPr spc="0"/>
             </a:pPr>
             <a:r>
-              <a:rPr lang="en-US" sz="1350" b="1" dirty="0" spc="0">
+              <a:rPr lang="en-US" sz="1400" b="1" dirty="0" spc="0">
                 <a:solidFill>
                   <a:srgbClr val="000000"/>
                 </a:solidFill>
@@ -4473,7 +4623,7 @@
               </a:rPr>
               <a:t>PILOT SEQUENCING TEST</a:t>
             </a:r>
-            <a:endParaRPr lang="en-US" sz="1350" dirty="0" spc="0"/>
+            <a:endParaRPr lang="en-US" sz="1400" dirty="0" spc="0"/>
           </a:p>
         </p:txBody>
       </p:sp>
@@ -4485,8 +4635,8 @@
         </p:nvSpPr>
         <p:spPr>
           <a:xfrm>
-            <a:off x="4826000" y="5530850"/>
-            <a:ext cx="5397500" cy="190500"/>
+            <a:off x="4826000" y="5486400"/>
+            <a:ext cx="6985000" cy="177800"/>
           </a:xfrm>
           <a:prstGeom prst="rect">
             <a:avLst/>
@@ -4508,7 +4658,7 @@
               <a:defRPr spc="0"/>
             </a:pPr>
             <a:r>
-              <a:rPr lang="en-US" sz="1000" dirty="0" spc="0">
+              <a:rPr lang="en-US" sz="1100" dirty="0" spc="0">
                 <a:solidFill>
                   <a:srgbClr val="000000"/>
                 </a:solidFill>
@@ -4518,7 +4668,7 @@
               </a:rPr>
               <a:t>Check task overlap before adding workflow benefits.</a:t>
             </a:r>
-            <a:endParaRPr lang="en-US" sz="1000" dirty="0" spc="0"/>
+            <a:endParaRPr lang="en-US" sz="1100" dirty="0" spc="0"/>
           </a:p>
         </p:txBody>
       </p:sp>
@@ -4634,8 +4784,8 @@
         </p:blipFill>
         <p:spPr>
           <a:xfrm>
-            <a:off x="381000" y="4108450"/>
-            <a:ext cx="260350" cy="260350"/>
+            <a:off x="355600" y="4273550"/>
+            <a:ext cx="361950" cy="361950"/>
           </a:xfrm>
           <a:prstGeom prst="rect">
             <a:avLst/>
@@ -4664,8 +4814,8 @@
         </p:blipFill>
         <p:spPr>
           <a:xfrm>
-            <a:off x="381000" y="4552950"/>
-            <a:ext cx="260350" cy="260350"/>
+            <a:off x="355600" y="4768850"/>
+            <a:ext cx="361950" cy="361950"/>
           </a:xfrm>
           <a:prstGeom prst="rect">
             <a:avLst/>
@@ -4694,8 +4844,8 @@
         </p:blipFill>
         <p:spPr>
           <a:xfrm>
-            <a:off x="381000" y="4997450"/>
-            <a:ext cx="260350" cy="260350"/>
+            <a:off x="355600" y="5264150"/>
+            <a:ext cx="361950" cy="361950"/>
           </a:xfrm>
           <a:prstGeom prst="rect">
             <a:avLst/>
